--- a/docs/ATLAS_slides.pptx
+++ b/docs/ATLAS_slides.pptx
@@ -17,9 +17,11 @@
     <p:sldId id="265" r:id="rId11"/>
     <p:sldId id="266" r:id="rId12"/>
     <p:sldId id="267" r:id="rId13"/>
+    <p:sldId id="268" r:id="rId14"/>
+    <p:sldId id="269" r:id="rId15"/>
   </p:sldIdLst>
   <p:notesMasterIdLst>
-    <p:notesMasterId r:id="rId14"/>
+    <p:notesMasterId r:id="rId16"/>
   </p:notesMasterIdLst>
   <p:sldSz cx="12192000" cy="6858000"/>
   <p:notesSz cx="6858000" cy="12192000"/>
@@ -118,32 +120,34 @@
   <p:extLst>
     <p:ext uri="{521415D9-36F7-43E2-AB2F-B90AF26B5E84}">
       <p14:sectionLst xmlns:p14="http://schemas.microsoft.com/office/powerpoint/2010/main">
-        <p14:section name="Introduction" id="{08df8840-8206-e000-abfc-776fb969e19a}">
+        <p14:section name="Introduction" id="{14fc261e-ba6b-af47-6dee-534a6e633538}">
           <p14:sldIdLst>
             <p14:sldId id="256"/>
             <p14:sldId id="257"/>
           </p14:sldIdLst>
         </p14:section>
-        <p14:section name="Method" id="{66adce3f-6f63-136f-eda8-90f29c533418}">
+        <p14:section name="Method" id="{dad387e1-d63a-2243-af8d-8ac0dc199147}">
           <p14:sldIdLst>
             <p14:sldId id="258"/>
             <p14:sldId id="259"/>
           </p14:sldIdLst>
         </p14:section>
-        <p14:section name="Evidence" id="{751d8542-ed87-7e80-2784-a6e2297b034b}">
+        <p14:section name="Evidence" id="{c1d98aca-5bb9-450e-d809-7ce09bb02f9d}">
           <p14:sldIdLst>
             <p14:sldId id="260"/>
             <p14:sldId id="261"/>
             <p14:sldId id="262"/>
             <p14:sldId id="263"/>
             <p14:sldId id="264"/>
+            <p14:sldId id="265"/>
+            <p14:sldId id="266"/>
           </p14:sldIdLst>
         </p14:section>
-        <p14:section name="Limits and production" id="{fdc228be-904a-6647-b193-92e661414abb}">
+        <p14:section name="Limits and production" id="{cb2deb24-5095-a1df-2fa6-3d78e9367529}">
           <p14:sldIdLst>
-            <p14:sldId id="265"/>
-            <p14:sldId id="266"/>
             <p14:sldId id="267"/>
+            <p14:sldId id="268"/>
+            <p14:sldId id="269"/>
           </p14:sldIdLst>
         </p14:section>
       </p14:sectionLst>
@@ -511,6 +515,327 @@
 </file>
 
 <file path=ppt/charts/chart2.xml><?xml version="1.0" encoding="utf-8"?>
+<c:chartSpace xmlns:c="http://schemas.openxmlformats.org/drawingml/2006/chart" xmlns:a="http://schemas.openxmlformats.org/drawingml/2006/main" xmlns:r="http://schemas.openxmlformats.org/officeDocument/2006/relationships">
+  <c:date1904 val="0"/>
+  <c:roundedCorners val="1"/>
+  <c:chart>
+    <c:title>
+      <c:tx>
+        <c:rich>
+          <a:bodyPr/>
+          <a:lstStyle/>
+          <a:p>
+            <a:pPr>
+              <a:defRPr sz="1400" b="0" i="0" u="none" strike="noStrike">
+                <a:solidFill>
+                  <a:srgbClr val="3A4256"/>
+                </a:solidFill>
+                <a:latin typeface="+mn-lt"/>
+              </a:defRPr>
+            </a:pPr>
+            <a:r>
+              <a:rPr sz="1400" b="0" i="0" u="none" strike="noStrike">
+                <a:solidFill>
+                  <a:srgbClr val="3A4256"/>
+                </a:solidFill>
+                <a:latin typeface="+mn-lt"/>
+              </a:rPr>
+              <a:t>Task success under drift (10 seeds, 3000 tasks each)</a:t>
+            </a:r>
+          </a:p>
+        </c:rich>
+      </c:tx>
+      <c:layout/>
+      <c:overlay val="0"/>
+    </c:title>
+    <c:autoTitleDeleted val="0"/>
+    <c:plotArea>
+      <c:layout/>
+      <c:barChart>
+        <c:barDir val="bar"/>
+        <c:grouping val="clustered"/>
+        <c:varyColors val="0"/>
+        <c:ser>
+          <c:idx val="0"/>
+          <c:order val="0"/>
+          <c:tx>
+            <c:strRef>
+              <c:f>Sheet1!$B$1</c:f>
+              <c:strCache>
+                <c:ptCount val="1"/>
+                <c:pt idx="0">
+                  <c:v>Task success (E8, drift)</c:v>
+                </c:pt>
+              </c:strCache>
+            </c:strRef>
+          </c:tx>
+          <c:spPr>
+            <a:solidFill>
+              <a:srgbClr val="C8553D"/>
+            </a:solidFill>
+            <a:effectLst/>
+          </c:spPr>
+          <c:invertIfNegative val="0"/>
+          <c:dLbls>
+            <c:numFmt formatCode="0.000" sourceLinked="0"/>
+            <c:txPr>
+              <a:bodyPr/>
+              <a:lstStyle/>
+              <a:p>
+                <a:pPr>
+                  <a:defRPr b="0" i="0" strike="noStrike" sz="1100" u="none">
+                    <a:solidFill>
+                      <a:srgbClr val="3A4256"/>
+                    </a:solidFill>
+                    <a:latin typeface="+mn-lt"/>
+                  </a:defRPr>
+                </a:pPr>
+              </a:p>
+            </c:txPr>
+            <c:showLegendKey val="0"/>
+            <c:showVal val="1"/>
+            <c:showCatName val="0"/>
+            <c:showSerName val="0"/>
+            <c:showPercent val="0"/>
+            <c:showBubbleSize val="0"/>
+            <c:showLeaderLines val="0"/>
+          </c:dLbls>
+          <c:dPt>
+            <c:idx val="0"/>
+            <c:invertIfNegative val="0"/>
+            <c:bubble3D val="0"/>
+            <c:spPr>
+              <a:solidFill>
+                <a:srgbClr val="C8553D"/>
+              </a:solidFill>
+              <a:effectLst/>
+            </c:spPr>
+          </c:dPt>
+          <c:dPt>
+            <c:idx val="1"/>
+            <c:invertIfNegative val="0"/>
+            <c:bubble3D val="0"/>
+            <c:spPr>
+              <a:solidFill>
+                <a:srgbClr val="8A94A6"/>
+              </a:solidFill>
+              <a:effectLst/>
+            </c:spPr>
+          </c:dPt>
+          <c:dPt>
+            <c:idx val="2"/>
+            <c:invertIfNegative val="0"/>
+            <c:bubble3D val="0"/>
+            <c:spPr>
+              <a:solidFill>
+                <a:srgbClr val="8A94A6"/>
+              </a:solidFill>
+              <a:effectLst/>
+            </c:spPr>
+          </c:dPt>
+          <c:dPt>
+            <c:idx val="3"/>
+            <c:invertIfNegative val="0"/>
+            <c:bubble3D val="0"/>
+            <c:spPr>
+              <a:solidFill>
+                <a:srgbClr val="E8A33D"/>
+              </a:solidFill>
+              <a:effectLst/>
+            </c:spPr>
+          </c:dPt>
+          <c:cat>
+            <c:multiLvlStrRef>
+              <c:f>Sheet1!$A$2:$A$5</c:f>
+              <c:multiLvlStrCache>
+                <c:ptCount val="4"/>
+                <c:lvl>
+                  <c:pt idx="0">
+                    <c:v>B6 LLM router</c:v>
+                  </c:pt>
+                  <c:pt idx="1">
+                    <c:v>B2 Supervised</c:v>
+                  </c:pt>
+                  <c:pt idx="2">
+                    <c:v>B5 Bandit</c:v>
+                  </c:pt>
+                  <c:pt idx="3">
+                    <c:v>ATLAS</c:v>
+                  </c:pt>
+                </c:lvl>
+              </c:multiLvlStrCache>
+            </c:multiLvlStrRef>
+          </c:cat>
+          <c:val>
+            <c:numRef>
+              <c:f>Sheet1!$B$2:$B$5</c:f>
+              <c:numCache>
+                <c:formatCode>General</c:formatCode>
+                <c:ptCount val="4"/>
+                <c:pt idx="0">
+                  <c:v>0.419</c:v>
+                </c:pt>
+                <c:pt idx="1">
+                  <c:v>0.725</c:v>
+                </c:pt>
+                <c:pt idx="2">
+                  <c:v>0.805</c:v>
+                </c:pt>
+                <c:pt idx="3">
+                  <c:v>0.89</c:v>
+                </c:pt>
+              </c:numCache>
+            </c:numRef>
+          </c:val>
+        </c:ser>
+        <c:dLbls>
+          <c:numFmt formatCode="0.000" sourceLinked="0"/>
+          <c:txPr>
+            <a:bodyPr/>
+            <a:lstStyle/>
+            <a:p>
+              <a:pPr>
+                <a:defRPr b="0" i="0" strike="noStrike" sz="1100" u="none">
+                  <a:solidFill>
+                    <a:srgbClr val="3A4256"/>
+                  </a:solidFill>
+                  <a:latin typeface="+mn-lt"/>
+                </a:defRPr>
+              </a:pPr>
+            </a:p>
+          </c:txPr>
+          <c:showLegendKey val="0"/>
+          <c:showVal val="1"/>
+          <c:showCatName val="0"/>
+          <c:showSerName val="0"/>
+          <c:showPercent val="0"/>
+          <c:showBubbleSize val="0"/>
+          <c:showLeaderLines val="0"/>
+        </c:dLbls>
+        <c:gapWidth val="45"/>
+        <c:overlap val="0"/>
+        <c:axId val="2094734554"/>
+        <c:axId val="2094734552"/>
+        <c:axId val="2094734556"/>
+      </c:barChart>
+      <c:catAx>
+        <c:axId val="2094734554"/>
+        <c:scaling>
+          <c:orientation val="minMax"/>
+        </c:scaling>
+        <c:delete val="0"/>
+        <c:axPos val="l"/>
+        <c:numFmt formatCode="General" sourceLinked="1"/>
+        <c:majorTickMark val="out"/>
+        <c:minorTickMark val="none"/>
+        <c:tickLblPos val="nextTo"/>
+        <c:spPr>
+          <a:ln w="12700" cap="flat">
+            <a:solidFill>
+              <a:srgbClr val="888888"/>
+            </a:solidFill>
+            <a:prstDash val="solid"/>
+            <a:round/>
+          </a:ln>
+        </c:spPr>
+        <c:txPr>
+          <a:bodyPr/>
+          <a:lstStyle/>
+          <a:p>
+            <a:pPr>
+              <a:defRPr sz="1200" b="0" i="0" u="none" strike="noStrike">
+                <a:solidFill>
+                  <a:srgbClr val="5F6B7F"/>
+                </a:solidFill>
+                <a:latin typeface="+mn-lt"/>
+              </a:defRPr>
+            </a:pPr>
+            <a:endParaRPr lang="en-US"/>
+          </a:p>
+        </c:txPr>
+        <c:crossAx val="2094734552"/>
+        <c:crosses val="autoZero"/>
+        <c:auto val="1"/>
+        <c:lblAlgn val="ctr"/>
+        <c:noMultiLvlLbl val="1"/>
+      </c:catAx>
+      <c:valAx>
+        <c:axId val="2094734552"/>
+        <c:scaling>
+          <c:orientation val="minMax"/>
+          <c:max val="1"/>
+          <c:min val="0"/>
+        </c:scaling>
+        <c:delete val="0"/>
+        <c:axPos val="b"/>
+        <c:majorGridlines>
+          <c:spPr>
+            <a:ln w="9525" cap="flat">
+              <a:solidFill>
+                <a:srgbClr val="D9DEE6"/>
+              </a:solidFill>
+              <a:prstDash val="solid"/>
+              <a:round/>
+            </a:ln>
+          </c:spPr>
+        </c:majorGridlines>
+        <c:numFmt formatCode="0.0" sourceLinked="0"/>
+        <c:majorTickMark val="out"/>
+        <c:minorTickMark val="none"/>
+        <c:tickLblPos val="low"/>
+        <c:spPr>
+          <a:ln w="12700" cap="flat">
+            <a:solidFill>
+              <a:srgbClr val="888888"/>
+            </a:solidFill>
+            <a:prstDash val="solid"/>
+            <a:round/>
+          </a:ln>
+        </c:spPr>
+        <c:txPr>
+          <a:bodyPr/>
+          <a:lstStyle/>
+          <a:p>
+            <a:pPr>
+              <a:defRPr sz="1100" b="0" i="0" u="none" strike="noStrike">
+                <a:solidFill>
+                  <a:srgbClr val="5F6B7F"/>
+                </a:solidFill>
+                <a:latin typeface="+mn-lt"/>
+              </a:defRPr>
+            </a:pPr>
+            <a:endParaRPr lang="en-US"/>
+          </a:p>
+        </c:txPr>
+        <c:crossAx val="2094734554"/>
+        <c:crosses val="autoZero"/>
+        <c:crossBetween val="between"/>
+      </c:valAx>
+      <c:spPr>
+        <a:noFill/>
+        <a:ln>
+          <a:noFill/>
+        </a:ln>
+        <a:effectLst/>
+      </c:spPr>
+    </c:plotArea>
+    <c:plotVisOnly val="1"/>
+    <c:dispBlanksAs val="span"/>
+  </c:chart>
+  <c:spPr>
+    <a:noFill/>
+    <a:ln>
+      <a:noFill/>
+    </a:ln>
+    <a:effectLst/>
+  </c:spPr>
+  <c:externalData r:id="rId1">
+    <c:autoUpdate val="0"/>
+  </c:externalData>
+</c:chartSpace>
+</file>
+
+<file path=ppt/charts/chart3.xml><?xml version="1.0" encoding="utf-8"?>
 <c:chartSpace xmlns:c="http://schemas.openxmlformats.org/drawingml/2006/chart" xmlns:a="http://schemas.openxmlformats.org/drawingml/2006/main" xmlns:r="http://schemas.openxmlformats.org/officeDocument/2006/relationships">
   <c:date1904 val="0"/>
   <c:roundedCorners val="1"/>
@@ -879,7 +1204,7 @@
 </c:chartSpace>
 </file>
 
-<file path=ppt/charts/chart3.xml><?xml version="1.0" encoding="utf-8"?>
+<file path=ppt/charts/chart4.xml><?xml version="1.0" encoding="utf-8"?>
 <c:chartSpace xmlns:c="http://schemas.openxmlformats.org/drawingml/2006/chart" xmlns:a="http://schemas.openxmlformats.org/drawingml/2006/main" xmlns:r="http://schemas.openxmlformats.org/officeDocument/2006/relationships">
   <c:date1904 val="0"/>
   <c:roundedCorners val="1"/>
@@ -1372,7 +1697,7 @@
 </c:chartSpace>
 </file>
 
-<file path=ppt/charts/chart4.xml><?xml version="1.0" encoding="utf-8"?>
+<file path=ppt/charts/chart5.xml><?xml version="1.0" encoding="utf-8"?>
 <c:chartSpace xmlns:c="http://schemas.openxmlformats.org/drawingml/2006/chart" xmlns:a="http://schemas.openxmlformats.org/drawingml/2006/main" xmlns:r="http://schemas.openxmlformats.org/officeDocument/2006/relationships">
   <c:date1904 val="0"/>
   <c:roundedCorners val="1"/>
@@ -2278,7 +2603,7 @@
           <a:p>
             <a:r>
               <a:rPr lang="en-US" dirty="0"/>
-              <a:t>These are the results a reviewer should hear before quoting any number. The scaling hypothesis failed and stays failed; the fix that did help, censored-feedback correction, improved accuracy but raised cost. Everything here is reported in the repository README.</a:t>
+              <a:t>Each bar is the success difference between full ATLAS and ATLAS with one component removed. Negative values mean removing the component raised success, at a higher cost: those components exist to save money, not to raise accuracy.</a:t>
             </a:r>
             <a:endParaRPr lang="en-US" dirty="0"/>
           </a:p>
@@ -2366,7 +2691,7 @@
           <a:p>
             <a:r>
               <a:rPr lang="en-US" dirty="0"/>
-              <a:t>The same router that runs in the experiments runs behind the API. Feedback from callers updates answer quality; execution statistics are learned on every call. The CI pipeline runs lint, the test suite, a quick benchmark and a container smoke test.</a:t>
+              <a:t>E7 asks whether caching can be learned rather than tuned. A fixed time-to-live cache saves the most money but serves stale answers for fast-changing families. The learned cache treats a cached result as just another candidate tool, so the same constrained choice decides when reuse is safe. It learns, per family and age bucket, how often cached answers are still right. With it, ATLAS is cheaper per success than every learned baseline under drift, but note the baselines were not given a cache.</a:t>
             </a:r>
             <a:endParaRPr lang="en-US" dirty="0"/>
           </a:p>
@@ -2454,7 +2779,7 @@
           <a:p>
             <a:r>
               <a:rPr lang="en-US" dirty="0"/>
-              <a:t>Close on the three findings and the open problem. All experiments are reproducible from the repository with fixed seeds; the README lists the commands.</a:t>
+              <a:t>These are the results a reviewer should hear before quoting any number. The scaling hypothesis failed and stays failed; the fix that did help, censored-feedback correction, improved accuracy but raised cost. Everything here is reported in the repository README.</a:t>
             </a:r>
             <a:endParaRPr lang="en-US" dirty="0"/>
           </a:p>
@@ -2478,6 +2803,182 @@
             <a:fld id="{F7021451-1387-4CA6-816F-3879F97B5CBC}" type="slidenum">
               <a:rPr lang="en-US"/>
               <a:t>12</a:t>
+            </a:fld>
+            <a:endParaRPr lang="en-US"/>
+          </a:p>
+        </p:txBody>
+      </p:sp>
+    </p:spTree>
+    <p:extLst>
+      <p:ext uri="{BB962C8B-B14F-4D97-AF65-F5344CB8AC3E}">
+        <p14:creationId xmlns:p14="http://schemas.microsoft.com/office/powerpoint/2010/main" val="1024086991"/>
+      </p:ext>
+    </p:extLst>
+  </p:cSld>
+  <p:clrMapOvr>
+    <a:masterClrMapping/>
+  </p:clrMapOvr>
+</p:notes>
+</file>
+
+<file path=ppt/notesSlides/notesSlide13.xml><?xml version="1.0" encoding="utf-8"?>
+<p:notes xmlns:a="http://schemas.openxmlformats.org/drawingml/2006/main" xmlns:r="http://schemas.openxmlformats.org/officeDocument/2006/relationships" xmlns:p="http://schemas.openxmlformats.org/presentationml/2006/main">
+  <p:cSld>
+    <p:spTree>
+      <p:nvGrpSpPr>
+        <p:cNvPr id="1" name=""/>
+        <p:cNvGrpSpPr/>
+        <p:nvPr/>
+      </p:nvGrpSpPr>
+      <p:grpSpPr>
+        <a:xfrm>
+          <a:off x="0" y="0"/>
+          <a:ext cx="0" cy="0"/>
+          <a:chOff x="0" y="0"/>
+          <a:chExt cx="0" cy="0"/>
+        </a:xfrm>
+      </p:grpSpPr>
+      <p:sp>
+        <p:nvSpPr>
+          <p:cNvPr id="2" name="Slide Image Placeholder 1"/>
+          <p:cNvSpPr>
+            <a:spLocks noGrp="1" noRot="1" noChangeAspect="1"/>
+          </p:cNvSpPr>
+          <p:nvPr>
+            <p:ph type="sldImg"/>
+          </p:nvPr>
+        </p:nvSpPr>
+        <p:spPr/>
+      </p:sp>
+      <p:sp>
+        <p:nvSpPr>
+          <p:cNvPr id="3" name="Notes Placeholder 2"/>
+          <p:cNvSpPr>
+            <a:spLocks noGrp="1"/>
+          </p:cNvSpPr>
+          <p:nvPr>
+            <p:ph type="body" idx="1"/>
+          </p:nvPr>
+        </p:nvSpPr>
+        <p:spPr/>
+        <p:txBody>
+          <a:bodyPr/>
+          <a:lstStyle/>
+          <a:p>
+            <a:r>
+              <a:rPr lang="en-US" dirty="0"/>
+              <a:t>The same router that runs in the experiments runs behind the API. Feedback from callers updates answer quality; execution statistics are learned on every call. The CI pipeline runs lint, the test suite, a quick benchmark and a container smoke test.</a:t>
+            </a:r>
+            <a:endParaRPr lang="en-US" dirty="0"/>
+          </a:p>
+        </p:txBody>
+      </p:sp>
+      <p:sp>
+        <p:nvSpPr>
+          <p:cNvPr id="4" name="Slide Number Placeholder 3"/>
+          <p:cNvSpPr>
+            <a:spLocks noGrp="1"/>
+          </p:cNvSpPr>
+          <p:nvPr>
+            <p:ph type="sldNum" sz="quarter" idx="10"/>
+          </p:nvPr>
+        </p:nvSpPr>
+        <p:spPr/>
+        <p:txBody>
+          <a:bodyPr/>
+          <a:lstStyle/>
+          <a:p>
+            <a:fld id="{F7021451-1387-4CA6-816F-3879F97B5CBC}" type="slidenum">
+              <a:rPr lang="en-US"/>
+              <a:t>13</a:t>
+            </a:fld>
+            <a:endParaRPr lang="en-US"/>
+          </a:p>
+        </p:txBody>
+      </p:sp>
+    </p:spTree>
+    <p:extLst>
+      <p:ext uri="{BB962C8B-B14F-4D97-AF65-F5344CB8AC3E}">
+        <p14:creationId xmlns:p14="http://schemas.microsoft.com/office/powerpoint/2010/main" val="1024086991"/>
+      </p:ext>
+    </p:extLst>
+  </p:cSld>
+  <p:clrMapOvr>
+    <a:masterClrMapping/>
+  </p:clrMapOvr>
+</p:notes>
+</file>
+
+<file path=ppt/notesSlides/notesSlide14.xml><?xml version="1.0" encoding="utf-8"?>
+<p:notes xmlns:a="http://schemas.openxmlformats.org/drawingml/2006/main" xmlns:r="http://schemas.openxmlformats.org/officeDocument/2006/relationships" xmlns:p="http://schemas.openxmlformats.org/presentationml/2006/main">
+  <p:cSld>
+    <p:spTree>
+      <p:nvGrpSpPr>
+        <p:cNvPr id="1" name=""/>
+        <p:cNvGrpSpPr/>
+        <p:nvPr/>
+      </p:nvGrpSpPr>
+      <p:grpSpPr>
+        <a:xfrm>
+          <a:off x="0" y="0"/>
+          <a:ext cx="0" cy="0"/>
+          <a:chOff x="0" y="0"/>
+          <a:chExt cx="0" cy="0"/>
+        </a:xfrm>
+      </p:grpSpPr>
+      <p:sp>
+        <p:nvSpPr>
+          <p:cNvPr id="2" name="Slide Image Placeholder 1"/>
+          <p:cNvSpPr>
+            <a:spLocks noGrp="1" noRot="1" noChangeAspect="1"/>
+          </p:cNvSpPr>
+          <p:nvPr>
+            <p:ph type="sldImg"/>
+          </p:nvPr>
+        </p:nvSpPr>
+        <p:spPr/>
+      </p:sp>
+      <p:sp>
+        <p:nvSpPr>
+          <p:cNvPr id="3" name="Notes Placeholder 2"/>
+          <p:cNvSpPr>
+            <a:spLocks noGrp="1"/>
+          </p:cNvSpPr>
+          <p:nvPr>
+            <p:ph type="body" idx="1"/>
+          </p:nvPr>
+        </p:nvSpPr>
+        <p:spPr/>
+        <p:txBody>
+          <a:bodyPr/>
+          <a:lstStyle/>
+          <a:p>
+            <a:r>
+              <a:rPr lang="en-US" dirty="0"/>
+              <a:t>Close on the three findings and the open problem. All experiments are reproducible from the repository with fixed seeds; the README lists the commands.</a:t>
+            </a:r>
+            <a:endParaRPr lang="en-US" dirty="0"/>
+          </a:p>
+        </p:txBody>
+      </p:sp>
+      <p:sp>
+        <p:nvSpPr>
+          <p:cNvPr id="4" name="Slide Number Placeholder 3"/>
+          <p:cNvSpPr>
+            <a:spLocks noGrp="1"/>
+          </p:cNvSpPr>
+          <p:nvPr>
+            <p:ph type="sldNum" sz="quarter" idx="10"/>
+          </p:nvPr>
+        </p:nvSpPr>
+        <p:spPr/>
+        <p:txBody>
+          <a:bodyPr/>
+          <a:lstStyle/>
+          <a:p>
+            <a:fld id="{F7021451-1387-4CA6-816F-3879F97B5CBC}" type="slidenum">
+              <a:rPr lang="en-US"/>
+              <a:t>14</a:t>
             </a:fld>
             <a:endParaRPr lang="en-US"/>
           </a:p>
@@ -2894,7 +3395,7 @@
           <a:p>
             <a:r>
               <a:rPr lang="en-US" dirty="0"/>
-              <a:t>This is the honest framing of cost. Costs are simulated per-call prices. With the default quality target, ATLAS spends more to get more right. Lowering the target moves it along the amber curve; at 0.6 or 0.7 it dominates all learned baselines on both success and cost, but that operating point was chosen after seeing the sweep.</a:t>
+              <a:t>E8 tests the common 'LLM-powered query router' pattern: show the model the tool descriptions and let it name the tools. With a small local model it picks plausible but insufficient or excessive sets, and it never learns from outcomes, so it cannot react to drift. Stationary results are the same picture: 0.426 vs 0.908 for ATLAS. The caveat is model size: this is a 0.5B model, the largest that fit in the available disk and memory.</a:t>
             </a:r>
             <a:endParaRPr lang="en-US" dirty="0"/>
           </a:p>
@@ -2982,7 +3483,7 @@
           <a:p>
             <a:r>
               <a:rPr lang="en-US" dirty="0"/>
-              <a:t>The live evaluation answers the 'it is only a simulator' objection for tool behaviour. Tool outputs, errors and execution time are real; the data is generated so that ground truth is known. During the incident ATLAS learns the primary is failing and switches to the replica, which is correct for every quarter except the latest. The contextual bandit fails calculation questions entirely because it cannot plan a SQL-then-compute dependency.</a:t>
+              <a:t>This is the honest framing of cost. Costs are simulated per-call prices. With the default quality target, ATLAS spends more to get more right. Lowering the target moves it along the amber curve; at 0.6 or 0.7 it dominates all learned baselines on both success and cost, but that operating point was chosen after seeing the sweep.</a:t>
             </a:r>
             <a:endParaRPr lang="en-US" dirty="0"/>
           </a:p>
@@ -3070,7 +3571,7 @@
           <a:p>
             <a:r>
               <a:rPr lang="en-US" dirty="0"/>
-              <a:t>E6 swaps the understanding stage under the same routers. ATLAS stays 5 to 8 points ahead whether understanding is perfect, corrupted or poor. The 0.5B local LLM with grammar-constrained decoding is the weakest option tried; a larger model did not fit on the available machine.</a:t>
+              <a:t>The live evaluation answers the 'it is only a simulator' objection for tool behaviour. Tool outputs, errors and execution time are real; the data is generated so that ground truth is known. During the incident ATLAS learns the primary is failing and switches to the replica, which is correct for every quarter except the latest. The contextual bandit fails calculation questions entirely because it cannot plan a SQL-then-compute dependency.</a:t>
             </a:r>
             <a:endParaRPr lang="en-US" dirty="0"/>
           </a:p>
@@ -3158,7 +3659,7 @@
           <a:p>
             <a:r>
               <a:rPr lang="en-US" dirty="0"/>
-              <a:t>Each bar is the success difference between full ATLAS and ATLAS with one component removed. Negative values mean removing the component raised success, at a higher cost: those components exist to save money, not to raise accuracy.</a:t>
+              <a:t>E6 swaps the understanding stage under the same routers. ATLAS stays 5 to 8 points ahead whether understanding is perfect, corrupted or poor. The 0.5B local LLM with grammar-constrained decoding is the weakest option tried; a larger model did not fit on the available machine.</a:t>
             </a:r>
             <a:endParaRPr lang="en-US" dirty="0"/>
           </a:p>
@@ -4134,86 +4635,38 @@
                 <a:ea typeface="Cambria" pitchFamily="34" charset="-122"/>
                 <a:cs typeface="Cambria" pitchFamily="34" charset="-120"/>
               </a:rPr>
-              <a:t>What did not work, stated plainly</a:t>
+              <a:t>Plan structure does most of the work</a:t>
             </a:r>
             <a:endParaRPr lang="en-US" sz="3200" dirty="0"/>
           </a:p>
         </p:txBody>
       </p:sp>
-      <p:sp>
-        <p:nvSpPr>
-          <p:cNvPr id="3" name="badge !"/>
-          <p:cNvSpPr/>
-          <p:nvPr/>
-        </p:nvSpPr>
-        <p:spPr>
-          <a:xfrm>
-            <a:off x="640080" y="1417320"/>
-            <a:ext cx="502920" cy="502920"/>
-          </a:xfrm>
-          <a:prstGeom prst="ellipse">
-            <a:avLst/>
-          </a:prstGeom>
-          <a:solidFill>
-            <a:srgbClr val="C8553D"/>
-          </a:solidFill>
-          <a:ln w="12700">
-            <a:solidFill>
-              <a:srgbClr val="C8553D"/>
-            </a:solidFill>
-            <a:prstDash val="solid"/>
-          </a:ln>
-        </p:spPr>
-      </p:sp>
-      <p:sp>
-        <p:nvSpPr>
-          <p:cNvPr id="4" name="Text 2"/>
-          <p:cNvSpPr txBox="1"/>
-          <p:nvPr/>
-        </p:nvSpPr>
-        <p:spPr>
-          <a:xfrm>
-            <a:off x="640080" y="1417320"/>
-            <a:ext cx="502920" cy="502920"/>
-          </a:xfrm>
-          <a:prstGeom prst="rect">
-            <a:avLst/>
-          </a:prstGeom>
-          <a:noFill/>
-          <a:ln/>
-        </p:spPr>
-        <p:txBody>
-          <a:bodyPr wrap="square" lIns="0" tIns="0" rIns="0" bIns="0" rtlCol="0" anchor="ctr"/>
-          <a:lstStyle/>
-          <a:p>
-            <a:pPr algn="ctr" indent="0" marL="0">
-              <a:buNone/>
-            </a:pPr>
-            <a:r>
-              <a:rPr lang="en-US" sz="1600" b="1" dirty="0">
-                <a:solidFill>
-                  <a:srgbClr val="FFFFFF"/>
-                </a:solidFill>
-                <a:latin typeface="Cambria" pitchFamily="34" charset="0"/>
-                <a:ea typeface="Cambria" pitchFamily="34" charset="-122"/>
-                <a:cs typeface="Cambria" pitchFamily="34" charset="-120"/>
-              </a:rPr>
-              <a:t>!</a:t>
-            </a:r>
-            <a:endParaRPr lang="en-US" sz="1600" dirty="0"/>
-          </a:p>
-        </p:txBody>
-      </p:sp>
-      <p:sp>
-        <p:nvSpPr>
-          <p:cNvPr id="5" name="Text 3"/>
-          <p:cNvSpPr txBox="1"/>
-          <p:nvPr/>
-        </p:nvSpPr>
-        <p:spPr>
-          <a:xfrm>
-            <a:off x="1371600" y="1371600"/>
-            <a:ext cx="10241280" cy="365760"/>
+      <p:graphicFrame>
+        <p:nvGraphicFramePr>
+          <p:cNvPr id="3" name="Chart 0" descr=""/>
+          <p:cNvGraphicFramePr/>
+          <p:nvPr/>
+        </p:nvGraphicFramePr>
+        <p:xfrm>
+          <a:off x="457200" y="1280160"/>
+          <a:ext cx="7315200" cy="4937760"/>
+        </p:xfrm>
+        <a:graphic xmlns:a="http://schemas.openxmlformats.org/drawingml/2006/main">
+          <a:graphicData uri="http://schemas.openxmlformats.org/drawingml/2006/chart">
+            <c:chart xmlns:c="http://schemas.openxmlformats.org/drawingml/2006/chart" r:id="rId1"/>
+          </a:graphicData>
+        </a:graphic>
+      </p:graphicFrame>
+      <p:sp>
+        <p:nvSpPr>
+          <p:cNvPr id="4" name="Text 1"/>
+          <p:cNvSpPr txBox="1"/>
+          <p:nvPr/>
+        </p:nvSpPr>
+        <p:spPr>
+          <a:xfrm>
+            <a:off x="8138160" y="1371600"/>
+            <a:ext cx="3566160" cy="4846320"/>
           </a:xfrm>
           <a:prstGeom prst="rect">
             <a:avLst/>
@@ -4229,37 +4682,15 @@
               <a:buNone/>
             </a:pPr>
             <a:r>
-              <a:rPr lang="en-US" sz="1800" b="1" dirty="0">
-                <a:solidFill>
-                  <a:schemeClr val="tx1"/>
-                </a:solidFill>
-              </a:rPr>
-              <a:t>Scaling to hundreds of near-duplicate tools</a:t>
-            </a:r>
-            <a:endParaRPr lang="en-US" sz="1800" dirty="0"/>
-          </a:p>
-        </p:txBody>
-      </p:sp>
-      <p:sp>
-        <p:nvSpPr>
-          <p:cNvPr id="6" name="Text 4"/>
-          <p:cNvSpPr txBox="1"/>
-          <p:nvPr/>
-        </p:nvSpPr>
-        <p:spPr>
-          <a:xfrm>
-            <a:off x="1371600" y="1755648"/>
-            <a:ext cx="10241280" cy="731520"/>
-          </a:xfrm>
-          <a:prstGeom prst="rect">
-            <a:avLst/>
-          </a:prstGeom>
-          <a:noFill/>
-          <a:ln/>
-        </p:spPr>
-        <p:txBody>
-          <a:bodyPr wrap="square" lIns="0" tIns="0" rIns="0" bIns="0" rtlCol="0" anchor="t"/>
-          <a:lstStyle/>
+              <a:rPr lang="en-US" sz="1400" b="1" dirty="0">
+                <a:solidFill>
+                  <a:srgbClr val="1B1F2A"/>
+                </a:solidFill>
+              </a:rPr>
+              <a:t>Biggest effects</a:t>
+            </a:r>
+            <a:endParaRPr lang="en-US" sz="1400" dirty="0"/>
+          </a:p>
           <a:p>
             <a:pPr indent="0" marL="0">
               <a:buNone/>
@@ -4270,132 +4701,38 @@
                   <a:schemeClr val="tx2"/>
                 </a:solidFill>
               </a:rPr>
-              <a:t>Success 0.91 → 0.79 at 512 tools. Planning p95 15.5 ms (target was ≤ 10 ms; down from 27 ms). Three remedies — √N admission control, pooled priors, pessimistic constraints — did not help and were dropped.</a:t>
+              <a:t>Dependency-aware plans (+0.279) and the VoI stopping rule (+0.073).</a:t>
             </a:r>
             <a:endParaRPr lang="en-US" sz="1400" dirty="0"/>
           </a:p>
-        </p:txBody>
-      </p:sp>
-      <p:sp>
-        <p:nvSpPr>
-          <p:cNvPr id="7" name="badge !"/>
-          <p:cNvSpPr/>
-          <p:nvPr/>
-        </p:nvSpPr>
-        <p:spPr>
-          <a:xfrm>
-            <a:off x="640080" y="2624328"/>
-            <a:ext cx="502920" cy="502920"/>
-          </a:xfrm>
-          <a:prstGeom prst="ellipse">
-            <a:avLst/>
-          </a:prstGeom>
-          <a:solidFill>
-            <a:srgbClr val="C8553D"/>
-          </a:solidFill>
-          <a:ln w="12700">
-            <a:solidFill>
-              <a:srgbClr val="C8553D"/>
-            </a:solidFill>
-            <a:prstDash val="solid"/>
-          </a:ln>
-        </p:spPr>
-      </p:sp>
-      <p:sp>
-        <p:nvSpPr>
-          <p:cNvPr id="8" name="Text 6"/>
-          <p:cNvSpPr txBox="1"/>
-          <p:nvPr/>
-        </p:nvSpPr>
-        <p:spPr>
-          <a:xfrm>
-            <a:off x="640080" y="2624328"/>
-            <a:ext cx="502920" cy="502920"/>
-          </a:xfrm>
-          <a:prstGeom prst="rect">
-            <a:avLst/>
-          </a:prstGeom>
-          <a:noFill/>
-          <a:ln/>
-        </p:spPr>
-        <p:txBody>
-          <a:bodyPr wrap="square" lIns="0" tIns="0" rIns="0" bIns="0" rtlCol="0" anchor="ctr"/>
-          <a:lstStyle/>
-          <a:p>
-            <a:pPr algn="ctr" indent="0" marL="0">
-              <a:buNone/>
-            </a:pPr>
-            <a:r>
-              <a:rPr lang="en-US" sz="1600" b="1" dirty="0">
-                <a:solidFill>
-                  <a:srgbClr val="FFFFFF"/>
-                </a:solidFill>
-                <a:latin typeface="Cambria" pitchFamily="34" charset="0"/>
-                <a:ea typeface="Cambria" pitchFamily="34" charset="-122"/>
-                <a:cs typeface="Cambria" pitchFamily="34" charset="-120"/>
-              </a:rPr>
-              <a:t>!</a:t>
-            </a:r>
-            <a:endParaRPr lang="en-US" sz="1600" dirty="0"/>
-          </a:p>
-        </p:txBody>
-      </p:sp>
-      <p:sp>
-        <p:nvSpPr>
-          <p:cNvPr id="9" name="Text 7"/>
-          <p:cNvSpPr txBox="1"/>
-          <p:nvPr/>
-        </p:nvSpPr>
-        <p:spPr>
-          <a:xfrm>
-            <a:off x="1371600" y="2578608"/>
-            <a:ext cx="10241280" cy="365760"/>
-          </a:xfrm>
-          <a:prstGeom prst="rect">
-            <a:avLst/>
-          </a:prstGeom>
-          <a:noFill/>
-          <a:ln/>
-        </p:spPr>
-        <p:txBody>
-          <a:bodyPr wrap="square" lIns="0" tIns="0" rIns="0" bIns="0" rtlCol="0" anchor="t"/>
-          <a:lstStyle/>
-          <a:p>
-            <a:pPr indent="0" marL="0">
-              <a:buNone/>
-            </a:pPr>
-            <a:r>
-              <a:rPr lang="en-US" sz="1800" b="1" dirty="0">
-                <a:solidFill>
-                  <a:schemeClr val="tx1"/>
-                </a:solidFill>
-              </a:rPr>
-              <a:t>Not the cheapest at the default target</a:t>
-            </a:r>
-            <a:endParaRPr lang="en-US" sz="1800" dirty="0"/>
-          </a:p>
-        </p:txBody>
-      </p:sp>
-      <p:sp>
-        <p:nvSpPr>
-          <p:cNvPr id="10" name="Text 8"/>
-          <p:cNvSpPr txBox="1"/>
-          <p:nvPr/>
-        </p:nvSpPr>
-        <p:spPr>
-          <a:xfrm>
-            <a:off x="1371600" y="2962656"/>
-            <a:ext cx="10241280" cy="731520"/>
-          </a:xfrm>
-          <a:prstGeom prst="rect">
-            <a:avLst/>
-          </a:prstGeom>
-          <a:noFill/>
-          <a:ln/>
-        </p:spPr>
-        <p:txBody>
-          <a:bodyPr wrap="square" lIns="0" tIns="0" rIns="0" bIns="0" rtlCol="0" anchor="t"/>
-          <a:lstStyle/>
+          <a:p>
+            <a:pPr indent="0" marL="0">
+              <a:buNone/>
+            </a:pPr>
+            <a:r>
+              <a:rPr lang="en-US" sz="800" dirty="0">
+                <a:solidFill>
+                  <a:schemeClr val="tx2"/>
+                </a:solidFill>
+              </a:rPr>
+              <a:t> </a:t>
+            </a:r>
+            <a:endParaRPr lang="en-US" sz="1400" dirty="0"/>
+          </a:p>
+          <a:p>
+            <a:pPr indent="0" marL="0">
+              <a:buNone/>
+            </a:pPr>
+            <a:r>
+              <a:rPr lang="en-US" sz="1400" b="1" dirty="0">
+                <a:solidFill>
+                  <a:srgbClr val="1B1F2A"/>
+                </a:solidFill>
+              </a:rPr>
+              <a:t>Negative bars are trade-offs</a:t>
+            </a:r>
+            <a:endParaRPr lang="en-US" sz="1400" dirty="0"/>
+          </a:p>
           <a:p>
             <a:pPr indent="0" marL="0">
               <a:buNone/>
@@ -4406,132 +4743,38 @@
                   <a:schemeClr val="tx2"/>
                 </a:solidFill>
               </a:rPr>
-              <a:t>More expensive per success than the supervised router when tools are stable (+0.23 m$); tied under drift.</a:t>
+              <a:t>Cost-awareness, context and exploration each lower success by about 1 point but save 0.17–0.77 m$ per success.</a:t>
             </a:r>
             <a:endParaRPr lang="en-US" sz="1400" dirty="0"/>
           </a:p>
-        </p:txBody>
-      </p:sp>
-      <p:sp>
-        <p:nvSpPr>
-          <p:cNvPr id="11" name="badge !"/>
-          <p:cNvSpPr/>
-          <p:nvPr/>
-        </p:nvSpPr>
-        <p:spPr>
-          <a:xfrm>
-            <a:off x="640080" y="3831336"/>
-            <a:ext cx="502920" cy="502920"/>
-          </a:xfrm>
-          <a:prstGeom prst="ellipse">
-            <a:avLst/>
-          </a:prstGeom>
-          <a:solidFill>
-            <a:srgbClr val="C8553D"/>
-          </a:solidFill>
-          <a:ln w="12700">
-            <a:solidFill>
-              <a:srgbClr val="C8553D"/>
-            </a:solidFill>
-            <a:prstDash val="solid"/>
-          </a:ln>
-        </p:spPr>
-      </p:sp>
-      <p:sp>
-        <p:nvSpPr>
-          <p:cNvPr id="12" name="Text 10"/>
-          <p:cNvSpPr txBox="1"/>
-          <p:nvPr/>
-        </p:nvSpPr>
-        <p:spPr>
-          <a:xfrm>
-            <a:off x="640080" y="3831336"/>
-            <a:ext cx="502920" cy="502920"/>
-          </a:xfrm>
-          <a:prstGeom prst="rect">
-            <a:avLst/>
-          </a:prstGeom>
-          <a:noFill/>
-          <a:ln/>
-        </p:spPr>
-        <p:txBody>
-          <a:bodyPr wrap="square" lIns="0" tIns="0" rIns="0" bIns="0" rtlCol="0" anchor="ctr"/>
-          <a:lstStyle/>
-          <a:p>
-            <a:pPr algn="ctr" indent="0" marL="0">
-              <a:buNone/>
-            </a:pPr>
-            <a:r>
-              <a:rPr lang="en-US" sz="1600" b="1" dirty="0">
-                <a:solidFill>
-                  <a:srgbClr val="FFFFFF"/>
-                </a:solidFill>
-                <a:latin typeface="Cambria" pitchFamily="34" charset="0"/>
-                <a:ea typeface="Cambria" pitchFamily="34" charset="-122"/>
-                <a:cs typeface="Cambria" pitchFamily="34" charset="-120"/>
-              </a:rPr>
-              <a:t>!</a:t>
-            </a:r>
-            <a:endParaRPr lang="en-US" sz="1600" dirty="0"/>
-          </a:p>
-        </p:txBody>
-      </p:sp>
-      <p:sp>
-        <p:nvSpPr>
-          <p:cNvPr id="13" name="Text 11"/>
-          <p:cNvSpPr txBox="1"/>
-          <p:nvPr/>
-        </p:nvSpPr>
-        <p:spPr>
-          <a:xfrm>
-            <a:off x="1371600" y="3785616"/>
-            <a:ext cx="10241280" cy="365760"/>
-          </a:xfrm>
-          <a:prstGeom prst="rect">
-            <a:avLst/>
-          </a:prstGeom>
-          <a:noFill/>
-          <a:ln/>
-        </p:spPr>
-        <p:txBody>
-          <a:bodyPr wrap="square" lIns="0" tIns="0" rIns="0" bIns="0" rtlCol="0" anchor="t"/>
-          <a:lstStyle/>
-          <a:p>
-            <a:pPr indent="0" marL="0">
-              <a:buNone/>
-            </a:pPr>
-            <a:r>
-              <a:rPr lang="en-US" sz="1800" b="1" dirty="0">
-                <a:solidFill>
-                  <a:schemeClr val="tx1"/>
-                </a:solidFill>
-              </a:rPr>
-              <a:t>More calls, worse tail</a:t>
-            </a:r>
-            <a:endParaRPr lang="en-US" sz="1800" dirty="0"/>
-          </a:p>
-        </p:txBody>
-      </p:sp>
-      <p:sp>
-        <p:nvSpPr>
-          <p:cNvPr id="14" name="Text 12"/>
-          <p:cNvSpPr txBox="1"/>
-          <p:nvPr/>
-        </p:nvSpPr>
-        <p:spPr>
-          <a:xfrm>
-            <a:off x="1371600" y="4169664"/>
-            <a:ext cx="10241280" cy="731520"/>
-          </a:xfrm>
-          <a:prstGeom prst="rect">
-            <a:avLst/>
-          </a:prstGeom>
-          <a:noFill/>
-          <a:ln/>
-        </p:spPr>
-        <p:txBody>
-          <a:bodyPr wrap="square" lIns="0" tIns="0" rIns="0" bIns="0" rtlCol="0" anchor="t"/>
-          <a:lstStyle/>
+          <a:p>
+            <a:pPr indent="0" marL="0">
+              <a:buNone/>
+            </a:pPr>
+            <a:r>
+              <a:rPr lang="en-US" sz="800" dirty="0">
+                <a:solidFill>
+                  <a:schemeClr val="tx2"/>
+                </a:solidFill>
+              </a:rPr>
+              <a:t> </a:t>
+            </a:r>
+            <a:endParaRPr lang="en-US" sz="1400" dirty="0"/>
+          </a:p>
+          <a:p>
+            <a:pPr indent="0" marL="0">
+              <a:buNone/>
+            </a:pPr>
+            <a:r>
+              <a:rPr lang="en-US" sz="1400" b="1" dirty="0">
+                <a:solidFill>
+                  <a:srgbClr val="1B1F2A"/>
+                </a:solidFill>
+              </a:rPr>
+              <a:t>No measurable effect</a:t>
+            </a:r>
+            <a:endParaRPr lang="en-US" sz="1400" dirty="0"/>
+          </a:p>
           <a:p>
             <a:pPr indent="0" marL="0">
               <a:buNone/>
@@ -4542,143 +4785,7 @@
                   <a:schemeClr val="tx2"/>
                 </a:solidFill>
               </a:rPr>
-              <a:t>≈1.9 calls per task vs ≈1.6; p95 latency under drift 1357 ms vs 1252 ms for the bandit — verification adds a serial step.</a:t>
-            </a:r>
-            <a:endParaRPr lang="en-US" sz="1400" dirty="0"/>
-          </a:p>
-        </p:txBody>
-      </p:sp>
-      <p:sp>
-        <p:nvSpPr>
-          <p:cNvPr id="15" name="badge !"/>
-          <p:cNvSpPr/>
-          <p:nvPr/>
-        </p:nvSpPr>
-        <p:spPr>
-          <a:xfrm>
-            <a:off x="640080" y="5038344"/>
-            <a:ext cx="502920" cy="502920"/>
-          </a:xfrm>
-          <a:prstGeom prst="ellipse">
-            <a:avLst/>
-          </a:prstGeom>
-          <a:solidFill>
-            <a:srgbClr val="C8553D"/>
-          </a:solidFill>
-          <a:ln w="12700">
-            <a:solidFill>
-              <a:srgbClr val="C8553D"/>
-            </a:solidFill>
-            <a:prstDash val="solid"/>
-          </a:ln>
-        </p:spPr>
-      </p:sp>
-      <p:sp>
-        <p:nvSpPr>
-          <p:cNvPr id="16" name="Text 14"/>
-          <p:cNvSpPr txBox="1"/>
-          <p:nvPr/>
-        </p:nvSpPr>
-        <p:spPr>
-          <a:xfrm>
-            <a:off x="640080" y="5038344"/>
-            <a:ext cx="502920" cy="502920"/>
-          </a:xfrm>
-          <a:prstGeom prst="rect">
-            <a:avLst/>
-          </a:prstGeom>
-          <a:noFill/>
-          <a:ln/>
-        </p:spPr>
-        <p:txBody>
-          <a:bodyPr wrap="square" lIns="0" tIns="0" rIns="0" bIns="0" rtlCol="0" anchor="ctr"/>
-          <a:lstStyle/>
-          <a:p>
-            <a:pPr algn="ctr" indent="0" marL="0">
-              <a:buNone/>
-            </a:pPr>
-            <a:r>
-              <a:rPr lang="en-US" sz="1600" b="1" dirty="0">
-                <a:solidFill>
-                  <a:srgbClr val="FFFFFF"/>
-                </a:solidFill>
-                <a:latin typeface="Cambria" pitchFamily="34" charset="0"/>
-                <a:ea typeface="Cambria" pitchFamily="34" charset="-122"/>
-                <a:cs typeface="Cambria" pitchFamily="34" charset="-120"/>
-              </a:rPr>
-              <a:t>!</a:t>
-            </a:r>
-            <a:endParaRPr lang="en-US" sz="1600" dirty="0"/>
-          </a:p>
-        </p:txBody>
-      </p:sp>
-      <p:sp>
-        <p:nvSpPr>
-          <p:cNvPr id="17" name="Text 15"/>
-          <p:cNvSpPr txBox="1"/>
-          <p:nvPr/>
-        </p:nvSpPr>
-        <p:spPr>
-          <a:xfrm>
-            <a:off x="1371600" y="4992624"/>
-            <a:ext cx="10241280" cy="365760"/>
-          </a:xfrm>
-          <a:prstGeom prst="rect">
-            <a:avLst/>
-          </a:prstGeom>
-          <a:noFill/>
-          <a:ln/>
-        </p:spPr>
-        <p:txBody>
-          <a:bodyPr wrap="square" lIns="0" tIns="0" rIns="0" bIns="0" rtlCol="0" anchor="t"/>
-          <a:lstStyle/>
-          <a:p>
-            <a:pPr indent="0" marL="0">
-              <a:buNone/>
-            </a:pPr>
-            <a:r>
-              <a:rPr lang="en-US" sz="1800" b="1" dirty="0">
-                <a:solidFill>
-                  <a:schemeClr val="tx1"/>
-                </a:solidFill>
-              </a:rPr>
-              <a:t>External validity</a:t>
-            </a:r>
-            <a:endParaRPr lang="en-US" sz="1800" dirty="0"/>
-          </a:p>
-        </p:txBody>
-      </p:sp>
-      <p:sp>
-        <p:nvSpPr>
-          <p:cNvPr id="18" name="Text 16"/>
-          <p:cNvSpPr txBox="1"/>
-          <p:nvPr/>
-        </p:nvSpPr>
-        <p:spPr>
-          <a:xfrm>
-            <a:off x="1371600" y="5376672"/>
-            <a:ext cx="10241280" cy="731520"/>
-          </a:xfrm>
-          <a:prstGeom prst="rect">
-            <a:avLst/>
-          </a:prstGeom>
-          <a:noFill/>
-          <a:ln/>
-        </p:spPr>
-        <p:txBody>
-          <a:bodyPr wrap="square" lIns="0" tIns="0" rIns="0" bIns="0" rtlCol="0" anchor="t"/>
-          <a:lstStyle/>
-          <a:p>
-            <a:pPr indent="0" marL="0">
-              <a:buNone/>
-            </a:pPr>
-            <a:r>
-              <a:rPr lang="en-US" sz="1400" dirty="0">
-                <a:solidFill>
-                  <a:schemeClr val="tx2"/>
-                </a:solidFill>
-              </a:rPr>
-              <a:t>Simulator parameters are hand-specified; the live world is generated with injected faults. Not production traffic.</a:t>
+              <a:t>Learned reliability and learned latency, in this environment.</a:t>
             </a:r>
             <a:endParaRPr lang="en-US" sz="1400" dirty="0"/>
           </a:p>
@@ -4789,7 +4896,7 @@
                 <a:ea typeface="Cambria" pitchFamily="34" charset="-122"/>
                 <a:cs typeface="Cambria" pitchFamily="34" charset="-120"/>
               </a:rPr>
-              <a:t>Production-ready service, not just an experiment</a:t>
+              <a:t>A learned cache cuts cost by a fifth and keeps accuracy</a:t>
             </a:r>
             <a:endParaRPr lang="en-US" sz="3200" dirty="0"/>
           </a:p>
@@ -4797,18 +4904,18 @@
       </p:sp>
       <p:sp>
         <p:nvSpPr>
-          <p:cNvPr id="3" name="production API"/>
+          <p:cNvPr id="3" name="cache mode No cache"/>
           <p:cNvSpPr/>
           <p:nvPr/>
         </p:nvSpPr>
         <p:spPr>
           <a:xfrm>
-            <a:off x="548640" y="1554480"/>
-            <a:ext cx="3520440" cy="1874520"/>
+            <a:off x="548640" y="1371600"/>
+            <a:ext cx="3520440" cy="3246120"/>
           </a:xfrm>
           <a:prstGeom prst="roundRect">
             <a:avLst>
-              <a:gd name="adj" fmla="val 3902"/>
+              <a:gd name="adj" fmla="val 2254"/>
             </a:avLst>
           </a:prstGeom>
           <a:solidFill>
@@ -4830,7 +4937,7 @@
         </p:nvSpPr>
         <p:spPr>
           <a:xfrm>
-            <a:off x="822960" y="1783080"/>
+            <a:off x="822960" y="1554480"/>
             <a:ext cx="3017520" cy="411480"/>
           </a:xfrm>
           <a:prstGeom prst="rect">
@@ -4849,10 +4956,10 @@
             <a:r>
               <a:rPr lang="en-US" sz="1800" b="1" dirty="0">
                 <a:solidFill>
-                  <a:schemeClr val="accent2"/>
-                </a:solidFill>
-              </a:rPr>
-              <a:t>API</a:t>
+                  <a:srgbClr val="1B1F2A"/>
+                </a:solidFill>
+              </a:rPr>
+              <a:t>No cache</a:t>
             </a:r>
             <a:endParaRPr lang="en-US" sz="1800" dirty="0"/>
           </a:p>
@@ -4866,48 +4973,237 @@
         </p:nvSpPr>
         <p:spPr>
           <a:xfrm>
-            <a:off x="822960" y="2286000"/>
-            <a:ext cx="3017520" cy="1051560"/>
-          </a:xfrm>
-          <a:prstGeom prst="rect">
-            <a:avLst/>
-          </a:prstGeom>
-          <a:noFill/>
-          <a:ln/>
-        </p:spPr>
-        <p:txBody>
-          <a:bodyPr wrap="square" lIns="0" tIns="0" rIns="0" bIns="0" rtlCol="0" anchor="t"/>
-          <a:lstStyle/>
-          <a:p>
-            <a:pPr indent="0" marL="0">
-              <a:buNone/>
-            </a:pPr>
-            <a:r>
-              <a:rPr lang="en-US" sz="1400" dirty="0">
+            <a:off x="822960" y="2103120"/>
+            <a:ext cx="1371600" cy="548640"/>
+          </a:xfrm>
+          <a:prstGeom prst="rect">
+            <a:avLst/>
+          </a:prstGeom>
+          <a:noFill/>
+          <a:ln/>
+        </p:spPr>
+        <p:txBody>
+          <a:bodyPr wrap="square" lIns="0" tIns="0" rIns="0" bIns="0" rtlCol="0" anchor="ctr"/>
+          <a:lstStyle/>
+          <a:p>
+            <a:pPr indent="0" marL="0">
+              <a:buNone/>
+            </a:pPr>
+            <a:r>
+              <a:rPr lang="en-US" sz="2800" b="1" dirty="0">
+                <a:solidFill>
+                  <a:srgbClr val="1B1F2A"/>
+                </a:solidFill>
+                <a:latin typeface="Cambria" pitchFamily="34" charset="0"/>
+                <a:ea typeface="Cambria" pitchFamily="34" charset="-122"/>
+                <a:cs typeface="Cambria" pitchFamily="34" charset="-120"/>
+              </a:rPr>
+              <a:t>0.890</a:t>
+            </a:r>
+            <a:endParaRPr lang="en-US" sz="2800" dirty="0"/>
+          </a:p>
+        </p:txBody>
+      </p:sp>
+      <p:sp>
+        <p:nvSpPr>
+          <p:cNvPr id="6" name="Text 4"/>
+          <p:cNvSpPr txBox="1"/>
+          <p:nvPr/>
+        </p:nvSpPr>
+        <p:spPr>
+          <a:xfrm>
+            <a:off x="2240280" y="2103120"/>
+            <a:ext cx="1645920" cy="548640"/>
+          </a:xfrm>
+          <a:prstGeom prst="rect">
+            <a:avLst/>
+          </a:prstGeom>
+          <a:noFill/>
+          <a:ln/>
+        </p:spPr>
+        <p:txBody>
+          <a:bodyPr wrap="square" lIns="0" tIns="0" rIns="0" bIns="0" rtlCol="0" anchor="ctr"/>
+          <a:lstStyle/>
+          <a:p>
+            <a:pPr indent="0" marL="0">
+              <a:buNone/>
+            </a:pPr>
+            <a:r>
+              <a:rPr lang="en-US" sz="1300" dirty="0">
                 <a:solidFill>
                   <a:schemeClr val="tx2"/>
                 </a:solidFill>
               </a:rPr>
-              <a:t>FastAPI: route, execute, feedback, stats; API-key RBAC; audit log</a:t>
-            </a:r>
-            <a:endParaRPr lang="en-US" sz="1400" dirty="0"/>
-          </a:p>
-        </p:txBody>
-      </p:sp>
-      <p:sp>
-        <p:nvSpPr>
-          <p:cNvPr id="6" name="production Observability"/>
+              <a:t>Task success</a:t>
+            </a:r>
+            <a:endParaRPr lang="en-US" sz="1300" dirty="0"/>
+          </a:p>
+        </p:txBody>
+      </p:sp>
+      <p:sp>
+        <p:nvSpPr>
+          <p:cNvPr id="7" name="Text 5"/>
+          <p:cNvSpPr txBox="1"/>
+          <p:nvPr/>
+        </p:nvSpPr>
+        <p:spPr>
+          <a:xfrm>
+            <a:off x="822960" y="2816352"/>
+            <a:ext cx="1371600" cy="548640"/>
+          </a:xfrm>
+          <a:prstGeom prst="rect">
+            <a:avLst/>
+          </a:prstGeom>
+          <a:noFill/>
+          <a:ln/>
+        </p:spPr>
+        <p:txBody>
+          <a:bodyPr wrap="square" lIns="0" tIns="0" rIns="0" bIns="0" rtlCol="0" anchor="ctr"/>
+          <a:lstStyle/>
+          <a:p>
+            <a:pPr indent="0" marL="0">
+              <a:buNone/>
+            </a:pPr>
+            <a:r>
+              <a:rPr lang="en-US" sz="2800" b="1" dirty="0">
+                <a:solidFill>
+                  <a:srgbClr val="1B1F2A"/>
+                </a:solidFill>
+                <a:latin typeface="Cambria" pitchFamily="34" charset="0"/>
+                <a:ea typeface="Cambria" pitchFamily="34" charset="-122"/>
+                <a:cs typeface="Cambria" pitchFamily="34" charset="-120"/>
+              </a:rPr>
+              <a:t>4.64</a:t>
+            </a:r>
+            <a:endParaRPr lang="en-US" sz="2800" dirty="0"/>
+          </a:p>
+        </p:txBody>
+      </p:sp>
+      <p:sp>
+        <p:nvSpPr>
+          <p:cNvPr id="8" name="Text 6"/>
+          <p:cNvSpPr txBox="1"/>
+          <p:nvPr/>
+        </p:nvSpPr>
+        <p:spPr>
+          <a:xfrm>
+            <a:off x="2240280" y="2816352"/>
+            <a:ext cx="1645920" cy="548640"/>
+          </a:xfrm>
+          <a:prstGeom prst="rect">
+            <a:avLst/>
+          </a:prstGeom>
+          <a:noFill/>
+          <a:ln/>
+        </p:spPr>
+        <p:txBody>
+          <a:bodyPr wrap="square" lIns="0" tIns="0" rIns="0" bIns="0" rtlCol="0" anchor="ctr"/>
+          <a:lstStyle/>
+          <a:p>
+            <a:pPr indent="0" marL="0">
+              <a:buNone/>
+            </a:pPr>
+            <a:r>
+              <a:rPr lang="en-US" sz="1300" dirty="0">
+                <a:solidFill>
+                  <a:schemeClr val="tx2"/>
+                </a:solidFill>
+              </a:rPr>
+              <a:t>Cost / success (m$)</a:t>
+            </a:r>
+            <a:endParaRPr lang="en-US" sz="1300" dirty="0"/>
+          </a:p>
+        </p:txBody>
+      </p:sp>
+      <p:sp>
+        <p:nvSpPr>
+          <p:cNvPr id="9" name="Text 7"/>
+          <p:cNvSpPr txBox="1"/>
+          <p:nvPr/>
+        </p:nvSpPr>
+        <p:spPr>
+          <a:xfrm>
+            <a:off x="822960" y="3529584"/>
+            <a:ext cx="1371600" cy="548640"/>
+          </a:xfrm>
+          <a:prstGeom prst="rect">
+            <a:avLst/>
+          </a:prstGeom>
+          <a:noFill/>
+          <a:ln/>
+        </p:spPr>
+        <p:txBody>
+          <a:bodyPr wrap="square" lIns="0" tIns="0" rIns="0" bIns="0" rtlCol="0" anchor="ctr"/>
+          <a:lstStyle/>
+          <a:p>
+            <a:pPr indent="0" marL="0">
+              <a:buNone/>
+            </a:pPr>
+            <a:r>
+              <a:rPr lang="en-US" sz="2800" b="1" dirty="0">
+                <a:solidFill>
+                  <a:srgbClr val="1B1F2A"/>
+                </a:solidFill>
+                <a:latin typeface="Cambria" pitchFamily="34" charset="0"/>
+                <a:ea typeface="Cambria" pitchFamily="34" charset="-122"/>
+                <a:cs typeface="Cambria" pitchFamily="34" charset="-120"/>
+              </a:rPr>
+              <a:t>1.88</a:t>
+            </a:r>
+            <a:endParaRPr lang="en-US" sz="2800" dirty="0"/>
+          </a:p>
+        </p:txBody>
+      </p:sp>
+      <p:sp>
+        <p:nvSpPr>
+          <p:cNvPr id="10" name="Text 8"/>
+          <p:cNvSpPr txBox="1"/>
+          <p:nvPr/>
+        </p:nvSpPr>
+        <p:spPr>
+          <a:xfrm>
+            <a:off x="2240280" y="3529584"/>
+            <a:ext cx="1645920" cy="548640"/>
+          </a:xfrm>
+          <a:prstGeom prst="rect">
+            <a:avLst/>
+          </a:prstGeom>
+          <a:noFill/>
+          <a:ln/>
+        </p:spPr>
+        <p:txBody>
+          <a:bodyPr wrap="square" lIns="0" tIns="0" rIns="0" bIns="0" rtlCol="0" anchor="ctr"/>
+          <a:lstStyle/>
+          <a:p>
+            <a:pPr indent="0" marL="0">
+              <a:buNone/>
+            </a:pPr>
+            <a:r>
+              <a:rPr lang="en-US" sz="1300" dirty="0">
+                <a:solidFill>
+                  <a:schemeClr val="tx2"/>
+                </a:solidFill>
+              </a:rPr>
+              <a:t>Tool calls / task</a:t>
+            </a:r>
+            <a:endParaRPr lang="en-US" sz="1300" dirty="0"/>
+          </a:p>
+        </p:txBody>
+      </p:sp>
+      <p:sp>
+        <p:nvSpPr>
+          <p:cNvPr id="11" name="cache mode Fixed-TTL cache"/>
           <p:cNvSpPr/>
           <p:nvPr/>
         </p:nvSpPr>
         <p:spPr>
           <a:xfrm>
-            <a:off x="4297680" y="1554480"/>
-            <a:ext cx="3520440" cy="1874520"/>
+            <a:off x="4297680" y="1371600"/>
+            <a:ext cx="3520440" cy="3246120"/>
           </a:xfrm>
           <a:prstGeom prst="roundRect">
             <a:avLst>
-              <a:gd name="adj" fmla="val 3902"/>
+              <a:gd name="adj" fmla="val 2254"/>
             </a:avLst>
           </a:prstGeom>
           <a:solidFill>
@@ -4923,13 +5219,13 @@
       </p:sp>
       <p:sp>
         <p:nvSpPr>
-          <p:cNvPr id="7" name="Text 5"/>
-          <p:cNvSpPr txBox="1"/>
-          <p:nvPr/>
-        </p:nvSpPr>
-        <p:spPr>
-          <a:xfrm>
-            <a:off x="4572000" y="1783080"/>
+          <p:cNvPr id="12" name="Text 10"/>
+          <p:cNvSpPr txBox="1"/>
+          <p:nvPr/>
+        </p:nvSpPr>
+        <p:spPr>
+          <a:xfrm>
+            <a:off x="4572000" y="1554480"/>
             <a:ext cx="3017520" cy="411480"/>
           </a:xfrm>
           <a:prstGeom prst="rect">
@@ -4948,10 +5244,10 @@
             <a:r>
               <a:rPr lang="en-US" sz="1800" b="1" dirty="0">
                 <a:solidFill>
-                  <a:schemeClr val="accent2"/>
-                </a:solidFill>
-              </a:rPr>
-              <a:t>Observability</a:t>
+                  <a:srgbClr val="1B1F2A"/>
+                </a:solidFill>
+              </a:rPr>
+              <a:t>Fixed-TTL cache</a:t>
             </a:r>
             <a:endParaRPr lang="en-US" sz="1800" dirty="0"/>
           </a:p>
@@ -4959,14 +5255,239 @@
       </p:sp>
       <p:sp>
         <p:nvSpPr>
-          <p:cNvPr id="8" name="Text 6"/>
-          <p:cNvSpPr txBox="1"/>
-          <p:nvPr/>
-        </p:nvSpPr>
-        <p:spPr>
-          <a:xfrm>
-            <a:off x="4572000" y="2286000"/>
-            <a:ext cx="3017520" cy="1051560"/>
+          <p:cNvPr id="13" name="Text 11"/>
+          <p:cNvSpPr txBox="1"/>
+          <p:nvPr/>
+        </p:nvSpPr>
+        <p:spPr>
+          <a:xfrm>
+            <a:off x="4572000" y="2103120"/>
+            <a:ext cx="1371600" cy="548640"/>
+          </a:xfrm>
+          <a:prstGeom prst="rect">
+            <a:avLst/>
+          </a:prstGeom>
+          <a:noFill/>
+          <a:ln/>
+        </p:spPr>
+        <p:txBody>
+          <a:bodyPr wrap="square" lIns="0" tIns="0" rIns="0" bIns="0" rtlCol="0" anchor="ctr"/>
+          <a:lstStyle/>
+          <a:p>
+            <a:pPr indent="0" marL="0">
+              <a:buNone/>
+            </a:pPr>
+            <a:r>
+              <a:rPr lang="en-US" sz="2800" b="1" dirty="0">
+                <a:solidFill>
+                  <a:srgbClr val="1B1F2A"/>
+                </a:solidFill>
+                <a:latin typeface="Cambria" pitchFamily="34" charset="0"/>
+                <a:ea typeface="Cambria" pitchFamily="34" charset="-122"/>
+                <a:cs typeface="Cambria" pitchFamily="34" charset="-120"/>
+              </a:rPr>
+              <a:t>0.816</a:t>
+            </a:r>
+            <a:endParaRPr lang="en-US" sz="2800" dirty="0"/>
+          </a:p>
+        </p:txBody>
+      </p:sp>
+      <p:sp>
+        <p:nvSpPr>
+          <p:cNvPr id="14" name="Text 12"/>
+          <p:cNvSpPr txBox="1"/>
+          <p:nvPr/>
+        </p:nvSpPr>
+        <p:spPr>
+          <a:xfrm>
+            <a:off x="5989320" y="2103120"/>
+            <a:ext cx="1645920" cy="548640"/>
+          </a:xfrm>
+          <a:prstGeom prst="rect">
+            <a:avLst/>
+          </a:prstGeom>
+          <a:noFill/>
+          <a:ln/>
+        </p:spPr>
+        <p:txBody>
+          <a:bodyPr wrap="square" lIns="0" tIns="0" rIns="0" bIns="0" rtlCol="0" anchor="ctr"/>
+          <a:lstStyle/>
+          <a:p>
+            <a:pPr indent="0" marL="0">
+              <a:buNone/>
+            </a:pPr>
+            <a:r>
+              <a:rPr lang="en-US" sz="1300" dirty="0">
+                <a:solidFill>
+                  <a:schemeClr val="tx2"/>
+                </a:solidFill>
+              </a:rPr>
+              <a:t>Task success</a:t>
+            </a:r>
+            <a:endParaRPr lang="en-US" sz="1300" dirty="0"/>
+          </a:p>
+        </p:txBody>
+      </p:sp>
+      <p:sp>
+        <p:nvSpPr>
+          <p:cNvPr id="15" name="Text 13"/>
+          <p:cNvSpPr txBox="1"/>
+          <p:nvPr/>
+        </p:nvSpPr>
+        <p:spPr>
+          <a:xfrm>
+            <a:off x="4572000" y="2816352"/>
+            <a:ext cx="1371600" cy="548640"/>
+          </a:xfrm>
+          <a:prstGeom prst="rect">
+            <a:avLst/>
+          </a:prstGeom>
+          <a:noFill/>
+          <a:ln/>
+        </p:spPr>
+        <p:txBody>
+          <a:bodyPr wrap="square" lIns="0" tIns="0" rIns="0" bIns="0" rtlCol="0" anchor="ctr"/>
+          <a:lstStyle/>
+          <a:p>
+            <a:pPr indent="0" marL="0">
+              <a:buNone/>
+            </a:pPr>
+            <a:r>
+              <a:rPr lang="en-US" sz="2800" b="1" dirty="0">
+                <a:solidFill>
+                  <a:srgbClr val="1B1F2A"/>
+                </a:solidFill>
+                <a:latin typeface="Cambria" pitchFamily="34" charset="0"/>
+                <a:ea typeface="Cambria" pitchFamily="34" charset="-122"/>
+                <a:cs typeface="Cambria" pitchFamily="34" charset="-120"/>
+              </a:rPr>
+              <a:t>3.45</a:t>
+            </a:r>
+            <a:endParaRPr lang="en-US" sz="2800" dirty="0"/>
+          </a:p>
+        </p:txBody>
+      </p:sp>
+      <p:sp>
+        <p:nvSpPr>
+          <p:cNvPr id="16" name="Text 14"/>
+          <p:cNvSpPr txBox="1"/>
+          <p:nvPr/>
+        </p:nvSpPr>
+        <p:spPr>
+          <a:xfrm>
+            <a:off x="5989320" y="2816352"/>
+            <a:ext cx="1645920" cy="548640"/>
+          </a:xfrm>
+          <a:prstGeom prst="rect">
+            <a:avLst/>
+          </a:prstGeom>
+          <a:noFill/>
+          <a:ln/>
+        </p:spPr>
+        <p:txBody>
+          <a:bodyPr wrap="square" lIns="0" tIns="0" rIns="0" bIns="0" rtlCol="0" anchor="ctr"/>
+          <a:lstStyle/>
+          <a:p>
+            <a:pPr indent="0" marL="0">
+              <a:buNone/>
+            </a:pPr>
+            <a:r>
+              <a:rPr lang="en-US" sz="1300" dirty="0">
+                <a:solidFill>
+                  <a:schemeClr val="tx2"/>
+                </a:solidFill>
+              </a:rPr>
+              <a:t>Cost / success (m$)</a:t>
+            </a:r>
+            <a:endParaRPr lang="en-US" sz="1300" dirty="0"/>
+          </a:p>
+        </p:txBody>
+      </p:sp>
+      <p:sp>
+        <p:nvSpPr>
+          <p:cNvPr id="17" name="Text 15"/>
+          <p:cNvSpPr txBox="1"/>
+          <p:nvPr/>
+        </p:nvSpPr>
+        <p:spPr>
+          <a:xfrm>
+            <a:off x="4572000" y="3529584"/>
+            <a:ext cx="1371600" cy="548640"/>
+          </a:xfrm>
+          <a:prstGeom prst="rect">
+            <a:avLst/>
+          </a:prstGeom>
+          <a:noFill/>
+          <a:ln/>
+        </p:spPr>
+        <p:txBody>
+          <a:bodyPr wrap="square" lIns="0" tIns="0" rIns="0" bIns="0" rtlCol="0" anchor="ctr"/>
+          <a:lstStyle/>
+          <a:p>
+            <a:pPr indent="0" marL="0">
+              <a:buNone/>
+            </a:pPr>
+            <a:r>
+              <a:rPr lang="en-US" sz="2800" b="1" dirty="0">
+                <a:solidFill>
+                  <a:srgbClr val="1B1F2A"/>
+                </a:solidFill>
+                <a:latin typeface="Cambria" pitchFamily="34" charset="0"/>
+                <a:ea typeface="Cambria" pitchFamily="34" charset="-122"/>
+                <a:cs typeface="Cambria" pitchFamily="34" charset="-120"/>
+              </a:rPr>
+              <a:t>1.30</a:t>
+            </a:r>
+            <a:endParaRPr lang="en-US" sz="2800" dirty="0"/>
+          </a:p>
+        </p:txBody>
+      </p:sp>
+      <p:sp>
+        <p:nvSpPr>
+          <p:cNvPr id="18" name="Text 16"/>
+          <p:cNvSpPr txBox="1"/>
+          <p:nvPr/>
+        </p:nvSpPr>
+        <p:spPr>
+          <a:xfrm>
+            <a:off x="5989320" y="3529584"/>
+            <a:ext cx="1645920" cy="548640"/>
+          </a:xfrm>
+          <a:prstGeom prst="rect">
+            <a:avLst/>
+          </a:prstGeom>
+          <a:noFill/>
+          <a:ln/>
+        </p:spPr>
+        <p:txBody>
+          <a:bodyPr wrap="square" lIns="0" tIns="0" rIns="0" bIns="0" rtlCol="0" anchor="ctr"/>
+          <a:lstStyle/>
+          <a:p>
+            <a:pPr indent="0" marL="0">
+              <a:buNone/>
+            </a:pPr>
+            <a:r>
+              <a:rPr lang="en-US" sz="1300" dirty="0">
+                <a:solidFill>
+                  <a:schemeClr val="tx2"/>
+                </a:solidFill>
+              </a:rPr>
+              <a:t>Tool calls / task</a:t>
+            </a:r>
+            <a:endParaRPr lang="en-US" sz="1300" dirty="0"/>
+          </a:p>
+        </p:txBody>
+      </p:sp>
+      <p:sp>
+        <p:nvSpPr>
+          <p:cNvPr id="19" name="Text 17"/>
+          <p:cNvSpPr txBox="1"/>
+          <p:nvPr/>
+        </p:nvSpPr>
+        <p:spPr>
+          <a:xfrm>
+            <a:off x="4572000" y="4160520"/>
+            <a:ext cx="3017520" cy="320040"/>
           </a:xfrm>
           <a:prstGeom prst="rect">
             <a:avLst/>
@@ -4982,39 +5503,39 @@
               <a:buNone/>
             </a:pPr>
             <a:r>
-              <a:rPr lang="en-US" sz="1400" dirty="0">
-                <a:solidFill>
-                  <a:schemeClr val="tx2"/>
-                </a:solidFill>
-              </a:rPr>
-              <a:t>Prometheus metrics: decisions, tool calls, latency, cost, feedback</a:t>
-            </a:r>
-            <a:endParaRPr lang="en-US" sz="1400" dirty="0"/>
-          </a:p>
-        </p:txBody>
-      </p:sp>
-      <p:sp>
-        <p:nvSpPr>
-          <p:cNvPr id="9" name="production State"/>
+              <a:rPr lang="en-US" sz="1300" b="1" dirty="0">
+                <a:solidFill>
+                  <a:schemeClr val="accent4"/>
+                </a:solidFill>
+              </a:rPr>
+              <a:t>Serves stale answers: −7.4 points</a:t>
+            </a:r>
+            <a:endParaRPr lang="en-US" sz="1300" dirty="0"/>
+          </a:p>
+        </p:txBody>
+      </p:sp>
+      <p:sp>
+        <p:nvSpPr>
+          <p:cNvPr id="20" name="cache mode Learned cache"/>
           <p:cNvSpPr/>
           <p:nvPr/>
         </p:nvSpPr>
         <p:spPr>
           <a:xfrm>
-            <a:off x="8046720" y="1554480"/>
-            <a:ext cx="3520440" cy="1874520"/>
+            <a:off x="8046720" y="1371600"/>
+            <a:ext cx="3520440" cy="3246120"/>
           </a:xfrm>
           <a:prstGeom prst="roundRect">
             <a:avLst>
-              <a:gd name="adj" fmla="val 3902"/>
+              <a:gd name="adj" fmla="val 2254"/>
             </a:avLst>
           </a:prstGeom>
           <a:solidFill>
-            <a:srgbClr val="EEF1F5"/>
+            <a:srgbClr val="FBEFD9"/>
           </a:solidFill>
           <a:ln w="12700">
             <a:solidFill>
-              <a:srgbClr val="EEF1F5"/>
+              <a:srgbClr val="FBEFD9"/>
             </a:solidFill>
             <a:prstDash val="solid"/>
           </a:ln>
@@ -5022,13 +5543,13 @@
       </p:sp>
       <p:sp>
         <p:nvSpPr>
-          <p:cNvPr id="10" name="Text 8"/>
-          <p:cNvSpPr txBox="1"/>
-          <p:nvPr/>
-        </p:nvSpPr>
-        <p:spPr>
-          <a:xfrm>
-            <a:off x="8321040" y="1783080"/>
+          <p:cNvPr id="21" name="Text 19"/>
+          <p:cNvSpPr txBox="1"/>
+          <p:nvPr/>
+        </p:nvSpPr>
+        <p:spPr>
+          <a:xfrm>
+            <a:off x="8321040" y="1554480"/>
             <a:ext cx="3017520" cy="411480"/>
           </a:xfrm>
           <a:prstGeom prst="rect">
@@ -5047,25 +5568,286 @@
             <a:r>
               <a:rPr lang="en-US" sz="1800" b="1" dirty="0">
                 <a:solidFill>
+                  <a:srgbClr val="1B1F2A"/>
+                </a:solidFill>
+              </a:rPr>
+              <a:t>Learned cache</a:t>
+            </a:r>
+            <a:endParaRPr lang="en-US" sz="1800" dirty="0"/>
+          </a:p>
+        </p:txBody>
+      </p:sp>
+      <p:sp>
+        <p:nvSpPr>
+          <p:cNvPr id="22" name="Text 20"/>
+          <p:cNvSpPr txBox="1"/>
+          <p:nvPr/>
+        </p:nvSpPr>
+        <p:spPr>
+          <a:xfrm>
+            <a:off x="8321040" y="2103120"/>
+            <a:ext cx="1371600" cy="548640"/>
+          </a:xfrm>
+          <a:prstGeom prst="rect">
+            <a:avLst/>
+          </a:prstGeom>
+          <a:noFill/>
+          <a:ln/>
+        </p:spPr>
+        <p:txBody>
+          <a:bodyPr wrap="square" lIns="0" tIns="0" rIns="0" bIns="0" rtlCol="0" anchor="ctr"/>
+          <a:lstStyle/>
+          <a:p>
+            <a:pPr indent="0" marL="0">
+              <a:buNone/>
+            </a:pPr>
+            <a:r>
+              <a:rPr lang="en-US" sz="2800" b="1" dirty="0">
+                <a:solidFill>
+                  <a:srgbClr val="1B1F2A"/>
+                </a:solidFill>
+                <a:latin typeface="Cambria" pitchFamily="34" charset="0"/>
+                <a:ea typeface="Cambria" pitchFamily="34" charset="-122"/>
+                <a:cs typeface="Cambria" pitchFamily="34" charset="-120"/>
+              </a:rPr>
+              <a:t>0.881</a:t>
+            </a:r>
+            <a:endParaRPr lang="en-US" sz="2800" dirty="0"/>
+          </a:p>
+        </p:txBody>
+      </p:sp>
+      <p:sp>
+        <p:nvSpPr>
+          <p:cNvPr id="23" name="Text 21"/>
+          <p:cNvSpPr txBox="1"/>
+          <p:nvPr/>
+        </p:nvSpPr>
+        <p:spPr>
+          <a:xfrm>
+            <a:off x="9738360" y="2103120"/>
+            <a:ext cx="1645920" cy="548640"/>
+          </a:xfrm>
+          <a:prstGeom prst="rect">
+            <a:avLst/>
+          </a:prstGeom>
+          <a:noFill/>
+          <a:ln/>
+        </p:spPr>
+        <p:txBody>
+          <a:bodyPr wrap="square" lIns="0" tIns="0" rIns="0" bIns="0" rtlCol="0" anchor="ctr"/>
+          <a:lstStyle/>
+          <a:p>
+            <a:pPr indent="0" marL="0">
+              <a:buNone/>
+            </a:pPr>
+            <a:r>
+              <a:rPr lang="en-US" sz="1300" dirty="0">
+                <a:solidFill>
+                  <a:schemeClr val="tx2"/>
+                </a:solidFill>
+              </a:rPr>
+              <a:t>Task success</a:t>
+            </a:r>
+            <a:endParaRPr lang="en-US" sz="1300" dirty="0"/>
+          </a:p>
+        </p:txBody>
+      </p:sp>
+      <p:sp>
+        <p:nvSpPr>
+          <p:cNvPr id="24" name="Text 22"/>
+          <p:cNvSpPr txBox="1"/>
+          <p:nvPr/>
+        </p:nvSpPr>
+        <p:spPr>
+          <a:xfrm>
+            <a:off x="8321040" y="2816352"/>
+            <a:ext cx="1371600" cy="548640"/>
+          </a:xfrm>
+          <a:prstGeom prst="rect">
+            <a:avLst/>
+          </a:prstGeom>
+          <a:noFill/>
+          <a:ln/>
+        </p:spPr>
+        <p:txBody>
+          <a:bodyPr wrap="square" lIns="0" tIns="0" rIns="0" bIns="0" rtlCol="0" anchor="ctr"/>
+          <a:lstStyle/>
+          <a:p>
+            <a:pPr indent="0" marL="0">
+              <a:buNone/>
+            </a:pPr>
+            <a:r>
+              <a:rPr lang="en-US" sz="2800" b="1" dirty="0">
+                <a:solidFill>
+                  <a:srgbClr val="1B1F2A"/>
+                </a:solidFill>
+                <a:latin typeface="Cambria" pitchFamily="34" charset="0"/>
+                <a:ea typeface="Cambria" pitchFamily="34" charset="-122"/>
+                <a:cs typeface="Cambria" pitchFamily="34" charset="-120"/>
+              </a:rPr>
+              <a:t>3.63</a:t>
+            </a:r>
+            <a:endParaRPr lang="en-US" sz="2800" dirty="0"/>
+          </a:p>
+        </p:txBody>
+      </p:sp>
+      <p:sp>
+        <p:nvSpPr>
+          <p:cNvPr id="25" name="Text 23"/>
+          <p:cNvSpPr txBox="1"/>
+          <p:nvPr/>
+        </p:nvSpPr>
+        <p:spPr>
+          <a:xfrm>
+            <a:off x="9738360" y="2816352"/>
+            <a:ext cx="1645920" cy="548640"/>
+          </a:xfrm>
+          <a:prstGeom prst="rect">
+            <a:avLst/>
+          </a:prstGeom>
+          <a:noFill/>
+          <a:ln/>
+        </p:spPr>
+        <p:txBody>
+          <a:bodyPr wrap="square" lIns="0" tIns="0" rIns="0" bIns="0" rtlCol="0" anchor="ctr"/>
+          <a:lstStyle/>
+          <a:p>
+            <a:pPr indent="0" marL="0">
+              <a:buNone/>
+            </a:pPr>
+            <a:r>
+              <a:rPr lang="en-US" sz="1300" dirty="0">
+                <a:solidFill>
+                  <a:schemeClr val="tx2"/>
+                </a:solidFill>
+              </a:rPr>
+              <a:t>Cost / success (m$)</a:t>
+            </a:r>
+            <a:endParaRPr lang="en-US" sz="1300" dirty="0"/>
+          </a:p>
+        </p:txBody>
+      </p:sp>
+      <p:sp>
+        <p:nvSpPr>
+          <p:cNvPr id="26" name="Text 24"/>
+          <p:cNvSpPr txBox="1"/>
+          <p:nvPr/>
+        </p:nvSpPr>
+        <p:spPr>
+          <a:xfrm>
+            <a:off x="8321040" y="3529584"/>
+            <a:ext cx="1371600" cy="548640"/>
+          </a:xfrm>
+          <a:prstGeom prst="rect">
+            <a:avLst/>
+          </a:prstGeom>
+          <a:noFill/>
+          <a:ln/>
+        </p:spPr>
+        <p:txBody>
+          <a:bodyPr wrap="square" lIns="0" tIns="0" rIns="0" bIns="0" rtlCol="0" anchor="ctr"/>
+          <a:lstStyle/>
+          <a:p>
+            <a:pPr indent="0" marL="0">
+              <a:buNone/>
+            </a:pPr>
+            <a:r>
+              <a:rPr lang="en-US" sz="2800" b="1" dirty="0">
+                <a:solidFill>
+                  <a:srgbClr val="1B1F2A"/>
+                </a:solidFill>
+                <a:latin typeface="Cambria" pitchFamily="34" charset="0"/>
+                <a:ea typeface="Cambria" pitchFamily="34" charset="-122"/>
+                <a:cs typeface="Cambria" pitchFamily="34" charset="-120"/>
+              </a:rPr>
+              <a:t>1.46</a:t>
+            </a:r>
+            <a:endParaRPr lang="en-US" sz="2800" dirty="0"/>
+          </a:p>
+        </p:txBody>
+      </p:sp>
+      <p:sp>
+        <p:nvSpPr>
+          <p:cNvPr id="27" name="Text 25"/>
+          <p:cNvSpPr txBox="1"/>
+          <p:nvPr/>
+        </p:nvSpPr>
+        <p:spPr>
+          <a:xfrm>
+            <a:off x="9738360" y="3529584"/>
+            <a:ext cx="1645920" cy="548640"/>
+          </a:xfrm>
+          <a:prstGeom prst="rect">
+            <a:avLst/>
+          </a:prstGeom>
+          <a:noFill/>
+          <a:ln/>
+        </p:spPr>
+        <p:txBody>
+          <a:bodyPr wrap="square" lIns="0" tIns="0" rIns="0" bIns="0" rtlCol="0" anchor="ctr"/>
+          <a:lstStyle/>
+          <a:p>
+            <a:pPr indent="0" marL="0">
+              <a:buNone/>
+            </a:pPr>
+            <a:r>
+              <a:rPr lang="en-US" sz="1300" dirty="0">
+                <a:solidFill>
+                  <a:schemeClr val="tx2"/>
+                </a:solidFill>
+              </a:rPr>
+              <a:t>Tool calls / task</a:t>
+            </a:r>
+            <a:endParaRPr lang="en-US" sz="1300" dirty="0"/>
+          </a:p>
+        </p:txBody>
+      </p:sp>
+      <p:sp>
+        <p:nvSpPr>
+          <p:cNvPr id="28" name="Text 26"/>
+          <p:cNvSpPr txBox="1"/>
+          <p:nvPr/>
+        </p:nvSpPr>
+        <p:spPr>
+          <a:xfrm>
+            <a:off x="8321040" y="4160520"/>
+            <a:ext cx="3017520" cy="320040"/>
+          </a:xfrm>
+          <a:prstGeom prst="rect">
+            <a:avLst/>
+          </a:prstGeom>
+          <a:noFill/>
+          <a:ln/>
+        </p:spPr>
+        <p:txBody>
+          <a:bodyPr wrap="square" lIns="0" tIns="0" rIns="0" bIns="0" rtlCol="0" anchor="t"/>
+          <a:lstStyle/>
+          <a:p>
+            <a:pPr indent="0" marL="0">
+              <a:buNone/>
+            </a:pPr>
+            <a:r>
+              <a:rPr lang="en-US" sz="1300" b="1" dirty="0">
+                <a:solidFill>
                   <a:schemeClr val="accent2"/>
                 </a:solidFill>
               </a:rPr>
-              <a:t>State</a:t>
-            </a:r>
-            <a:endParaRPr lang="en-US" sz="1800" dirty="0"/>
-          </a:p>
-        </p:txBody>
-      </p:sp>
-      <p:sp>
-        <p:nvSpPr>
-          <p:cNvPr id="11" name="Text 9"/>
-          <p:cNvSpPr txBox="1"/>
-          <p:nvPr/>
-        </p:nvSpPr>
-        <p:spPr>
-          <a:xfrm>
-            <a:off x="8321040" y="2286000"/>
-            <a:ext cx="3017520" cy="1051560"/>
+              <a:t>−0.8 points for −22% cost</a:t>
+            </a:r>
+            <a:endParaRPr lang="en-US" sz="1300" dirty="0"/>
+          </a:p>
+        </p:txBody>
+      </p:sp>
+      <p:sp>
+        <p:nvSpPr>
+          <p:cNvPr id="29" name="Text 27"/>
+          <p:cNvSpPr txBox="1"/>
+          <p:nvPr/>
+        </p:nvSpPr>
+        <p:spPr>
+          <a:xfrm>
+            <a:off x="548640" y="4846320"/>
+            <a:ext cx="11064240" cy="731520"/>
           </a:xfrm>
           <a:prstGeom prst="rect">
             <a:avLst/>
@@ -5081,12 +5863,23 @@
               <a:buNone/>
             </a:pPr>
             <a:r>
+              <a:rPr lang="en-US" sz="1400" b="1" dirty="0">
+                <a:solidFill>
+                  <a:srgbClr val="1B1F2A"/>
+                </a:solidFill>
+              </a:rPr>
+              <a:t>How it works  </a:t>
+            </a:r>
+            <a:pPr indent="0" marL="0">
+              <a:buNone/>
+            </a:pPr>
+            <a:r>
               <a:rPr lang="en-US" sz="1400" dirty="0">
                 <a:solidFill>
                   <a:schemeClr val="tx2"/>
                 </a:solidFill>
               </a:rPr>
-              <a:t>Router posteriors snapshotted to file or Redis; atomic writes</a:t>
+              <a:t>A cached answer is planned as a zero-cost virtual tool. Its quality is the source tool's quality × P(still valid | task family, age), learned from feedback with Bayesian blame-splitting between staleness and a wrong source.</a:t>
             </a:r>
             <a:endParaRPr lang="en-US" sz="1400" dirty="0"/>
           </a:p>
@@ -5094,41 +5887,14 @@
       </p:sp>
       <p:sp>
         <p:nvSpPr>
-          <p:cNvPr id="12" name="production Safe tools"/>
-          <p:cNvSpPr/>
-          <p:nvPr/>
-        </p:nvSpPr>
-        <p:spPr>
-          <a:xfrm>
-            <a:off x="548640" y="3703320"/>
-            <a:ext cx="3520440" cy="1874520"/>
-          </a:xfrm>
-          <a:prstGeom prst="roundRect">
-            <a:avLst>
-              <a:gd name="adj" fmla="val 3902"/>
-            </a:avLst>
-          </a:prstGeom>
-          <a:solidFill>
-            <a:srgbClr val="EEF1F5"/>
-          </a:solidFill>
-          <a:ln w="12700">
-            <a:solidFill>
-              <a:srgbClr val="EEF1F5"/>
-            </a:solidFill>
-            <a:prstDash val="solid"/>
-          </a:ln>
-        </p:spPr>
-      </p:sp>
-      <p:sp>
-        <p:nvSpPr>
-          <p:cNvPr id="13" name="Text 11"/>
-          <p:cNvSpPr txBox="1"/>
-          <p:nvPr/>
-        </p:nvSpPr>
-        <p:spPr>
-          <a:xfrm>
-            <a:off x="822960" y="3931920"/>
-            <a:ext cx="3017520" cy="411480"/>
+          <p:cNvPr id="30" name="Text 28"/>
+          <p:cNvSpPr txBox="1"/>
+          <p:nvPr/>
+        </p:nvSpPr>
+        <p:spPr>
+          <a:xfrm>
+            <a:off x="548640" y="5669280"/>
+            <a:ext cx="11064240" cy="457200"/>
           </a:xfrm>
           <a:prstGeom prst="rect">
             <a:avLst/>
@@ -5144,248 +5910,14 @@
               <a:buNone/>
             </a:pPr>
             <a:r>
-              <a:rPr lang="en-US" sz="1800" b="1" dirty="0">
-                <a:solidFill>
-                  <a:schemeClr val="accent2"/>
-                </a:solidFill>
-              </a:rPr>
-              <a:t>Safe tools</a:t>
-            </a:r>
-            <a:endParaRPr lang="en-US" sz="1800" dirty="0"/>
-          </a:p>
-        </p:txBody>
-      </p:sp>
-      <p:sp>
-        <p:nvSpPr>
-          <p:cNvPr id="14" name="Text 12"/>
-          <p:cNvSpPr txBox="1"/>
-          <p:nvPr/>
-        </p:nvSpPr>
-        <p:spPr>
-          <a:xfrm>
-            <a:off x="822960" y="4434840"/>
-            <a:ext cx="3017520" cy="1051560"/>
-          </a:xfrm>
-          <a:prstGeom prst="rect">
-            <a:avLst/>
-          </a:prstGeom>
-          <a:noFill/>
-          <a:ln/>
-        </p:spPr>
-        <p:txBody>
-          <a:bodyPr wrap="square" lIns="0" tIns="0" rIns="0" bIns="0" rtlCol="0" anchor="t"/>
-          <a:lstStyle/>
-          <a:p>
-            <a:pPr indent="0" marL="0">
-              <a:buNone/>
-            </a:pPr>
-            <a:r>
-              <a:rPr lang="en-US" sz="1400" dirty="0">
+              <a:rPr lang="en-US" sz="1100" dirty="0">
                 <a:solidFill>
                   <a:schemeClr val="tx2"/>
                 </a:solidFill>
               </a:rPr>
-              <a:t>Read-only SQL with authorizer and time budget; AST allow-listed Python in an isolated subprocess</a:t>
-            </a:r>
-            <a:endParaRPr lang="en-US" sz="1400" dirty="0"/>
-          </a:p>
-        </p:txBody>
-      </p:sp>
-      <p:sp>
-        <p:nvSpPr>
-          <p:cNvPr id="15" name="production Agent integration"/>
-          <p:cNvSpPr/>
-          <p:nvPr/>
-        </p:nvSpPr>
-        <p:spPr>
-          <a:xfrm>
-            <a:off x="4297680" y="3703320"/>
-            <a:ext cx="3520440" cy="1874520"/>
-          </a:xfrm>
-          <a:prstGeom prst="roundRect">
-            <a:avLst>
-              <a:gd name="adj" fmla="val 3902"/>
-            </a:avLst>
-          </a:prstGeom>
-          <a:solidFill>
-            <a:srgbClr val="EEF1F5"/>
-          </a:solidFill>
-          <a:ln w="12700">
-            <a:solidFill>
-              <a:srgbClr val="EEF1F5"/>
-            </a:solidFill>
-            <a:prstDash val="solid"/>
-          </a:ln>
-        </p:spPr>
-      </p:sp>
-      <p:sp>
-        <p:nvSpPr>
-          <p:cNvPr id="16" name="Text 14"/>
-          <p:cNvSpPr txBox="1"/>
-          <p:nvPr/>
-        </p:nvSpPr>
-        <p:spPr>
-          <a:xfrm>
-            <a:off x="4572000" y="3931920"/>
-            <a:ext cx="3017520" cy="411480"/>
-          </a:xfrm>
-          <a:prstGeom prst="rect">
-            <a:avLst/>
-          </a:prstGeom>
-          <a:noFill/>
-          <a:ln/>
-        </p:spPr>
-        <p:txBody>
-          <a:bodyPr wrap="square" lIns="0" tIns="0" rIns="0" bIns="0" rtlCol="0" anchor="t"/>
-          <a:lstStyle/>
-          <a:p>
-            <a:pPr indent="0" marL="0">
-              <a:buNone/>
-            </a:pPr>
-            <a:r>
-              <a:rPr lang="en-US" sz="1800" b="1" dirty="0">
-                <a:solidFill>
-                  <a:schemeClr val="accent2"/>
-                </a:solidFill>
-              </a:rPr>
-              <a:t>Agent integration</a:t>
-            </a:r>
-            <a:endParaRPr lang="en-US" sz="1800" dirty="0"/>
-          </a:p>
-        </p:txBody>
-      </p:sp>
-      <p:sp>
-        <p:nvSpPr>
-          <p:cNvPr id="17" name="Text 15"/>
-          <p:cNvSpPr txBox="1"/>
-          <p:nvPr/>
-        </p:nvSpPr>
-        <p:spPr>
-          <a:xfrm>
-            <a:off x="4572000" y="4434840"/>
-            <a:ext cx="3017520" cy="1051560"/>
-          </a:xfrm>
-          <a:prstGeom prst="rect">
-            <a:avLst/>
-          </a:prstGeom>
-          <a:noFill/>
-          <a:ln/>
-        </p:spPr>
-        <p:txBody>
-          <a:bodyPr wrap="square" lIns="0" tIns="0" rIns="0" bIns="0" rtlCol="0" anchor="t"/>
-          <a:lstStyle/>
-          <a:p>
-            <a:pPr indent="0" marL="0">
-              <a:buNone/>
-            </a:pPr>
-            <a:r>
-              <a:rPr lang="en-US" sz="1400" dirty="0">
-                <a:solidFill>
-                  <a:schemeClr val="tx2"/>
-                </a:solidFill>
-              </a:rPr>
-              <a:t>LangChain tool selector and a LangGraph node</a:t>
-            </a:r>
-            <a:endParaRPr lang="en-US" sz="1400" dirty="0"/>
-          </a:p>
-        </p:txBody>
-      </p:sp>
-      <p:sp>
-        <p:nvSpPr>
-          <p:cNvPr id="18" name="production Delivery"/>
-          <p:cNvSpPr/>
-          <p:nvPr/>
-        </p:nvSpPr>
-        <p:spPr>
-          <a:xfrm>
-            <a:off x="8046720" y="3703320"/>
-            <a:ext cx="3520440" cy="1874520"/>
-          </a:xfrm>
-          <a:prstGeom prst="roundRect">
-            <a:avLst>
-              <a:gd name="adj" fmla="val 3902"/>
-            </a:avLst>
-          </a:prstGeom>
-          <a:solidFill>
-            <a:srgbClr val="EEF1F5"/>
-          </a:solidFill>
-          <a:ln w="12700">
-            <a:solidFill>
-              <a:srgbClr val="EEF1F5"/>
-            </a:solidFill>
-            <a:prstDash val="solid"/>
-          </a:ln>
-        </p:spPr>
-      </p:sp>
-      <p:sp>
-        <p:nvSpPr>
-          <p:cNvPr id="19" name="Text 17"/>
-          <p:cNvSpPr txBox="1"/>
-          <p:nvPr/>
-        </p:nvSpPr>
-        <p:spPr>
-          <a:xfrm>
-            <a:off x="8321040" y="3931920"/>
-            <a:ext cx="3017520" cy="411480"/>
-          </a:xfrm>
-          <a:prstGeom prst="rect">
-            <a:avLst/>
-          </a:prstGeom>
-          <a:noFill/>
-          <a:ln/>
-        </p:spPr>
-        <p:txBody>
-          <a:bodyPr wrap="square" lIns="0" tIns="0" rIns="0" bIns="0" rtlCol="0" anchor="t"/>
-          <a:lstStyle/>
-          <a:p>
-            <a:pPr indent="0" marL="0">
-              <a:buNone/>
-            </a:pPr>
-            <a:r>
-              <a:rPr lang="en-US" sz="1800" b="1" dirty="0">
-                <a:solidFill>
-                  <a:schemeClr val="accent2"/>
-                </a:solidFill>
-              </a:rPr>
-              <a:t>Delivery</a:t>
-            </a:r>
-            <a:endParaRPr lang="en-US" sz="1800" dirty="0"/>
-          </a:p>
-        </p:txBody>
-      </p:sp>
-      <p:sp>
-        <p:nvSpPr>
-          <p:cNvPr id="20" name="Text 18"/>
-          <p:cNvSpPr txBox="1"/>
-          <p:nvPr/>
-        </p:nvSpPr>
-        <p:spPr>
-          <a:xfrm>
-            <a:off x="8321040" y="4434840"/>
-            <a:ext cx="3017520" cy="1051560"/>
-          </a:xfrm>
-          <a:prstGeom prst="rect">
-            <a:avLst/>
-          </a:prstGeom>
-          <a:noFill/>
-          <a:ln/>
-        </p:spPr>
-        <p:txBody>
-          <a:bodyPr wrap="square" lIns="0" tIns="0" rIns="0" bIns="0" rtlCol="0" anchor="t"/>
-          <a:lstStyle/>
-          <a:p>
-            <a:pPr indent="0" marL="0">
-              <a:buNone/>
-            </a:pPr>
-            <a:r>
-              <a:rPr lang="en-US" sz="1400" dirty="0">
-                <a:solidFill>
-                  <a:schemeClr val="tx2"/>
-                </a:solidFill>
-              </a:rPr>
-              <a:t>Docker Compose (non-root, read-only FS), CI: lint, 64 tests, benchmark smoke, image build</a:t>
-            </a:r>
-            <a:endParaRPr lang="en-US" sz="1400" dirty="0"/>
+              <a:t>E7, drift with repeated queries and volatile answers (live KPIs, quotes, news), 10 seeds. Learned vs no cache: success −0.008, cost −1.01 m$ (Holm p = 0.012).</a:t>
+            </a:r>
+            <a:endParaRPr lang="en-US" sz="1100" dirty="0"/>
           </a:p>
         </p:txBody>
       </p:sp>
@@ -5488,6 +6020,1366 @@
             <a:r>
               <a:rPr lang="en-US" sz="3200" b="1" dirty="0">
                 <a:solidFill>
+                  <a:schemeClr val="tx1"/>
+                </a:solidFill>
+                <a:latin typeface="Cambria" pitchFamily="34" charset="0"/>
+                <a:ea typeface="Cambria" pitchFamily="34" charset="-122"/>
+                <a:cs typeface="Cambria" pitchFamily="34" charset="-120"/>
+              </a:rPr>
+              <a:t>What did not work, stated plainly</a:t>
+            </a:r>
+            <a:endParaRPr lang="en-US" sz="3200" dirty="0"/>
+          </a:p>
+        </p:txBody>
+      </p:sp>
+      <p:sp>
+        <p:nvSpPr>
+          <p:cNvPr id="3" name="badge !"/>
+          <p:cNvSpPr/>
+          <p:nvPr/>
+        </p:nvSpPr>
+        <p:spPr>
+          <a:xfrm>
+            <a:off x="640080" y="1417320"/>
+            <a:ext cx="502920" cy="502920"/>
+          </a:xfrm>
+          <a:prstGeom prst="ellipse">
+            <a:avLst/>
+          </a:prstGeom>
+          <a:solidFill>
+            <a:srgbClr val="C8553D"/>
+          </a:solidFill>
+          <a:ln w="12700">
+            <a:solidFill>
+              <a:srgbClr val="C8553D"/>
+            </a:solidFill>
+            <a:prstDash val="solid"/>
+          </a:ln>
+        </p:spPr>
+      </p:sp>
+      <p:sp>
+        <p:nvSpPr>
+          <p:cNvPr id="4" name="Text 2"/>
+          <p:cNvSpPr txBox="1"/>
+          <p:nvPr/>
+        </p:nvSpPr>
+        <p:spPr>
+          <a:xfrm>
+            <a:off x="640080" y="1417320"/>
+            <a:ext cx="502920" cy="502920"/>
+          </a:xfrm>
+          <a:prstGeom prst="rect">
+            <a:avLst/>
+          </a:prstGeom>
+          <a:noFill/>
+          <a:ln/>
+        </p:spPr>
+        <p:txBody>
+          <a:bodyPr wrap="square" lIns="0" tIns="0" rIns="0" bIns="0" rtlCol="0" anchor="ctr"/>
+          <a:lstStyle/>
+          <a:p>
+            <a:pPr algn="ctr" indent="0" marL="0">
+              <a:buNone/>
+            </a:pPr>
+            <a:r>
+              <a:rPr lang="en-US" sz="1600" b="1" dirty="0">
+                <a:solidFill>
+                  <a:srgbClr val="FFFFFF"/>
+                </a:solidFill>
+                <a:latin typeface="Cambria" pitchFamily="34" charset="0"/>
+                <a:ea typeface="Cambria" pitchFamily="34" charset="-122"/>
+                <a:cs typeface="Cambria" pitchFamily="34" charset="-120"/>
+              </a:rPr>
+              <a:t>!</a:t>
+            </a:r>
+            <a:endParaRPr lang="en-US" sz="1600" dirty="0"/>
+          </a:p>
+        </p:txBody>
+      </p:sp>
+      <p:sp>
+        <p:nvSpPr>
+          <p:cNvPr id="5" name="Text 3"/>
+          <p:cNvSpPr txBox="1"/>
+          <p:nvPr/>
+        </p:nvSpPr>
+        <p:spPr>
+          <a:xfrm>
+            <a:off x="1371600" y="1371600"/>
+            <a:ext cx="10241280" cy="365760"/>
+          </a:xfrm>
+          <a:prstGeom prst="rect">
+            <a:avLst/>
+          </a:prstGeom>
+          <a:noFill/>
+          <a:ln/>
+        </p:spPr>
+        <p:txBody>
+          <a:bodyPr wrap="square" lIns="0" tIns="0" rIns="0" bIns="0" rtlCol="0" anchor="t"/>
+          <a:lstStyle/>
+          <a:p>
+            <a:pPr indent="0" marL="0">
+              <a:buNone/>
+            </a:pPr>
+            <a:r>
+              <a:rPr lang="en-US" sz="1800" b="1" dirty="0">
+                <a:solidFill>
+                  <a:schemeClr val="tx1"/>
+                </a:solidFill>
+              </a:rPr>
+              <a:t>Scaling to hundreds of near-duplicate tools</a:t>
+            </a:r>
+            <a:endParaRPr lang="en-US" sz="1800" dirty="0"/>
+          </a:p>
+        </p:txBody>
+      </p:sp>
+      <p:sp>
+        <p:nvSpPr>
+          <p:cNvPr id="6" name="Text 4"/>
+          <p:cNvSpPr txBox="1"/>
+          <p:nvPr/>
+        </p:nvSpPr>
+        <p:spPr>
+          <a:xfrm>
+            <a:off x="1371600" y="1755648"/>
+            <a:ext cx="10241280" cy="731520"/>
+          </a:xfrm>
+          <a:prstGeom prst="rect">
+            <a:avLst/>
+          </a:prstGeom>
+          <a:noFill/>
+          <a:ln/>
+        </p:spPr>
+        <p:txBody>
+          <a:bodyPr wrap="square" lIns="0" tIns="0" rIns="0" bIns="0" rtlCol="0" anchor="t"/>
+          <a:lstStyle/>
+          <a:p>
+            <a:pPr indent="0" marL="0">
+              <a:buNone/>
+            </a:pPr>
+            <a:r>
+              <a:rPr lang="en-US" sz="1400" dirty="0">
+                <a:solidFill>
+                  <a:schemeClr val="tx2"/>
+                </a:solidFill>
+              </a:rPr>
+              <a:t>Success 0.91 → 0.79 at 512 tools. Planning p95 15.5 ms (target was ≤ 10 ms; down from 27 ms). Three remedies — √N admission control, pooled priors, pessimistic constraints — did not help and were dropped.</a:t>
+            </a:r>
+            <a:endParaRPr lang="en-US" sz="1400" dirty="0"/>
+          </a:p>
+        </p:txBody>
+      </p:sp>
+      <p:sp>
+        <p:nvSpPr>
+          <p:cNvPr id="7" name="badge !"/>
+          <p:cNvSpPr/>
+          <p:nvPr/>
+        </p:nvSpPr>
+        <p:spPr>
+          <a:xfrm>
+            <a:off x="640080" y="2624328"/>
+            <a:ext cx="502920" cy="502920"/>
+          </a:xfrm>
+          <a:prstGeom prst="ellipse">
+            <a:avLst/>
+          </a:prstGeom>
+          <a:solidFill>
+            <a:srgbClr val="C8553D"/>
+          </a:solidFill>
+          <a:ln w="12700">
+            <a:solidFill>
+              <a:srgbClr val="C8553D"/>
+            </a:solidFill>
+            <a:prstDash val="solid"/>
+          </a:ln>
+        </p:spPr>
+      </p:sp>
+      <p:sp>
+        <p:nvSpPr>
+          <p:cNvPr id="8" name="Text 6"/>
+          <p:cNvSpPr txBox="1"/>
+          <p:nvPr/>
+        </p:nvSpPr>
+        <p:spPr>
+          <a:xfrm>
+            <a:off x="640080" y="2624328"/>
+            <a:ext cx="502920" cy="502920"/>
+          </a:xfrm>
+          <a:prstGeom prst="rect">
+            <a:avLst/>
+          </a:prstGeom>
+          <a:noFill/>
+          <a:ln/>
+        </p:spPr>
+        <p:txBody>
+          <a:bodyPr wrap="square" lIns="0" tIns="0" rIns="0" bIns="0" rtlCol="0" anchor="ctr"/>
+          <a:lstStyle/>
+          <a:p>
+            <a:pPr algn="ctr" indent="0" marL="0">
+              <a:buNone/>
+            </a:pPr>
+            <a:r>
+              <a:rPr lang="en-US" sz="1600" b="1" dirty="0">
+                <a:solidFill>
+                  <a:srgbClr val="FFFFFF"/>
+                </a:solidFill>
+                <a:latin typeface="Cambria" pitchFamily="34" charset="0"/>
+                <a:ea typeface="Cambria" pitchFamily="34" charset="-122"/>
+                <a:cs typeface="Cambria" pitchFamily="34" charset="-120"/>
+              </a:rPr>
+              <a:t>!</a:t>
+            </a:r>
+            <a:endParaRPr lang="en-US" sz="1600" dirty="0"/>
+          </a:p>
+        </p:txBody>
+      </p:sp>
+      <p:sp>
+        <p:nvSpPr>
+          <p:cNvPr id="9" name="Text 7"/>
+          <p:cNvSpPr txBox="1"/>
+          <p:nvPr/>
+        </p:nvSpPr>
+        <p:spPr>
+          <a:xfrm>
+            <a:off x="1371600" y="2578608"/>
+            <a:ext cx="10241280" cy="365760"/>
+          </a:xfrm>
+          <a:prstGeom prst="rect">
+            <a:avLst/>
+          </a:prstGeom>
+          <a:noFill/>
+          <a:ln/>
+        </p:spPr>
+        <p:txBody>
+          <a:bodyPr wrap="square" lIns="0" tIns="0" rIns="0" bIns="0" rtlCol="0" anchor="t"/>
+          <a:lstStyle/>
+          <a:p>
+            <a:pPr indent="0" marL="0">
+              <a:buNone/>
+            </a:pPr>
+            <a:r>
+              <a:rPr lang="en-US" sz="1800" b="1" dirty="0">
+                <a:solidFill>
+                  <a:schemeClr val="tx1"/>
+                </a:solidFill>
+              </a:rPr>
+              <a:t>Cheapest only with the learned cache</a:t>
+            </a:r>
+            <a:endParaRPr lang="en-US" sz="1800" dirty="0"/>
+          </a:p>
+        </p:txBody>
+      </p:sp>
+      <p:sp>
+        <p:nvSpPr>
+          <p:cNvPr id="10" name="Text 8"/>
+          <p:cNvSpPr txBox="1"/>
+          <p:nvPr/>
+        </p:nvSpPr>
+        <p:spPr>
+          <a:xfrm>
+            <a:off x="1371600" y="2962656"/>
+            <a:ext cx="10241280" cy="731520"/>
+          </a:xfrm>
+          <a:prstGeom prst="rect">
+            <a:avLst/>
+          </a:prstGeom>
+          <a:noFill/>
+          <a:ln/>
+        </p:spPr>
+        <p:txBody>
+          <a:bodyPr wrap="square" lIns="0" tIns="0" rIns="0" bIns="0" rtlCol="0" anchor="t"/>
+          <a:lstStyle/>
+          <a:p>
+            <a:pPr indent="0" marL="0">
+              <a:buNone/>
+            </a:pPr>
+            <a:r>
+              <a:rPr lang="en-US" sz="1400" dirty="0">
+                <a:solidFill>
+                  <a:schemeClr val="tx2"/>
+                </a:solidFill>
+              </a:rPr>
+              <a:t>Without it, more expensive per success than the supervised router when tools are stable (+0.23 m$) and tied under drift. The cache result (3.63 vs 4.55 m$) compares against baselines that had no cache.</a:t>
+            </a:r>
+            <a:endParaRPr lang="en-US" sz="1400" dirty="0"/>
+          </a:p>
+        </p:txBody>
+      </p:sp>
+      <p:sp>
+        <p:nvSpPr>
+          <p:cNvPr id="11" name="badge !"/>
+          <p:cNvSpPr/>
+          <p:nvPr/>
+        </p:nvSpPr>
+        <p:spPr>
+          <a:xfrm>
+            <a:off x="640080" y="3831336"/>
+            <a:ext cx="502920" cy="502920"/>
+          </a:xfrm>
+          <a:prstGeom prst="ellipse">
+            <a:avLst/>
+          </a:prstGeom>
+          <a:solidFill>
+            <a:srgbClr val="C8553D"/>
+          </a:solidFill>
+          <a:ln w="12700">
+            <a:solidFill>
+              <a:srgbClr val="C8553D"/>
+            </a:solidFill>
+            <a:prstDash val="solid"/>
+          </a:ln>
+        </p:spPr>
+      </p:sp>
+      <p:sp>
+        <p:nvSpPr>
+          <p:cNvPr id="12" name="Text 10"/>
+          <p:cNvSpPr txBox="1"/>
+          <p:nvPr/>
+        </p:nvSpPr>
+        <p:spPr>
+          <a:xfrm>
+            <a:off x="640080" y="3831336"/>
+            <a:ext cx="502920" cy="502920"/>
+          </a:xfrm>
+          <a:prstGeom prst="rect">
+            <a:avLst/>
+          </a:prstGeom>
+          <a:noFill/>
+          <a:ln/>
+        </p:spPr>
+        <p:txBody>
+          <a:bodyPr wrap="square" lIns="0" tIns="0" rIns="0" bIns="0" rtlCol="0" anchor="ctr"/>
+          <a:lstStyle/>
+          <a:p>
+            <a:pPr algn="ctr" indent="0" marL="0">
+              <a:buNone/>
+            </a:pPr>
+            <a:r>
+              <a:rPr lang="en-US" sz="1600" b="1" dirty="0">
+                <a:solidFill>
+                  <a:srgbClr val="FFFFFF"/>
+                </a:solidFill>
+                <a:latin typeface="Cambria" pitchFamily="34" charset="0"/>
+                <a:ea typeface="Cambria" pitchFamily="34" charset="-122"/>
+                <a:cs typeface="Cambria" pitchFamily="34" charset="-120"/>
+              </a:rPr>
+              <a:t>!</a:t>
+            </a:r>
+            <a:endParaRPr lang="en-US" sz="1600" dirty="0"/>
+          </a:p>
+        </p:txBody>
+      </p:sp>
+      <p:sp>
+        <p:nvSpPr>
+          <p:cNvPr id="13" name="Text 11"/>
+          <p:cNvSpPr txBox="1"/>
+          <p:nvPr/>
+        </p:nvSpPr>
+        <p:spPr>
+          <a:xfrm>
+            <a:off x="1371600" y="3785616"/>
+            <a:ext cx="10241280" cy="365760"/>
+          </a:xfrm>
+          <a:prstGeom prst="rect">
+            <a:avLst/>
+          </a:prstGeom>
+          <a:noFill/>
+          <a:ln/>
+        </p:spPr>
+        <p:txBody>
+          <a:bodyPr wrap="square" lIns="0" tIns="0" rIns="0" bIns="0" rtlCol="0" anchor="t"/>
+          <a:lstStyle/>
+          <a:p>
+            <a:pPr indent="0" marL="0">
+              <a:buNone/>
+            </a:pPr>
+            <a:r>
+              <a:rPr lang="en-US" sz="1800" b="1" dirty="0">
+                <a:solidFill>
+                  <a:schemeClr val="tx1"/>
+                </a:solidFill>
+              </a:rPr>
+              <a:t>More calls, worse tail</a:t>
+            </a:r>
+            <a:endParaRPr lang="en-US" sz="1800" dirty="0"/>
+          </a:p>
+        </p:txBody>
+      </p:sp>
+      <p:sp>
+        <p:nvSpPr>
+          <p:cNvPr id="14" name="Text 12"/>
+          <p:cNvSpPr txBox="1"/>
+          <p:nvPr/>
+        </p:nvSpPr>
+        <p:spPr>
+          <a:xfrm>
+            <a:off x="1371600" y="4169664"/>
+            <a:ext cx="10241280" cy="731520"/>
+          </a:xfrm>
+          <a:prstGeom prst="rect">
+            <a:avLst/>
+          </a:prstGeom>
+          <a:noFill/>
+          <a:ln/>
+        </p:spPr>
+        <p:txBody>
+          <a:bodyPr wrap="square" lIns="0" tIns="0" rIns="0" bIns="0" rtlCol="0" anchor="t"/>
+          <a:lstStyle/>
+          <a:p>
+            <a:pPr indent="0" marL="0">
+              <a:buNone/>
+            </a:pPr>
+            <a:r>
+              <a:rPr lang="en-US" sz="1400" dirty="0">
+                <a:solidFill>
+                  <a:schemeClr val="tx2"/>
+                </a:solidFill>
+              </a:rPr>
+              <a:t>≈1.9 calls per task vs ≈1.6; p95 latency under drift 1357 ms vs 1252 ms for the bandit — verification adds a serial step.</a:t>
+            </a:r>
+            <a:endParaRPr lang="en-US" sz="1400" dirty="0"/>
+          </a:p>
+        </p:txBody>
+      </p:sp>
+      <p:sp>
+        <p:nvSpPr>
+          <p:cNvPr id="15" name="badge !"/>
+          <p:cNvSpPr/>
+          <p:nvPr/>
+        </p:nvSpPr>
+        <p:spPr>
+          <a:xfrm>
+            <a:off x="640080" y="5038344"/>
+            <a:ext cx="502920" cy="502920"/>
+          </a:xfrm>
+          <a:prstGeom prst="ellipse">
+            <a:avLst/>
+          </a:prstGeom>
+          <a:solidFill>
+            <a:srgbClr val="C8553D"/>
+          </a:solidFill>
+          <a:ln w="12700">
+            <a:solidFill>
+              <a:srgbClr val="C8553D"/>
+            </a:solidFill>
+            <a:prstDash val="solid"/>
+          </a:ln>
+        </p:spPr>
+      </p:sp>
+      <p:sp>
+        <p:nvSpPr>
+          <p:cNvPr id="16" name="Text 14"/>
+          <p:cNvSpPr txBox="1"/>
+          <p:nvPr/>
+        </p:nvSpPr>
+        <p:spPr>
+          <a:xfrm>
+            <a:off x="640080" y="5038344"/>
+            <a:ext cx="502920" cy="502920"/>
+          </a:xfrm>
+          <a:prstGeom prst="rect">
+            <a:avLst/>
+          </a:prstGeom>
+          <a:noFill/>
+          <a:ln/>
+        </p:spPr>
+        <p:txBody>
+          <a:bodyPr wrap="square" lIns="0" tIns="0" rIns="0" bIns="0" rtlCol="0" anchor="ctr"/>
+          <a:lstStyle/>
+          <a:p>
+            <a:pPr algn="ctr" indent="0" marL="0">
+              <a:buNone/>
+            </a:pPr>
+            <a:r>
+              <a:rPr lang="en-US" sz="1600" b="1" dirty="0">
+                <a:solidFill>
+                  <a:srgbClr val="FFFFFF"/>
+                </a:solidFill>
+                <a:latin typeface="Cambria" pitchFamily="34" charset="0"/>
+                <a:ea typeface="Cambria" pitchFamily="34" charset="-122"/>
+                <a:cs typeface="Cambria" pitchFamily="34" charset="-120"/>
+              </a:rPr>
+              <a:t>!</a:t>
+            </a:r>
+            <a:endParaRPr lang="en-US" sz="1600" dirty="0"/>
+          </a:p>
+        </p:txBody>
+      </p:sp>
+      <p:sp>
+        <p:nvSpPr>
+          <p:cNvPr id="17" name="Text 15"/>
+          <p:cNvSpPr txBox="1"/>
+          <p:nvPr/>
+        </p:nvSpPr>
+        <p:spPr>
+          <a:xfrm>
+            <a:off x="1371600" y="4992624"/>
+            <a:ext cx="10241280" cy="365760"/>
+          </a:xfrm>
+          <a:prstGeom prst="rect">
+            <a:avLst/>
+          </a:prstGeom>
+          <a:noFill/>
+          <a:ln/>
+        </p:spPr>
+        <p:txBody>
+          <a:bodyPr wrap="square" lIns="0" tIns="0" rIns="0" bIns="0" rtlCol="0" anchor="t"/>
+          <a:lstStyle/>
+          <a:p>
+            <a:pPr indent="0" marL="0">
+              <a:buNone/>
+            </a:pPr>
+            <a:r>
+              <a:rPr lang="en-US" sz="1800" b="1" dirty="0">
+                <a:solidFill>
+                  <a:schemeClr val="tx1"/>
+                </a:solidFill>
+              </a:rPr>
+              <a:t>External validity</a:t>
+            </a:r>
+            <a:endParaRPr lang="en-US" sz="1800" dirty="0"/>
+          </a:p>
+        </p:txBody>
+      </p:sp>
+      <p:sp>
+        <p:nvSpPr>
+          <p:cNvPr id="18" name="Text 16"/>
+          <p:cNvSpPr txBox="1"/>
+          <p:nvPr/>
+        </p:nvSpPr>
+        <p:spPr>
+          <a:xfrm>
+            <a:off x="1371600" y="5376672"/>
+            <a:ext cx="10241280" cy="731520"/>
+          </a:xfrm>
+          <a:prstGeom prst="rect">
+            <a:avLst/>
+          </a:prstGeom>
+          <a:noFill/>
+          <a:ln/>
+        </p:spPr>
+        <p:txBody>
+          <a:bodyPr wrap="square" lIns="0" tIns="0" rIns="0" bIns="0" rtlCol="0" anchor="t"/>
+          <a:lstStyle/>
+          <a:p>
+            <a:pPr indent="0" marL="0">
+              <a:buNone/>
+            </a:pPr>
+            <a:r>
+              <a:rPr lang="en-US" sz="1400" dirty="0">
+                <a:solidFill>
+                  <a:schemeClr val="tx2"/>
+                </a:solidFill>
+              </a:rPr>
+              <a:t>Simulator parameters are hand-specified; the live world is generated with injected faults; the LLM baselines use a 0.5B model. Not production traffic.</a:t>
+            </a:r>
+            <a:endParaRPr lang="en-US" sz="1400" dirty="0"/>
+          </a:p>
+        </p:txBody>
+      </p:sp>
+      <p:sp>
+        <p:nvSpPr>
+          <p:cNvPr id="25" name="Slide Number Placeholder 0"/>
+          <p:cNvSpPr>
+            <a:spLocks noGrp="1"/>
+          </p:cNvSpPr>
+          <p:nvPr>
+            <p:ph type="sldNum" sz="quarter" idx="4294967295"/>
+          </p:nvPr>
+        </p:nvSpPr>
+        <p:spPr>
+          <a:xfrm>
+            <a:off x="11155680" y="6400800"/>
+            <a:ext cx="457200" cy="274320"/>
+          </a:xfrm>
+          <a:prstGeom prst="rect">
+            <a:avLst/>
+          </a:prstGeom>
+          <a:extLst>
+            <a:ext uri="{C572A759-6A51-4108-AA02-DFA0A04FC94B}">
+              <ma14:wrappingTextBoxFlag xmlns:ma14="http://schemas.microsoft.com/office/mac/drawingml/2011/main" val="0"/>
+            </a:ext>
+          </a:extLst>
+        </p:spPr>
+        <p:txBody>
+          <a:bodyPr/>
+          <a:lstStyle>
+            <a:lvl1pPr>
+              <a:defRPr sz="1000">
+                <a:solidFill>
+                  <a:srgbClr val="8A94A6"/>
+                </a:solidFill>
+              </a:defRPr>
+            </a:lvl1pPr>
+          </a:lstStyle>
+          <a:p>
+            <a:pPr algn="r"/>
+            <a:fld id="{F7021451-1387-4CA6-816F-3879F97B5CBC}" type="slidenum">
+              <a:rPr b="0" lang="en-US"/>
+              <a:t>12</a:t>
+            </a:fld>
+            <a:endParaRPr lang="en-US"/>
+          </a:p>
+        </p:txBody>
+      </p:sp>
+    </p:spTree>
+  </p:cSld>
+  <p:clrMapOvr>
+    <a:masterClrMapping/>
+  </p:clrMapOvr>
+</p:sld>
+</file>
+
+<file path=ppt/slides/slide13.xml><?xml version="1.0" encoding="utf-8"?>
+<p:sld xmlns:a="http://schemas.openxmlformats.org/drawingml/2006/main" xmlns:r="http://schemas.openxmlformats.org/officeDocument/2006/relationships" xmlns:p="http://schemas.openxmlformats.org/presentationml/2006/main">
+  <p:cSld name="Slide 13">
+    <p:spTree>
+      <p:nvGrpSpPr>
+        <p:cNvPr id="1" name=""/>
+        <p:cNvGrpSpPr/>
+        <p:nvPr/>
+      </p:nvGrpSpPr>
+      <p:grpSpPr>
+        <a:xfrm>
+          <a:off x="0" y="0"/>
+          <a:ext cx="0" cy="0"/>
+          <a:chOff x="0" y="0"/>
+          <a:chExt cx="0" cy="0"/>
+        </a:xfrm>
+      </p:grpSpPr>
+      <p:sp>
+        <p:nvSpPr>
+          <p:cNvPr id="2" name="Text 0"/>
+          <p:cNvSpPr/>
+          <p:nvPr>
+            <p:ph idx="100" type="title" hasCustomPrompt="1"/>
+          </p:nvPr>
+        </p:nvSpPr>
+        <p:spPr>
+          <a:xfrm>
+            <a:off x="548640" y="320040"/>
+            <a:ext cx="11064240" cy="868680"/>
+          </a:xfrm>
+          <a:prstGeom prst="rect">
+            <a:avLst/>
+          </a:prstGeom>
+          <a:noFill/>
+          <a:ln/>
+        </p:spPr>
+        <p:txBody>
+          <a:bodyPr wrap="square" rtlCol="0" anchor="ctr"/>
+          <a:lstStyle/>
+          <a:p>
+            <a:pPr indent="0" marL="0">
+              <a:buNone/>
+            </a:pPr>
+            <a:r>
+              <a:rPr lang="en-US" sz="3200" b="1" dirty="0">
+                <a:solidFill>
+                  <a:schemeClr val="tx1"/>
+                </a:solidFill>
+                <a:latin typeface="Cambria" pitchFamily="34" charset="0"/>
+                <a:ea typeface="Cambria" pitchFamily="34" charset="-122"/>
+                <a:cs typeface="Cambria" pitchFamily="34" charset="-120"/>
+              </a:rPr>
+              <a:t>Production-ready service, not just an experiment</a:t>
+            </a:r>
+            <a:endParaRPr lang="en-US" sz="3200" dirty="0"/>
+          </a:p>
+        </p:txBody>
+      </p:sp>
+      <p:sp>
+        <p:nvSpPr>
+          <p:cNvPr id="3" name="production API"/>
+          <p:cNvSpPr/>
+          <p:nvPr/>
+        </p:nvSpPr>
+        <p:spPr>
+          <a:xfrm>
+            <a:off x="548640" y="1554480"/>
+            <a:ext cx="3520440" cy="1874520"/>
+          </a:xfrm>
+          <a:prstGeom prst="roundRect">
+            <a:avLst>
+              <a:gd name="adj" fmla="val 3902"/>
+            </a:avLst>
+          </a:prstGeom>
+          <a:solidFill>
+            <a:srgbClr val="EEF1F5"/>
+          </a:solidFill>
+          <a:ln w="12700">
+            <a:solidFill>
+              <a:srgbClr val="EEF1F5"/>
+            </a:solidFill>
+            <a:prstDash val="solid"/>
+          </a:ln>
+        </p:spPr>
+      </p:sp>
+      <p:sp>
+        <p:nvSpPr>
+          <p:cNvPr id="4" name="Text 2"/>
+          <p:cNvSpPr txBox="1"/>
+          <p:nvPr/>
+        </p:nvSpPr>
+        <p:spPr>
+          <a:xfrm>
+            <a:off x="822960" y="1783080"/>
+            <a:ext cx="3017520" cy="411480"/>
+          </a:xfrm>
+          <a:prstGeom prst="rect">
+            <a:avLst/>
+          </a:prstGeom>
+          <a:noFill/>
+          <a:ln/>
+        </p:spPr>
+        <p:txBody>
+          <a:bodyPr wrap="square" lIns="0" tIns="0" rIns="0" bIns="0" rtlCol="0" anchor="t"/>
+          <a:lstStyle/>
+          <a:p>
+            <a:pPr indent="0" marL="0">
+              <a:buNone/>
+            </a:pPr>
+            <a:r>
+              <a:rPr lang="en-US" sz="1800" b="1" dirty="0">
+                <a:solidFill>
+                  <a:schemeClr val="accent2"/>
+                </a:solidFill>
+              </a:rPr>
+              <a:t>API</a:t>
+            </a:r>
+            <a:endParaRPr lang="en-US" sz="1800" dirty="0"/>
+          </a:p>
+        </p:txBody>
+      </p:sp>
+      <p:sp>
+        <p:nvSpPr>
+          <p:cNvPr id="5" name="Text 3"/>
+          <p:cNvSpPr txBox="1"/>
+          <p:nvPr/>
+        </p:nvSpPr>
+        <p:spPr>
+          <a:xfrm>
+            <a:off x="822960" y="2286000"/>
+            <a:ext cx="3017520" cy="1051560"/>
+          </a:xfrm>
+          <a:prstGeom prst="rect">
+            <a:avLst/>
+          </a:prstGeom>
+          <a:noFill/>
+          <a:ln/>
+        </p:spPr>
+        <p:txBody>
+          <a:bodyPr wrap="square" lIns="0" tIns="0" rIns="0" bIns="0" rtlCol="0" anchor="t"/>
+          <a:lstStyle/>
+          <a:p>
+            <a:pPr indent="0" marL="0">
+              <a:buNone/>
+            </a:pPr>
+            <a:r>
+              <a:rPr lang="en-US" sz="1400" dirty="0">
+                <a:solidFill>
+                  <a:schemeClr val="tx2"/>
+                </a:solidFill>
+              </a:rPr>
+              <a:t>FastAPI: route, execute, feedback, stats; API-key RBAC; audit log; live router console at /ui</a:t>
+            </a:r>
+            <a:endParaRPr lang="en-US" sz="1400" dirty="0"/>
+          </a:p>
+        </p:txBody>
+      </p:sp>
+      <p:sp>
+        <p:nvSpPr>
+          <p:cNvPr id="6" name="production Observability"/>
+          <p:cNvSpPr/>
+          <p:nvPr/>
+        </p:nvSpPr>
+        <p:spPr>
+          <a:xfrm>
+            <a:off x="4297680" y="1554480"/>
+            <a:ext cx="3520440" cy="1874520"/>
+          </a:xfrm>
+          <a:prstGeom prst="roundRect">
+            <a:avLst>
+              <a:gd name="adj" fmla="val 3902"/>
+            </a:avLst>
+          </a:prstGeom>
+          <a:solidFill>
+            <a:srgbClr val="EEF1F5"/>
+          </a:solidFill>
+          <a:ln w="12700">
+            <a:solidFill>
+              <a:srgbClr val="EEF1F5"/>
+            </a:solidFill>
+            <a:prstDash val="solid"/>
+          </a:ln>
+        </p:spPr>
+      </p:sp>
+      <p:sp>
+        <p:nvSpPr>
+          <p:cNvPr id="7" name="Text 5"/>
+          <p:cNvSpPr txBox="1"/>
+          <p:nvPr/>
+        </p:nvSpPr>
+        <p:spPr>
+          <a:xfrm>
+            <a:off x="4572000" y="1783080"/>
+            <a:ext cx="3017520" cy="411480"/>
+          </a:xfrm>
+          <a:prstGeom prst="rect">
+            <a:avLst/>
+          </a:prstGeom>
+          <a:noFill/>
+          <a:ln/>
+        </p:spPr>
+        <p:txBody>
+          <a:bodyPr wrap="square" lIns="0" tIns="0" rIns="0" bIns="0" rtlCol="0" anchor="t"/>
+          <a:lstStyle/>
+          <a:p>
+            <a:pPr indent="0" marL="0">
+              <a:buNone/>
+            </a:pPr>
+            <a:r>
+              <a:rPr lang="en-US" sz="1800" b="1" dirty="0">
+                <a:solidFill>
+                  <a:schemeClr val="accent2"/>
+                </a:solidFill>
+              </a:rPr>
+              <a:t>Observability</a:t>
+            </a:r>
+            <a:endParaRPr lang="en-US" sz="1800" dirty="0"/>
+          </a:p>
+        </p:txBody>
+      </p:sp>
+      <p:sp>
+        <p:nvSpPr>
+          <p:cNvPr id="8" name="Text 6"/>
+          <p:cNvSpPr txBox="1"/>
+          <p:nvPr/>
+        </p:nvSpPr>
+        <p:spPr>
+          <a:xfrm>
+            <a:off x="4572000" y="2286000"/>
+            <a:ext cx="3017520" cy="1051560"/>
+          </a:xfrm>
+          <a:prstGeom prst="rect">
+            <a:avLst/>
+          </a:prstGeom>
+          <a:noFill/>
+          <a:ln/>
+        </p:spPr>
+        <p:txBody>
+          <a:bodyPr wrap="square" lIns="0" tIns="0" rIns="0" bIns="0" rtlCol="0" anchor="t"/>
+          <a:lstStyle/>
+          <a:p>
+            <a:pPr indent="0" marL="0">
+              <a:buNone/>
+            </a:pPr>
+            <a:r>
+              <a:rPr lang="en-US" sz="1400" dirty="0">
+                <a:solidFill>
+                  <a:schemeClr val="tx2"/>
+                </a:solidFill>
+              </a:rPr>
+              <a:t>Prometheus metrics: decisions, tool calls, latency, cost, feedback</a:t>
+            </a:r>
+            <a:endParaRPr lang="en-US" sz="1400" dirty="0"/>
+          </a:p>
+        </p:txBody>
+      </p:sp>
+      <p:sp>
+        <p:nvSpPr>
+          <p:cNvPr id="9" name="production State"/>
+          <p:cNvSpPr/>
+          <p:nvPr/>
+        </p:nvSpPr>
+        <p:spPr>
+          <a:xfrm>
+            <a:off x="8046720" y="1554480"/>
+            <a:ext cx="3520440" cy="1874520"/>
+          </a:xfrm>
+          <a:prstGeom prst="roundRect">
+            <a:avLst>
+              <a:gd name="adj" fmla="val 3902"/>
+            </a:avLst>
+          </a:prstGeom>
+          <a:solidFill>
+            <a:srgbClr val="EEF1F5"/>
+          </a:solidFill>
+          <a:ln w="12700">
+            <a:solidFill>
+              <a:srgbClr val="EEF1F5"/>
+            </a:solidFill>
+            <a:prstDash val="solid"/>
+          </a:ln>
+        </p:spPr>
+      </p:sp>
+      <p:sp>
+        <p:nvSpPr>
+          <p:cNvPr id="10" name="Text 8"/>
+          <p:cNvSpPr txBox="1"/>
+          <p:nvPr/>
+        </p:nvSpPr>
+        <p:spPr>
+          <a:xfrm>
+            <a:off x="8321040" y="1783080"/>
+            <a:ext cx="3017520" cy="411480"/>
+          </a:xfrm>
+          <a:prstGeom prst="rect">
+            <a:avLst/>
+          </a:prstGeom>
+          <a:noFill/>
+          <a:ln/>
+        </p:spPr>
+        <p:txBody>
+          <a:bodyPr wrap="square" lIns="0" tIns="0" rIns="0" bIns="0" rtlCol="0" anchor="t"/>
+          <a:lstStyle/>
+          <a:p>
+            <a:pPr indent="0" marL="0">
+              <a:buNone/>
+            </a:pPr>
+            <a:r>
+              <a:rPr lang="en-US" sz="1800" b="1" dirty="0">
+                <a:solidFill>
+                  <a:schemeClr val="accent2"/>
+                </a:solidFill>
+              </a:rPr>
+              <a:t>State</a:t>
+            </a:r>
+            <a:endParaRPr lang="en-US" sz="1800" dirty="0"/>
+          </a:p>
+        </p:txBody>
+      </p:sp>
+      <p:sp>
+        <p:nvSpPr>
+          <p:cNvPr id="11" name="Text 9"/>
+          <p:cNvSpPr txBox="1"/>
+          <p:nvPr/>
+        </p:nvSpPr>
+        <p:spPr>
+          <a:xfrm>
+            <a:off x="8321040" y="2286000"/>
+            <a:ext cx="3017520" cy="1051560"/>
+          </a:xfrm>
+          <a:prstGeom prst="rect">
+            <a:avLst/>
+          </a:prstGeom>
+          <a:noFill/>
+          <a:ln/>
+        </p:spPr>
+        <p:txBody>
+          <a:bodyPr wrap="square" lIns="0" tIns="0" rIns="0" bIns="0" rtlCol="0" anchor="t"/>
+          <a:lstStyle/>
+          <a:p>
+            <a:pPr indent="0" marL="0">
+              <a:buNone/>
+            </a:pPr>
+            <a:r>
+              <a:rPr lang="en-US" sz="1400" dirty="0">
+                <a:solidFill>
+                  <a:schemeClr val="tx2"/>
+                </a:solidFill>
+              </a:rPr>
+              <a:t>Router posteriors snapshotted to file or Redis; atomic writes</a:t>
+            </a:r>
+            <a:endParaRPr lang="en-US" sz="1400" dirty="0"/>
+          </a:p>
+        </p:txBody>
+      </p:sp>
+      <p:sp>
+        <p:nvSpPr>
+          <p:cNvPr id="12" name="production Safe tools"/>
+          <p:cNvSpPr/>
+          <p:nvPr/>
+        </p:nvSpPr>
+        <p:spPr>
+          <a:xfrm>
+            <a:off x="548640" y="3703320"/>
+            <a:ext cx="3520440" cy="1874520"/>
+          </a:xfrm>
+          <a:prstGeom prst="roundRect">
+            <a:avLst>
+              <a:gd name="adj" fmla="val 3902"/>
+            </a:avLst>
+          </a:prstGeom>
+          <a:solidFill>
+            <a:srgbClr val="EEF1F5"/>
+          </a:solidFill>
+          <a:ln w="12700">
+            <a:solidFill>
+              <a:srgbClr val="EEF1F5"/>
+            </a:solidFill>
+            <a:prstDash val="solid"/>
+          </a:ln>
+        </p:spPr>
+      </p:sp>
+      <p:sp>
+        <p:nvSpPr>
+          <p:cNvPr id="13" name="Text 11"/>
+          <p:cNvSpPr txBox="1"/>
+          <p:nvPr/>
+        </p:nvSpPr>
+        <p:spPr>
+          <a:xfrm>
+            <a:off x="822960" y="3931920"/>
+            <a:ext cx="3017520" cy="411480"/>
+          </a:xfrm>
+          <a:prstGeom prst="rect">
+            <a:avLst/>
+          </a:prstGeom>
+          <a:noFill/>
+          <a:ln/>
+        </p:spPr>
+        <p:txBody>
+          <a:bodyPr wrap="square" lIns="0" tIns="0" rIns="0" bIns="0" rtlCol="0" anchor="t"/>
+          <a:lstStyle/>
+          <a:p>
+            <a:pPr indent="0" marL="0">
+              <a:buNone/>
+            </a:pPr>
+            <a:r>
+              <a:rPr lang="en-US" sz="1800" b="1" dirty="0">
+                <a:solidFill>
+                  <a:schemeClr val="accent2"/>
+                </a:solidFill>
+              </a:rPr>
+              <a:t>Safe tools</a:t>
+            </a:r>
+            <a:endParaRPr lang="en-US" sz="1800" dirty="0"/>
+          </a:p>
+        </p:txBody>
+      </p:sp>
+      <p:sp>
+        <p:nvSpPr>
+          <p:cNvPr id="14" name="Text 12"/>
+          <p:cNvSpPr txBox="1"/>
+          <p:nvPr/>
+        </p:nvSpPr>
+        <p:spPr>
+          <a:xfrm>
+            <a:off x="822960" y="4434840"/>
+            <a:ext cx="3017520" cy="1051560"/>
+          </a:xfrm>
+          <a:prstGeom prst="rect">
+            <a:avLst/>
+          </a:prstGeom>
+          <a:noFill/>
+          <a:ln/>
+        </p:spPr>
+        <p:txBody>
+          <a:bodyPr wrap="square" lIns="0" tIns="0" rIns="0" bIns="0" rtlCol="0" anchor="t"/>
+          <a:lstStyle/>
+          <a:p>
+            <a:pPr indent="0" marL="0">
+              <a:buNone/>
+            </a:pPr>
+            <a:r>
+              <a:rPr lang="en-US" sz="1400" dirty="0">
+                <a:solidFill>
+                  <a:schemeClr val="tx2"/>
+                </a:solidFill>
+              </a:rPr>
+              <a:t>Read-only SQL with authorizer and time budget; AST allow-listed Python in an isolated subprocess</a:t>
+            </a:r>
+            <a:endParaRPr lang="en-US" sz="1400" dirty="0"/>
+          </a:p>
+        </p:txBody>
+      </p:sp>
+      <p:sp>
+        <p:nvSpPr>
+          <p:cNvPr id="15" name="production Agent integration"/>
+          <p:cNvSpPr/>
+          <p:nvPr/>
+        </p:nvSpPr>
+        <p:spPr>
+          <a:xfrm>
+            <a:off x="4297680" y="3703320"/>
+            <a:ext cx="3520440" cy="1874520"/>
+          </a:xfrm>
+          <a:prstGeom prst="roundRect">
+            <a:avLst>
+              <a:gd name="adj" fmla="val 3902"/>
+            </a:avLst>
+          </a:prstGeom>
+          <a:solidFill>
+            <a:srgbClr val="EEF1F5"/>
+          </a:solidFill>
+          <a:ln w="12700">
+            <a:solidFill>
+              <a:srgbClr val="EEF1F5"/>
+            </a:solidFill>
+            <a:prstDash val="solid"/>
+          </a:ln>
+        </p:spPr>
+      </p:sp>
+      <p:sp>
+        <p:nvSpPr>
+          <p:cNvPr id="16" name="Text 14"/>
+          <p:cNvSpPr txBox="1"/>
+          <p:nvPr/>
+        </p:nvSpPr>
+        <p:spPr>
+          <a:xfrm>
+            <a:off x="4572000" y="3931920"/>
+            <a:ext cx="3017520" cy="411480"/>
+          </a:xfrm>
+          <a:prstGeom prst="rect">
+            <a:avLst/>
+          </a:prstGeom>
+          <a:noFill/>
+          <a:ln/>
+        </p:spPr>
+        <p:txBody>
+          <a:bodyPr wrap="square" lIns="0" tIns="0" rIns="0" bIns="0" rtlCol="0" anchor="t"/>
+          <a:lstStyle/>
+          <a:p>
+            <a:pPr indent="0" marL="0">
+              <a:buNone/>
+            </a:pPr>
+            <a:r>
+              <a:rPr lang="en-US" sz="1800" b="1" dirty="0">
+                <a:solidFill>
+                  <a:schemeClr val="accent2"/>
+                </a:solidFill>
+              </a:rPr>
+              <a:t>Agent integration</a:t>
+            </a:r>
+            <a:endParaRPr lang="en-US" sz="1800" dirty="0"/>
+          </a:p>
+        </p:txBody>
+      </p:sp>
+      <p:sp>
+        <p:nvSpPr>
+          <p:cNvPr id="17" name="Text 15"/>
+          <p:cNvSpPr txBox="1"/>
+          <p:nvPr/>
+        </p:nvSpPr>
+        <p:spPr>
+          <a:xfrm>
+            <a:off x="4572000" y="4434840"/>
+            <a:ext cx="3017520" cy="1051560"/>
+          </a:xfrm>
+          <a:prstGeom prst="rect">
+            <a:avLst/>
+          </a:prstGeom>
+          <a:noFill/>
+          <a:ln/>
+        </p:spPr>
+        <p:txBody>
+          <a:bodyPr wrap="square" lIns="0" tIns="0" rIns="0" bIns="0" rtlCol="0" anchor="t"/>
+          <a:lstStyle/>
+          <a:p>
+            <a:pPr indent="0" marL="0">
+              <a:buNone/>
+            </a:pPr>
+            <a:r>
+              <a:rPr lang="en-US" sz="1400" dirty="0">
+                <a:solidFill>
+                  <a:schemeClr val="tx2"/>
+                </a:solidFill>
+              </a:rPr>
+              <a:t>LangChain tool selector and a LangGraph node</a:t>
+            </a:r>
+            <a:endParaRPr lang="en-US" sz="1400" dirty="0"/>
+          </a:p>
+        </p:txBody>
+      </p:sp>
+      <p:sp>
+        <p:nvSpPr>
+          <p:cNvPr id="18" name="production Delivery"/>
+          <p:cNvSpPr/>
+          <p:nvPr/>
+        </p:nvSpPr>
+        <p:spPr>
+          <a:xfrm>
+            <a:off x="8046720" y="3703320"/>
+            <a:ext cx="3520440" cy="1874520"/>
+          </a:xfrm>
+          <a:prstGeom prst="roundRect">
+            <a:avLst>
+              <a:gd name="adj" fmla="val 3902"/>
+            </a:avLst>
+          </a:prstGeom>
+          <a:solidFill>
+            <a:srgbClr val="EEF1F5"/>
+          </a:solidFill>
+          <a:ln w="12700">
+            <a:solidFill>
+              <a:srgbClr val="EEF1F5"/>
+            </a:solidFill>
+            <a:prstDash val="solid"/>
+          </a:ln>
+        </p:spPr>
+      </p:sp>
+      <p:sp>
+        <p:nvSpPr>
+          <p:cNvPr id="19" name="Text 17"/>
+          <p:cNvSpPr txBox="1"/>
+          <p:nvPr/>
+        </p:nvSpPr>
+        <p:spPr>
+          <a:xfrm>
+            <a:off x="8321040" y="3931920"/>
+            <a:ext cx="3017520" cy="411480"/>
+          </a:xfrm>
+          <a:prstGeom prst="rect">
+            <a:avLst/>
+          </a:prstGeom>
+          <a:noFill/>
+          <a:ln/>
+        </p:spPr>
+        <p:txBody>
+          <a:bodyPr wrap="square" lIns="0" tIns="0" rIns="0" bIns="0" rtlCol="0" anchor="t"/>
+          <a:lstStyle/>
+          <a:p>
+            <a:pPr indent="0" marL="0">
+              <a:buNone/>
+            </a:pPr>
+            <a:r>
+              <a:rPr lang="en-US" sz="1800" b="1" dirty="0">
+                <a:solidFill>
+                  <a:schemeClr val="accent2"/>
+                </a:solidFill>
+              </a:rPr>
+              <a:t>Delivery</a:t>
+            </a:r>
+            <a:endParaRPr lang="en-US" sz="1800" dirty="0"/>
+          </a:p>
+        </p:txBody>
+      </p:sp>
+      <p:sp>
+        <p:nvSpPr>
+          <p:cNvPr id="20" name="Text 18"/>
+          <p:cNvSpPr txBox="1"/>
+          <p:nvPr/>
+        </p:nvSpPr>
+        <p:spPr>
+          <a:xfrm>
+            <a:off x="8321040" y="4434840"/>
+            <a:ext cx="3017520" cy="1051560"/>
+          </a:xfrm>
+          <a:prstGeom prst="rect">
+            <a:avLst/>
+          </a:prstGeom>
+          <a:noFill/>
+          <a:ln/>
+        </p:spPr>
+        <p:txBody>
+          <a:bodyPr wrap="square" lIns="0" tIns="0" rIns="0" bIns="0" rtlCol="0" anchor="t"/>
+          <a:lstStyle/>
+          <a:p>
+            <a:pPr indent="0" marL="0">
+              <a:buNone/>
+            </a:pPr>
+            <a:r>
+              <a:rPr lang="en-US" sz="1400" dirty="0">
+                <a:solidFill>
+                  <a:schemeClr val="tx2"/>
+                </a:solidFill>
+              </a:rPr>
+              <a:t>Docker Compose (non-root, read-only FS), CI: lint, 72 tests, benchmark smoke, image build</a:t>
+            </a:r>
+            <a:endParaRPr lang="en-US" sz="1400" dirty="0"/>
+          </a:p>
+        </p:txBody>
+      </p:sp>
+      <p:sp>
+        <p:nvSpPr>
+          <p:cNvPr id="25" name="Slide Number Placeholder 0"/>
+          <p:cNvSpPr>
+            <a:spLocks noGrp="1"/>
+          </p:cNvSpPr>
+          <p:nvPr>
+            <p:ph type="sldNum" sz="quarter" idx="4294967295"/>
+          </p:nvPr>
+        </p:nvSpPr>
+        <p:spPr>
+          <a:xfrm>
+            <a:off x="11155680" y="6400800"/>
+            <a:ext cx="457200" cy="274320"/>
+          </a:xfrm>
+          <a:prstGeom prst="rect">
+            <a:avLst/>
+          </a:prstGeom>
+          <a:extLst>
+            <a:ext uri="{C572A759-6A51-4108-AA02-DFA0A04FC94B}">
+              <ma14:wrappingTextBoxFlag xmlns:ma14="http://schemas.microsoft.com/office/mac/drawingml/2011/main" val="0"/>
+            </a:ext>
+          </a:extLst>
+        </p:spPr>
+        <p:txBody>
+          <a:bodyPr/>
+          <a:lstStyle>
+            <a:lvl1pPr>
+              <a:defRPr sz="1000">
+                <a:solidFill>
+                  <a:srgbClr val="8A94A6"/>
+                </a:solidFill>
+              </a:defRPr>
+            </a:lvl1pPr>
+          </a:lstStyle>
+          <a:p>
+            <a:pPr algn="r"/>
+            <a:fld id="{F7021451-1387-4CA6-816F-3879F97B5CBC}" type="slidenum">
+              <a:rPr b="0" lang="en-US"/>
+              <a:t>13</a:t>
+            </a:fld>
+            <a:endParaRPr lang="en-US"/>
+          </a:p>
+        </p:txBody>
+      </p:sp>
+    </p:spTree>
+  </p:cSld>
+  <p:clrMapOvr>
+    <a:masterClrMapping/>
+  </p:clrMapOvr>
+</p:sld>
+</file>
+
+<file path=ppt/slides/slide14.xml><?xml version="1.0" encoding="utf-8"?>
+<p:sld xmlns:a="http://schemas.openxmlformats.org/drawingml/2006/main" xmlns:r="http://schemas.openxmlformats.org/officeDocument/2006/relationships" xmlns:p="http://schemas.openxmlformats.org/presentationml/2006/main">
+  <p:cSld name="Slide 14">
+    <p:spTree>
+      <p:nvGrpSpPr>
+        <p:cNvPr id="1" name=""/>
+        <p:cNvGrpSpPr/>
+        <p:nvPr/>
+      </p:nvGrpSpPr>
+      <p:grpSpPr>
+        <a:xfrm>
+          <a:off x="0" y="0"/>
+          <a:ext cx="0" cy="0"/>
+          <a:chOff x="0" y="0"/>
+          <a:chExt cx="0" cy="0"/>
+        </a:xfrm>
+      </p:grpSpPr>
+      <p:sp>
+        <p:nvSpPr>
+          <p:cNvPr id="2" name="Text 0"/>
+          <p:cNvSpPr/>
+          <p:nvPr>
+            <p:ph idx="100" type="title" hasCustomPrompt="1"/>
+          </p:nvPr>
+        </p:nvSpPr>
+        <p:spPr>
+          <a:xfrm>
+            <a:off x="548640" y="320040"/>
+            <a:ext cx="11064240" cy="868680"/>
+          </a:xfrm>
+          <a:prstGeom prst="rect">
+            <a:avLst/>
+          </a:prstGeom>
+          <a:noFill/>
+          <a:ln/>
+        </p:spPr>
+        <p:txBody>
+          <a:bodyPr wrap="square" rtlCol="0" anchor="ctr"/>
+          <a:lstStyle/>
+          <a:p>
+            <a:pPr indent="0" marL="0">
+              <a:buNone/>
+            </a:pPr>
+            <a:r>
+              <a:rPr lang="en-US" sz="3200" b="1" dirty="0">
+                <a:solidFill>
                   <a:schemeClr val="bg1"/>
                 </a:solidFill>
                 <a:latin typeface="Cambria" pitchFamily="34" charset="0"/>
@@ -5534,7 +7426,7 @@
                   <a:srgbClr val="FFFFFF"/>
                 </a:solidFill>
               </a:rPr>
-              <a:t>Plan-level, constrained, drift-aware routing beats rules, a supervised router and a contextual bandit on success — in simulation, on real tools, and at every understanding quality.</a:t>
+              <a:t>Plan-level, constrained, drift-aware routing beats rules, a supervised router, a contextual bandit and an LLM router on success — in simulation, on real tools, and at every understanding quality.</a:t>
             </a:r>
             <a:endParaRPr lang="en-US" sz="1800" dirty="0"/>
           </a:p>
@@ -5552,7 +7444,7 @@
                   <a:srgbClr val="FFFFFF"/>
                 </a:solidFill>
               </a:rPr>
-              <a:t>Cost per success is a tunable trade-off, not a free win: the quality target decides it.</a:t>
+              <a:t>Cost per success is a tunable trade-off: the quality target sets it, and a learned cache cuts it by 22% at almost no accuracy loss.</a:t>
             </a:r>
             <a:endParaRPr lang="en-US" sz="1800" dirty="0"/>
           </a:p>
@@ -5789,7 +7681,7 @@
             <a:pPr algn="r"/>
             <a:fld id="{F7021451-1387-4CA6-816F-3879F97B5CBC}" type="slidenum">
               <a:rPr b="0" lang="en-US"/>
-              <a:t>12</a:t>
+              <a:t>14</a:t>
             </a:fld>
             <a:endParaRPr lang="en-US"/>
           </a:p>
@@ -8565,1138 +10457,211 @@
                 <a:ea typeface="Cambria" pitchFamily="34" charset="-122"/>
                 <a:cs typeface="Cambria" pitchFamily="34" charset="-120"/>
               </a:rPr>
-              <a:t>Success costs money: the quality target sets the trade-off</a:t>
+              <a:t>An LLM choosing tools directly is the weakest baseline</a:t>
             </a:r>
             <a:endParaRPr lang="en-US" sz="3200" dirty="0"/>
           </a:p>
         </p:txBody>
       </p:sp>
-      <p:sp>
-        <p:nvSpPr>
-          <p:cNvPr id="3" name="Shape 1"/>
-          <p:cNvSpPr/>
-          <p:nvPr/>
-        </p:nvSpPr>
-        <p:spPr>
-          <a:xfrm>
-            <a:off x="914400" y="5669280"/>
-            <a:ext cx="6675120" cy="0"/>
-          </a:xfrm>
-          <a:prstGeom prst="line">
-            <a:avLst/>
-          </a:prstGeom>
-          <a:noFill/>
-          <a:ln w="12700">
-            <a:solidFill>
-              <a:srgbClr val="D9DEE6"/>
-            </a:solidFill>
-            <a:prstDash val="solid"/>
-          </a:ln>
-        </p:spPr>
-      </p:sp>
-      <p:sp>
-        <p:nvSpPr>
-          <p:cNvPr id="4" name="Shape 2"/>
-          <p:cNvSpPr/>
-          <p:nvPr/>
-        </p:nvSpPr>
-        <p:spPr>
-          <a:xfrm>
-            <a:off x="914400" y="1691640"/>
-            <a:ext cx="0" cy="3977640"/>
-          </a:xfrm>
-          <a:prstGeom prst="line">
-            <a:avLst/>
-          </a:prstGeom>
-          <a:noFill/>
-          <a:ln w="12700">
-            <a:solidFill>
-              <a:srgbClr val="D9DEE6"/>
-            </a:solidFill>
-            <a:prstDash val="solid"/>
-          </a:ln>
-        </p:spPr>
-      </p:sp>
-      <p:sp>
-        <p:nvSpPr>
-          <p:cNvPr id="5" name="Text 3"/>
-          <p:cNvSpPr txBox="1"/>
-          <p:nvPr/>
-        </p:nvSpPr>
-        <p:spPr>
-          <a:xfrm>
-            <a:off x="640080" y="5715000"/>
-            <a:ext cx="548640" cy="274320"/>
-          </a:xfrm>
-          <a:prstGeom prst="rect">
-            <a:avLst/>
-          </a:prstGeom>
-          <a:noFill/>
-          <a:ln/>
-        </p:spPr>
-        <p:txBody>
-          <a:bodyPr wrap="square" lIns="0" tIns="0" rIns="0" bIns="0" rtlCol="0" anchor="ctr"/>
-          <a:lstStyle/>
-          <a:p>
-            <a:pPr algn="ctr" indent="0" marL="0">
-              <a:buNone/>
-            </a:pPr>
-            <a:r>
-              <a:rPr lang="en-US" sz="1100" dirty="0">
-                <a:solidFill>
-                  <a:srgbClr val="5F6B7F"/>
-                </a:solidFill>
-              </a:rPr>
-              <a:t>3.5</a:t>
-            </a:r>
-            <a:endParaRPr lang="en-US" sz="1100" dirty="0"/>
-          </a:p>
-        </p:txBody>
-      </p:sp>
-      <p:sp>
-        <p:nvSpPr>
-          <p:cNvPr id="6" name="Text 4"/>
-          <p:cNvSpPr txBox="1"/>
-          <p:nvPr/>
-        </p:nvSpPr>
-        <p:spPr>
-          <a:xfrm>
-            <a:off x="2308860" y="5715000"/>
-            <a:ext cx="548640" cy="274320"/>
-          </a:xfrm>
-          <a:prstGeom prst="rect">
-            <a:avLst/>
-          </a:prstGeom>
-          <a:noFill/>
-          <a:ln/>
-        </p:spPr>
-        <p:txBody>
-          <a:bodyPr wrap="square" lIns="0" tIns="0" rIns="0" bIns="0" rtlCol="0" anchor="ctr"/>
-          <a:lstStyle/>
-          <a:p>
-            <a:pPr algn="ctr" indent="0" marL="0">
-              <a:buNone/>
-            </a:pPr>
-            <a:r>
-              <a:rPr lang="en-US" sz="1100" dirty="0">
-                <a:solidFill>
-                  <a:srgbClr val="5F6B7F"/>
-                </a:solidFill>
-              </a:rPr>
-              <a:t>4.0</a:t>
-            </a:r>
-            <a:endParaRPr lang="en-US" sz="1100" dirty="0"/>
-          </a:p>
-        </p:txBody>
-      </p:sp>
-      <p:sp>
-        <p:nvSpPr>
-          <p:cNvPr id="7" name="Text 5"/>
-          <p:cNvSpPr txBox="1"/>
-          <p:nvPr/>
-        </p:nvSpPr>
-        <p:spPr>
-          <a:xfrm>
-            <a:off x="3977640" y="5715000"/>
-            <a:ext cx="548640" cy="274320"/>
-          </a:xfrm>
-          <a:prstGeom prst="rect">
-            <a:avLst/>
-          </a:prstGeom>
-          <a:noFill/>
-          <a:ln/>
-        </p:spPr>
-        <p:txBody>
-          <a:bodyPr wrap="square" lIns="0" tIns="0" rIns="0" bIns="0" rtlCol="0" anchor="ctr"/>
-          <a:lstStyle/>
-          <a:p>
-            <a:pPr algn="ctr" indent="0" marL="0">
-              <a:buNone/>
-            </a:pPr>
-            <a:r>
-              <a:rPr lang="en-US" sz="1100" dirty="0">
-                <a:solidFill>
-                  <a:srgbClr val="5F6B7F"/>
-                </a:solidFill>
-              </a:rPr>
-              <a:t>4.5</a:t>
-            </a:r>
-            <a:endParaRPr lang="en-US" sz="1100" dirty="0"/>
-          </a:p>
-        </p:txBody>
-      </p:sp>
-      <p:sp>
-        <p:nvSpPr>
-          <p:cNvPr id="8" name="Text 6"/>
-          <p:cNvSpPr txBox="1"/>
-          <p:nvPr/>
-        </p:nvSpPr>
-        <p:spPr>
-          <a:xfrm>
-            <a:off x="5646420" y="5715000"/>
-            <a:ext cx="548640" cy="274320"/>
-          </a:xfrm>
-          <a:prstGeom prst="rect">
-            <a:avLst/>
-          </a:prstGeom>
-          <a:noFill/>
-          <a:ln/>
-        </p:spPr>
-        <p:txBody>
-          <a:bodyPr wrap="square" lIns="0" tIns="0" rIns="0" bIns="0" rtlCol="0" anchor="ctr"/>
-          <a:lstStyle/>
-          <a:p>
-            <a:pPr algn="ctr" indent="0" marL="0">
-              <a:buNone/>
-            </a:pPr>
-            <a:r>
-              <a:rPr lang="en-US" sz="1100" dirty="0">
-                <a:solidFill>
-                  <a:srgbClr val="5F6B7F"/>
-                </a:solidFill>
-              </a:rPr>
-              <a:t>5.0</a:t>
-            </a:r>
-            <a:endParaRPr lang="en-US" sz="1100" dirty="0"/>
-          </a:p>
-        </p:txBody>
-      </p:sp>
-      <p:sp>
-        <p:nvSpPr>
-          <p:cNvPr id="9" name="Text 7"/>
-          <p:cNvSpPr txBox="1"/>
-          <p:nvPr/>
-        </p:nvSpPr>
-        <p:spPr>
-          <a:xfrm>
-            <a:off x="7315200" y="5715000"/>
-            <a:ext cx="548640" cy="274320"/>
-          </a:xfrm>
-          <a:prstGeom prst="rect">
-            <a:avLst/>
-          </a:prstGeom>
-          <a:noFill/>
-          <a:ln/>
-        </p:spPr>
-        <p:txBody>
-          <a:bodyPr wrap="square" lIns="0" tIns="0" rIns="0" bIns="0" rtlCol="0" anchor="ctr"/>
-          <a:lstStyle/>
-          <a:p>
-            <a:pPr algn="ctr" indent="0" marL="0">
-              <a:buNone/>
-            </a:pPr>
-            <a:r>
-              <a:rPr lang="en-US" sz="1100" dirty="0">
-                <a:solidFill>
-                  <a:srgbClr val="5F6B7F"/>
-                </a:solidFill>
-              </a:rPr>
-              <a:t>5.5</a:t>
-            </a:r>
-            <a:endParaRPr lang="en-US" sz="1100" dirty="0"/>
-          </a:p>
-        </p:txBody>
-      </p:sp>
-      <p:sp>
-        <p:nvSpPr>
-          <p:cNvPr id="10" name="Text 8"/>
-          <p:cNvSpPr txBox="1"/>
-          <p:nvPr/>
-        </p:nvSpPr>
-        <p:spPr>
-          <a:xfrm>
-            <a:off x="320040" y="5532120"/>
-            <a:ext cx="502920" cy="274320"/>
-          </a:xfrm>
-          <a:prstGeom prst="rect">
-            <a:avLst/>
-          </a:prstGeom>
-          <a:noFill/>
-          <a:ln/>
-        </p:spPr>
-        <p:txBody>
-          <a:bodyPr wrap="square" lIns="0" tIns="0" rIns="0" bIns="0" rtlCol="0" anchor="ctr"/>
-          <a:lstStyle/>
-          <a:p>
-            <a:pPr algn="r" indent="0" marL="0">
-              <a:buNone/>
-            </a:pPr>
-            <a:r>
-              <a:rPr lang="en-US" sz="1100" dirty="0">
-                <a:solidFill>
-                  <a:srgbClr val="5F6B7F"/>
-                </a:solidFill>
-              </a:rPr>
-              <a:t>0.70</a:t>
-            </a:r>
-            <a:endParaRPr lang="en-US" sz="1100" dirty="0"/>
-          </a:p>
-        </p:txBody>
-      </p:sp>
-      <p:sp>
-        <p:nvSpPr>
-          <p:cNvPr id="11" name="Text 9"/>
-          <p:cNvSpPr txBox="1"/>
-          <p:nvPr/>
-        </p:nvSpPr>
-        <p:spPr>
-          <a:xfrm>
-            <a:off x="320040" y="4628111"/>
-            <a:ext cx="502920" cy="274320"/>
-          </a:xfrm>
-          <a:prstGeom prst="rect">
-            <a:avLst/>
-          </a:prstGeom>
-          <a:noFill/>
-          <a:ln/>
-        </p:spPr>
-        <p:txBody>
-          <a:bodyPr wrap="square" lIns="0" tIns="0" rIns="0" bIns="0" rtlCol="0" anchor="ctr"/>
-          <a:lstStyle/>
-          <a:p>
-            <a:pPr algn="r" indent="0" marL="0">
-              <a:buNone/>
-            </a:pPr>
-            <a:r>
-              <a:rPr lang="en-US" sz="1100" dirty="0">
-                <a:solidFill>
-                  <a:srgbClr val="5F6B7F"/>
-                </a:solidFill>
-              </a:rPr>
-              <a:t>0.75</a:t>
-            </a:r>
-            <a:endParaRPr lang="en-US" sz="1100" dirty="0"/>
-          </a:p>
-        </p:txBody>
-      </p:sp>
-      <p:sp>
-        <p:nvSpPr>
-          <p:cNvPr id="12" name="Text 10"/>
-          <p:cNvSpPr txBox="1"/>
-          <p:nvPr/>
-        </p:nvSpPr>
-        <p:spPr>
-          <a:xfrm>
-            <a:off x="320040" y="3724102"/>
-            <a:ext cx="502920" cy="274320"/>
-          </a:xfrm>
-          <a:prstGeom prst="rect">
-            <a:avLst/>
-          </a:prstGeom>
-          <a:noFill/>
-          <a:ln/>
-        </p:spPr>
-        <p:txBody>
-          <a:bodyPr wrap="square" lIns="0" tIns="0" rIns="0" bIns="0" rtlCol="0" anchor="ctr"/>
-          <a:lstStyle/>
-          <a:p>
-            <a:pPr algn="r" indent="0" marL="0">
-              <a:buNone/>
-            </a:pPr>
-            <a:r>
-              <a:rPr lang="en-US" sz="1100" dirty="0">
-                <a:solidFill>
-                  <a:srgbClr val="5F6B7F"/>
-                </a:solidFill>
-              </a:rPr>
-              <a:t>0.80</a:t>
-            </a:r>
-            <a:endParaRPr lang="en-US" sz="1100" dirty="0"/>
-          </a:p>
-        </p:txBody>
-      </p:sp>
-      <p:sp>
-        <p:nvSpPr>
-          <p:cNvPr id="13" name="Text 11"/>
-          <p:cNvSpPr txBox="1"/>
-          <p:nvPr/>
-        </p:nvSpPr>
-        <p:spPr>
-          <a:xfrm>
-            <a:off x="320040" y="2820093"/>
-            <a:ext cx="502920" cy="274320"/>
-          </a:xfrm>
-          <a:prstGeom prst="rect">
-            <a:avLst/>
-          </a:prstGeom>
-          <a:noFill/>
-          <a:ln/>
-        </p:spPr>
-        <p:txBody>
-          <a:bodyPr wrap="square" lIns="0" tIns="0" rIns="0" bIns="0" rtlCol="0" anchor="ctr"/>
-          <a:lstStyle/>
-          <a:p>
-            <a:pPr algn="r" indent="0" marL="0">
-              <a:buNone/>
-            </a:pPr>
-            <a:r>
-              <a:rPr lang="en-US" sz="1100" dirty="0">
-                <a:solidFill>
-                  <a:srgbClr val="5F6B7F"/>
-                </a:solidFill>
-              </a:rPr>
-              <a:t>0.85</a:t>
-            </a:r>
-            <a:endParaRPr lang="en-US" sz="1100" dirty="0"/>
-          </a:p>
-        </p:txBody>
-      </p:sp>
-      <p:sp>
-        <p:nvSpPr>
-          <p:cNvPr id="14" name="Text 12"/>
-          <p:cNvSpPr txBox="1"/>
-          <p:nvPr/>
-        </p:nvSpPr>
-        <p:spPr>
-          <a:xfrm>
-            <a:off x="320040" y="1916084"/>
-            <a:ext cx="502920" cy="274320"/>
-          </a:xfrm>
-          <a:prstGeom prst="rect">
-            <a:avLst/>
-          </a:prstGeom>
-          <a:noFill/>
-          <a:ln/>
-        </p:spPr>
-        <p:txBody>
-          <a:bodyPr wrap="square" lIns="0" tIns="0" rIns="0" bIns="0" rtlCol="0" anchor="ctr"/>
-          <a:lstStyle/>
-          <a:p>
-            <a:pPr algn="r" indent="0" marL="0">
-              <a:buNone/>
-            </a:pPr>
-            <a:r>
-              <a:rPr lang="en-US" sz="1100" dirty="0">
-                <a:solidFill>
-                  <a:srgbClr val="5F6B7F"/>
-                </a:solidFill>
-              </a:rPr>
-              <a:t>0.90</a:t>
-            </a:r>
-            <a:endParaRPr lang="en-US" sz="1100" dirty="0"/>
-          </a:p>
-        </p:txBody>
-      </p:sp>
-      <p:sp>
-        <p:nvSpPr>
-          <p:cNvPr id="15" name="Text 13"/>
-          <p:cNvSpPr txBox="1"/>
-          <p:nvPr/>
-        </p:nvSpPr>
-        <p:spPr>
-          <a:xfrm>
-            <a:off x="914400" y="5989320"/>
-            <a:ext cx="6675120" cy="274320"/>
-          </a:xfrm>
-          <a:prstGeom prst="rect">
-            <a:avLst/>
-          </a:prstGeom>
-          <a:noFill/>
-          <a:ln/>
-        </p:spPr>
-        <p:txBody>
-          <a:bodyPr wrap="square" lIns="0" tIns="0" rIns="0" bIns="0" rtlCol="0" anchor="ctr"/>
-          <a:lstStyle/>
-          <a:p>
-            <a:pPr algn="ctr" indent="0" marL="0">
+      <p:graphicFrame>
+        <p:nvGraphicFramePr>
+          <p:cNvPr id="3" name="Chart 0" descr=""/>
+          <p:cNvGraphicFramePr/>
+          <p:nvPr/>
+        </p:nvGraphicFramePr>
+        <p:xfrm>
+          <a:off x="457200" y="1280160"/>
+          <a:ext cx="6949440" cy="4846320"/>
+        </p:xfrm>
+        <a:graphic xmlns:a="http://schemas.openxmlformats.org/drawingml/2006/main">
+          <a:graphicData uri="http://schemas.openxmlformats.org/drawingml/2006/chart">
+            <c:chart xmlns:c="http://schemas.openxmlformats.org/drawingml/2006/chart" r:id="rId1"/>
+          </a:graphicData>
+        </a:graphic>
+      </p:graphicFrame>
+      <p:sp>
+        <p:nvSpPr>
+          <p:cNvPr id="4" name="Text 1"/>
+          <p:cNvSpPr txBox="1"/>
+          <p:nvPr/>
+        </p:nvSpPr>
+        <p:spPr>
+          <a:xfrm>
+            <a:off x="7863840" y="1417320"/>
+            <a:ext cx="3840480" cy="868680"/>
+          </a:xfrm>
+          <a:prstGeom prst="rect">
+            <a:avLst/>
+          </a:prstGeom>
+          <a:noFill/>
+          <a:ln/>
+        </p:spPr>
+        <p:txBody>
+          <a:bodyPr wrap="square" lIns="0" tIns="0" rIns="0" bIns="0" rtlCol="0" anchor="b"/>
+          <a:lstStyle/>
+          <a:p>
+            <a:pPr indent="0" marL="0">
+              <a:buNone/>
+            </a:pPr>
+            <a:r>
+              <a:rPr lang="en-US" sz="4800" b="1" dirty="0">
+                <a:solidFill>
+                  <a:srgbClr val="C8553D"/>
+                </a:solidFill>
+                <a:latin typeface="Cambria" pitchFamily="34" charset="0"/>
+                <a:ea typeface="Cambria" pitchFamily="34" charset="-122"/>
+                <a:cs typeface="Cambria" pitchFamily="34" charset="-120"/>
+              </a:rPr>
+              <a:t>12.0 m$</a:t>
+            </a:r>
+            <a:endParaRPr lang="en-US" sz="4800" dirty="0"/>
+          </a:p>
+        </p:txBody>
+      </p:sp>
+      <p:sp>
+        <p:nvSpPr>
+          <p:cNvPr id="5" name="Text 2"/>
+          <p:cNvSpPr txBox="1"/>
+          <p:nvPr/>
+        </p:nvSpPr>
+        <p:spPr>
+          <a:xfrm>
+            <a:off x="7863840" y="2331720"/>
+            <a:ext cx="3840480" cy="685800"/>
+          </a:xfrm>
+          <a:prstGeom prst="rect">
+            <a:avLst/>
+          </a:prstGeom>
+          <a:noFill/>
+          <a:ln/>
+        </p:spPr>
+        <p:txBody>
+          <a:bodyPr wrap="square" lIns="0" tIns="0" rIns="0" bIns="0" rtlCol="0" anchor="t"/>
+          <a:lstStyle/>
+          <a:p>
+            <a:pPr indent="0" marL="0">
+              <a:buNone/>
+            </a:pPr>
+            <a:r>
+              <a:rPr lang="en-US" sz="1300" dirty="0">
+                <a:solidFill>
+                  <a:schemeClr val="tx2"/>
+                </a:solidFill>
+              </a:rPr>
+              <a:t>cost per success for the LLM router, vs 4.64 for ATLAS: it over-selects (1.3 unnecessary calls per task)</a:t>
+            </a:r>
+            <a:endParaRPr lang="en-US" sz="1300" dirty="0"/>
+          </a:p>
+        </p:txBody>
+      </p:sp>
+      <p:sp>
+        <p:nvSpPr>
+          <p:cNvPr id="6" name="Text 3"/>
+          <p:cNvSpPr txBox="1"/>
+          <p:nvPr/>
+        </p:nvSpPr>
+        <p:spPr>
+          <a:xfrm>
+            <a:off x="7863840" y="3063240"/>
+            <a:ext cx="3840480" cy="868680"/>
+          </a:xfrm>
+          <a:prstGeom prst="rect">
+            <a:avLst/>
+          </a:prstGeom>
+          <a:noFill/>
+          <a:ln/>
+        </p:spPr>
+        <p:txBody>
+          <a:bodyPr wrap="square" lIns="0" tIns="0" rIns="0" bIns="0" rtlCol="0" anchor="b"/>
+          <a:lstStyle/>
+          <a:p>
+            <a:pPr indent="0" marL="0">
+              <a:buNone/>
+            </a:pPr>
+            <a:r>
+              <a:rPr lang="en-US" sz="4800" b="1" dirty="0">
+                <a:solidFill>
+                  <a:srgbClr val="3A4256"/>
+                </a:solidFill>
+                <a:latin typeface="Cambria" pitchFamily="34" charset="0"/>
+                <a:ea typeface="Cambria" pitchFamily="34" charset="-122"/>
+                <a:cs typeface="Cambria" pitchFamily="34" charset="-120"/>
+              </a:rPr>
+              <a:t>902 ms</a:t>
+            </a:r>
+            <a:endParaRPr lang="en-US" sz="4800" dirty="0"/>
+          </a:p>
+        </p:txBody>
+      </p:sp>
+      <p:sp>
+        <p:nvSpPr>
+          <p:cNvPr id="7" name="Text 4"/>
+          <p:cNvSpPr txBox="1"/>
+          <p:nvPr/>
+        </p:nvSpPr>
+        <p:spPr>
+          <a:xfrm>
+            <a:off x="7863840" y="3977640"/>
+            <a:ext cx="3840480" cy="685800"/>
+          </a:xfrm>
+          <a:prstGeom prst="rect">
+            <a:avLst/>
+          </a:prstGeom>
+          <a:noFill/>
+          <a:ln/>
+        </p:spPr>
+        <p:txBody>
+          <a:bodyPr wrap="square" lIns="0" tIns="0" rIns="0" bIns="0" rtlCol="0" anchor="t"/>
+          <a:lstStyle/>
+          <a:p>
+            <a:pPr indent="0" marL="0">
+              <a:buNone/>
+            </a:pPr>
+            <a:r>
+              <a:rPr lang="en-US" sz="1300" dirty="0">
+                <a:solidFill>
+                  <a:schemeClr val="tx2"/>
+                </a:solidFill>
+              </a:rPr>
+              <a:t>median routing time per query on CPU, before any tool runs (ATLAS plans in a few ms)</a:t>
+            </a:r>
+            <a:endParaRPr lang="en-US" sz="1300" dirty="0"/>
+          </a:p>
+        </p:txBody>
+      </p:sp>
+      <p:sp>
+        <p:nvSpPr>
+          <p:cNvPr id="8" name="Text 5"/>
+          <p:cNvSpPr txBox="1"/>
+          <p:nvPr/>
+        </p:nvSpPr>
+        <p:spPr>
+          <a:xfrm>
+            <a:off x="7863840" y="4892040"/>
+            <a:ext cx="3840480" cy="1188720"/>
+          </a:xfrm>
+          <a:prstGeom prst="rect">
+            <a:avLst/>
+          </a:prstGeom>
+          <a:noFill/>
+          <a:ln/>
+        </p:spPr>
+        <p:txBody>
+          <a:bodyPr wrap="square" lIns="0" tIns="0" rIns="0" bIns="0" rtlCol="0" anchor="t"/>
+          <a:lstStyle/>
+          <a:p>
+            <a:pPr indent="0" marL="0">
               <a:buNone/>
             </a:pPr>
             <a:r>
               <a:rPr lang="en-US" sz="1200" dirty="0">
                 <a:solidFill>
-                  <a:srgbClr val="5F6B7F"/>
-                </a:solidFill>
-              </a:rPr>
-              <a:t>Cost per successful task (m$) →</a:t>
+                  <a:schemeClr val="tx2"/>
+                </a:solidFill>
+              </a:rPr>
+              <a:t>B6: Qwen2.5-0.5B via llama.cpp sees the full tool catalogue and one labelled example per task family; grammar-constrained output. A larger model would do better but did not fit on this machine.</a:t>
             </a:r>
             <a:endParaRPr lang="en-US" sz="1200" dirty="0"/>
-          </a:p>
-        </p:txBody>
-      </p:sp>
-      <p:sp>
-        <p:nvSpPr>
-          <p:cNvPr id="16" name="Text 14"/>
-          <p:cNvSpPr txBox="1"/>
-          <p:nvPr/>
-        </p:nvSpPr>
-        <p:spPr>
-          <a:xfrm>
-            <a:off x="228600" y="1325880"/>
-            <a:ext cx="1371600" cy="274320"/>
-          </a:xfrm>
-          <a:prstGeom prst="rect">
-            <a:avLst/>
-          </a:prstGeom>
-          <a:noFill/>
-          <a:ln/>
-        </p:spPr>
-        <p:txBody>
-          <a:bodyPr wrap="square" lIns="0" tIns="0" rIns="0" bIns="0" rtlCol="0" anchor="ctr"/>
-          <a:lstStyle/>
-          <a:p>
-            <a:pPr indent="0" marL="0">
-              <a:buNone/>
-            </a:pPr>
-            <a:r>
-              <a:rPr lang="en-US" sz="1200" dirty="0">
-                <a:solidFill>
-                  <a:srgbClr val="5F6B7F"/>
-                </a:solidFill>
-              </a:rPr>
-              <a:t>↑ Success</a:t>
-            </a:r>
-            <a:endParaRPr lang="en-US" sz="1200" dirty="0"/>
-          </a:p>
-        </p:txBody>
-      </p:sp>
-      <p:sp>
-        <p:nvSpPr>
-          <p:cNvPr id="17" name="Shape 15"/>
-          <p:cNvSpPr/>
-          <p:nvPr/>
-        </p:nvSpPr>
-        <p:spPr>
-          <a:xfrm flipV="1">
-            <a:off x="1748790" y="2686050"/>
-            <a:ext cx="1001268" cy="271203"/>
-          </a:xfrm>
-          <a:prstGeom prst="line">
-            <a:avLst/>
-          </a:prstGeom>
-          <a:noFill/>
-          <a:ln w="25400">
-            <a:solidFill>
-              <a:srgbClr val="E8A33D"/>
-            </a:solidFill>
-            <a:prstDash val="solid"/>
-          </a:ln>
-        </p:spPr>
-      </p:sp>
-      <p:sp>
-        <p:nvSpPr>
-          <p:cNvPr id="18" name="Shape 16"/>
-          <p:cNvSpPr/>
-          <p:nvPr/>
-        </p:nvSpPr>
-        <p:spPr>
-          <a:xfrm flipV="1">
-            <a:off x="2750058" y="2234045"/>
-            <a:ext cx="1969160" cy="452005"/>
-          </a:xfrm>
-          <a:prstGeom prst="line">
-            <a:avLst/>
-          </a:prstGeom>
-          <a:noFill/>
-          <a:ln w="25400">
-            <a:solidFill>
-              <a:srgbClr val="E8A33D"/>
-            </a:solidFill>
-            <a:prstDash val="solid"/>
-          </a:ln>
-        </p:spPr>
-      </p:sp>
-      <p:sp>
-        <p:nvSpPr>
-          <p:cNvPr id="19" name="Shape 17"/>
-          <p:cNvSpPr/>
-          <p:nvPr/>
-        </p:nvSpPr>
-        <p:spPr>
-          <a:xfrm flipV="1">
-            <a:off x="4719218" y="1999003"/>
-            <a:ext cx="2136038" cy="235042"/>
-          </a:xfrm>
-          <a:prstGeom prst="line">
-            <a:avLst/>
-          </a:prstGeom>
-          <a:noFill/>
-          <a:ln w="25400">
-            <a:solidFill>
-              <a:srgbClr val="E8A33D"/>
-            </a:solidFill>
-            <a:prstDash val="solid"/>
-          </a:ln>
-        </p:spPr>
-      </p:sp>
-      <p:sp>
-        <p:nvSpPr>
-          <p:cNvPr id="20" name="Shape 18"/>
-          <p:cNvSpPr/>
-          <p:nvPr/>
-        </p:nvSpPr>
-        <p:spPr>
-          <a:xfrm>
-            <a:off x="1648206" y="2856669"/>
-            <a:ext cx="201168" cy="201168"/>
-          </a:xfrm>
-          <a:prstGeom prst="ellipse">
-            <a:avLst/>
-          </a:prstGeom>
-          <a:solidFill>
-            <a:srgbClr val="E8A33D"/>
-          </a:solidFill>
-          <a:ln w="12700">
-            <a:solidFill>
-              <a:srgbClr val="FFFFFF"/>
-            </a:solidFill>
-            <a:prstDash val="solid"/>
-          </a:ln>
-        </p:spPr>
-      </p:sp>
-      <p:sp>
-        <p:nvSpPr>
-          <p:cNvPr id="21" name="Text 19"/>
-          <p:cNvSpPr txBox="1"/>
-          <p:nvPr/>
-        </p:nvSpPr>
-        <p:spPr>
-          <a:xfrm>
-            <a:off x="1200150" y="2545773"/>
-            <a:ext cx="1097280" cy="256032"/>
-          </a:xfrm>
-          <a:prstGeom prst="rect">
-            <a:avLst/>
-          </a:prstGeom>
-          <a:noFill/>
-          <a:ln/>
-        </p:spPr>
-        <p:txBody>
-          <a:bodyPr wrap="square" lIns="0" tIns="0" rIns="0" bIns="0" rtlCol="0" anchor="ctr"/>
-          <a:lstStyle/>
-          <a:p>
-            <a:pPr algn="ctr" indent="0" marL="0">
-              <a:buNone/>
-            </a:pPr>
-            <a:r>
-              <a:rPr lang="en-US" sz="1100" dirty="0">
-                <a:solidFill>
-                  <a:srgbClr val="1B1F2A"/>
-                </a:solidFill>
-              </a:rPr>
-              <a:t>Qmin 0.6</a:t>
-            </a:r>
-            <a:endParaRPr lang="en-US" sz="1100" dirty="0"/>
-          </a:p>
-        </p:txBody>
-      </p:sp>
-      <p:sp>
-        <p:nvSpPr>
-          <p:cNvPr id="22" name="Shape 20"/>
-          <p:cNvSpPr/>
-          <p:nvPr/>
-        </p:nvSpPr>
-        <p:spPr>
-          <a:xfrm>
-            <a:off x="2649474" y="2585466"/>
-            <a:ext cx="201168" cy="201168"/>
-          </a:xfrm>
-          <a:prstGeom prst="ellipse">
-            <a:avLst/>
-          </a:prstGeom>
-          <a:solidFill>
-            <a:srgbClr val="E8A33D"/>
-          </a:solidFill>
-          <a:ln w="12700">
-            <a:solidFill>
-              <a:srgbClr val="FFFFFF"/>
-            </a:solidFill>
-            <a:prstDash val="solid"/>
-          </a:ln>
-        </p:spPr>
-      </p:sp>
-      <p:sp>
-        <p:nvSpPr>
-          <p:cNvPr id="23" name="Text 21"/>
-          <p:cNvSpPr txBox="1"/>
-          <p:nvPr/>
-        </p:nvSpPr>
-        <p:spPr>
-          <a:xfrm>
-            <a:off x="2201418" y="2274570"/>
-            <a:ext cx="1097280" cy="256032"/>
-          </a:xfrm>
-          <a:prstGeom prst="rect">
-            <a:avLst/>
-          </a:prstGeom>
-          <a:noFill/>
-          <a:ln/>
-        </p:spPr>
-        <p:txBody>
-          <a:bodyPr wrap="square" lIns="0" tIns="0" rIns="0" bIns="0" rtlCol="0" anchor="ctr"/>
-          <a:lstStyle/>
-          <a:p>
-            <a:pPr algn="ctr" indent="0" marL="0">
-              <a:buNone/>
-            </a:pPr>
-            <a:r>
-              <a:rPr lang="en-US" sz="1100" dirty="0">
-                <a:solidFill>
-                  <a:srgbClr val="1B1F2A"/>
-                </a:solidFill>
-              </a:rPr>
-              <a:t>0.7</a:t>
-            </a:r>
-            <a:endParaRPr lang="en-US" sz="1100" dirty="0"/>
-          </a:p>
-        </p:txBody>
-      </p:sp>
-      <p:sp>
-        <p:nvSpPr>
-          <p:cNvPr id="24" name="Shape 22"/>
-          <p:cNvSpPr/>
-          <p:nvPr/>
-        </p:nvSpPr>
-        <p:spPr>
-          <a:xfrm>
-            <a:off x="4618634" y="2133461"/>
-            <a:ext cx="201168" cy="201168"/>
-          </a:xfrm>
-          <a:prstGeom prst="ellipse">
-            <a:avLst/>
-          </a:prstGeom>
-          <a:solidFill>
-            <a:srgbClr val="E8A33D"/>
-          </a:solidFill>
-          <a:ln w="12700">
-            <a:solidFill>
-              <a:srgbClr val="FFFFFF"/>
-            </a:solidFill>
-            <a:prstDash val="solid"/>
-          </a:ln>
-        </p:spPr>
-      </p:sp>
-      <p:sp>
-        <p:nvSpPr>
-          <p:cNvPr id="25" name="Text 23"/>
-          <p:cNvSpPr txBox="1"/>
-          <p:nvPr/>
-        </p:nvSpPr>
-        <p:spPr>
-          <a:xfrm>
-            <a:off x="4170578" y="1822565"/>
-            <a:ext cx="1097280" cy="256032"/>
-          </a:xfrm>
-          <a:prstGeom prst="rect">
-            <a:avLst/>
-          </a:prstGeom>
-          <a:noFill/>
-          <a:ln/>
-        </p:spPr>
-        <p:txBody>
-          <a:bodyPr wrap="square" lIns="0" tIns="0" rIns="0" bIns="0" rtlCol="0" anchor="ctr"/>
-          <a:lstStyle/>
-          <a:p>
-            <a:pPr algn="ctr" indent="0" marL="0">
-              <a:buNone/>
-            </a:pPr>
-            <a:r>
-              <a:rPr lang="en-US" sz="1100" dirty="0">
-                <a:solidFill>
-                  <a:srgbClr val="1B1F2A"/>
-                </a:solidFill>
-              </a:rPr>
-              <a:t>0.8 (default)</a:t>
-            </a:r>
-            <a:endParaRPr lang="en-US" sz="1100" dirty="0"/>
-          </a:p>
-        </p:txBody>
-      </p:sp>
-      <p:sp>
-        <p:nvSpPr>
-          <p:cNvPr id="26" name="Shape 24"/>
-          <p:cNvSpPr/>
-          <p:nvPr/>
-        </p:nvSpPr>
-        <p:spPr>
-          <a:xfrm>
-            <a:off x="6754673" y="1898419"/>
-            <a:ext cx="201168" cy="201168"/>
-          </a:xfrm>
-          <a:prstGeom prst="ellipse">
-            <a:avLst/>
-          </a:prstGeom>
-          <a:solidFill>
-            <a:srgbClr val="E8A33D"/>
-          </a:solidFill>
-          <a:ln w="12700">
-            <a:solidFill>
-              <a:srgbClr val="FFFFFF"/>
-            </a:solidFill>
-            <a:prstDash val="solid"/>
-          </a:ln>
-        </p:spPr>
-      </p:sp>
-      <p:sp>
-        <p:nvSpPr>
-          <p:cNvPr id="27" name="Text 25"/>
-          <p:cNvSpPr txBox="1"/>
-          <p:nvPr/>
-        </p:nvSpPr>
-        <p:spPr>
-          <a:xfrm>
-            <a:off x="6306617" y="1587523"/>
-            <a:ext cx="1097280" cy="256032"/>
-          </a:xfrm>
-          <a:prstGeom prst="rect">
-            <a:avLst/>
-          </a:prstGeom>
-          <a:noFill/>
-          <a:ln/>
-        </p:spPr>
-        <p:txBody>
-          <a:bodyPr wrap="square" lIns="0" tIns="0" rIns="0" bIns="0" rtlCol="0" anchor="ctr"/>
-          <a:lstStyle/>
-          <a:p>
-            <a:pPr algn="ctr" indent="0" marL="0">
-              <a:buNone/>
-            </a:pPr>
-            <a:r>
-              <a:rPr lang="en-US" sz="1100" dirty="0">
-                <a:solidFill>
-                  <a:srgbClr val="1B1F2A"/>
-                </a:solidFill>
-              </a:rPr>
-              <a:t>0.9</a:t>
-            </a:r>
-            <a:endParaRPr lang="en-US" sz="1100" dirty="0"/>
-          </a:p>
-        </p:txBody>
-      </p:sp>
-      <p:sp>
-        <p:nvSpPr>
-          <p:cNvPr id="28" name="Shape 26"/>
-          <p:cNvSpPr/>
-          <p:nvPr/>
-        </p:nvSpPr>
-        <p:spPr>
-          <a:xfrm>
-            <a:off x="4284878" y="5134772"/>
-            <a:ext cx="201168" cy="201168"/>
-          </a:xfrm>
-          <a:prstGeom prst="ellipse">
-            <a:avLst/>
-          </a:prstGeom>
-          <a:solidFill>
-            <a:srgbClr val="8A94A6"/>
-          </a:solidFill>
-          <a:ln w="12700">
-            <a:solidFill>
-              <a:srgbClr val="FFFFFF"/>
-            </a:solidFill>
-            <a:prstDash val="solid"/>
-          </a:ln>
-        </p:spPr>
-      </p:sp>
-      <p:sp>
-        <p:nvSpPr>
-          <p:cNvPr id="29" name="Text 27"/>
-          <p:cNvSpPr txBox="1"/>
-          <p:nvPr/>
-        </p:nvSpPr>
-        <p:spPr>
-          <a:xfrm>
-            <a:off x="4522622" y="5107340"/>
-            <a:ext cx="1371600" cy="256032"/>
-          </a:xfrm>
-          <a:prstGeom prst="rect">
-            <a:avLst/>
-          </a:prstGeom>
-          <a:noFill/>
-          <a:ln/>
-        </p:spPr>
-        <p:txBody>
-          <a:bodyPr wrap="square" lIns="0" tIns="0" rIns="0" bIns="0" rtlCol="0" anchor="ctr"/>
-          <a:lstStyle/>
-          <a:p>
-            <a:pPr indent="0" marL="0">
-              <a:buNone/>
-            </a:pPr>
-            <a:r>
-              <a:rPr lang="en-US" sz="1100" dirty="0">
-                <a:solidFill>
-                  <a:srgbClr val="3A4256"/>
-                </a:solidFill>
-              </a:rPr>
-              <a:t>B2 Supervised</a:t>
-            </a:r>
-            <a:endParaRPr lang="en-US" sz="1100" dirty="0"/>
-          </a:p>
-        </p:txBody>
-      </p:sp>
-      <p:sp>
-        <p:nvSpPr>
-          <p:cNvPr id="30" name="Shape 28"/>
-          <p:cNvSpPr/>
-          <p:nvPr/>
-        </p:nvSpPr>
-        <p:spPr>
-          <a:xfrm>
-            <a:off x="5786780" y="3399074"/>
-            <a:ext cx="201168" cy="201168"/>
-          </a:xfrm>
-          <a:prstGeom prst="ellipse">
-            <a:avLst/>
-          </a:prstGeom>
-          <a:solidFill>
-            <a:srgbClr val="8A94A6"/>
-          </a:solidFill>
-          <a:ln w="12700">
-            <a:solidFill>
-              <a:srgbClr val="FFFFFF"/>
-            </a:solidFill>
-            <a:prstDash val="solid"/>
-          </a:ln>
-        </p:spPr>
-      </p:sp>
-      <p:sp>
-        <p:nvSpPr>
-          <p:cNvPr id="31" name="Text 29"/>
-          <p:cNvSpPr txBox="1"/>
-          <p:nvPr/>
-        </p:nvSpPr>
-        <p:spPr>
-          <a:xfrm>
-            <a:off x="6024524" y="3371642"/>
-            <a:ext cx="1371600" cy="256032"/>
-          </a:xfrm>
-          <a:prstGeom prst="rect">
-            <a:avLst/>
-          </a:prstGeom>
-          <a:noFill/>
-          <a:ln/>
-        </p:spPr>
-        <p:txBody>
-          <a:bodyPr wrap="square" lIns="0" tIns="0" rIns="0" bIns="0" rtlCol="0" anchor="ctr"/>
-          <a:lstStyle/>
-          <a:p>
-            <a:pPr indent="0" marL="0">
-              <a:buNone/>
-            </a:pPr>
-            <a:r>
-              <a:rPr lang="en-US" sz="1100" dirty="0">
-                <a:solidFill>
-                  <a:srgbClr val="3A4256"/>
-                </a:solidFill>
-              </a:rPr>
-              <a:t>B4 Static</a:t>
-            </a:r>
-            <a:endParaRPr lang="en-US" sz="1100" dirty="0"/>
-          </a:p>
-        </p:txBody>
-      </p:sp>
-      <p:sp>
-        <p:nvSpPr>
-          <p:cNvPr id="32" name="Shape 30"/>
-          <p:cNvSpPr/>
-          <p:nvPr/>
-        </p:nvSpPr>
-        <p:spPr>
-          <a:xfrm>
-            <a:off x="4284878" y="3706437"/>
-            <a:ext cx="201168" cy="201168"/>
-          </a:xfrm>
-          <a:prstGeom prst="ellipse">
-            <a:avLst/>
-          </a:prstGeom>
-          <a:solidFill>
-            <a:srgbClr val="8A94A6"/>
-          </a:solidFill>
-          <a:ln w="12700">
-            <a:solidFill>
-              <a:srgbClr val="FFFFFF"/>
-            </a:solidFill>
-            <a:prstDash val="solid"/>
-          </a:ln>
-        </p:spPr>
-      </p:sp>
-      <p:sp>
-        <p:nvSpPr>
-          <p:cNvPr id="33" name="Text 31"/>
-          <p:cNvSpPr txBox="1"/>
-          <p:nvPr/>
-        </p:nvSpPr>
-        <p:spPr>
-          <a:xfrm>
-            <a:off x="4522622" y="3679005"/>
-            <a:ext cx="1371600" cy="256032"/>
-          </a:xfrm>
-          <a:prstGeom prst="rect">
-            <a:avLst/>
-          </a:prstGeom>
-          <a:noFill/>
-          <a:ln/>
-        </p:spPr>
-        <p:txBody>
-          <a:bodyPr wrap="square" lIns="0" tIns="0" rIns="0" bIns="0" rtlCol="0" anchor="ctr"/>
-          <a:lstStyle/>
-          <a:p>
-            <a:pPr indent="0" marL="0">
-              <a:buNone/>
-            </a:pPr>
-            <a:r>
-              <a:rPr lang="en-US" sz="1100" dirty="0">
-                <a:solidFill>
-                  <a:srgbClr val="3A4256"/>
-                </a:solidFill>
-              </a:rPr>
-              <a:t>B5 Bandit</a:t>
-            </a:r>
-            <a:endParaRPr lang="en-US" sz="1100" dirty="0"/>
-          </a:p>
-        </p:txBody>
-      </p:sp>
-      <p:sp>
-        <p:nvSpPr>
-          <p:cNvPr id="34" name="takeaway card"/>
-          <p:cNvSpPr/>
-          <p:nvPr/>
-        </p:nvSpPr>
-        <p:spPr>
-          <a:xfrm>
-            <a:off x="8138160" y="1371600"/>
-            <a:ext cx="3566160" cy="4480560"/>
-          </a:xfrm>
-          <a:prstGeom prst="roundRect">
-            <a:avLst>
-              <a:gd name="adj" fmla="val 2051"/>
-            </a:avLst>
-          </a:prstGeom>
-          <a:solidFill>
-            <a:srgbClr val="EEF1F5"/>
-          </a:solidFill>
-          <a:ln w="12700">
-            <a:solidFill>
-              <a:srgbClr val="EEF1F5"/>
-            </a:solidFill>
-            <a:prstDash val="solid"/>
-          </a:ln>
-        </p:spPr>
-      </p:sp>
-      <p:sp>
-        <p:nvSpPr>
-          <p:cNvPr id="35" name="Text 33"/>
-          <p:cNvSpPr txBox="1"/>
-          <p:nvPr/>
-        </p:nvSpPr>
-        <p:spPr>
-          <a:xfrm>
-            <a:off x="8412480" y="1600200"/>
-            <a:ext cx="3063240" cy="4023360"/>
-          </a:xfrm>
-          <a:prstGeom prst="rect">
-            <a:avLst/>
-          </a:prstGeom>
-          <a:noFill/>
-          <a:ln/>
-        </p:spPr>
-        <p:txBody>
-          <a:bodyPr wrap="square" lIns="0" tIns="0" rIns="0" bIns="0" rtlCol="0" anchor="t"/>
-          <a:lstStyle/>
-          <a:p>
-            <a:pPr indent="0" marL="0">
-              <a:buNone/>
-            </a:pPr>
-            <a:r>
-              <a:rPr lang="en-US" sz="1400" b="1" dirty="0">
-                <a:solidFill>
-                  <a:srgbClr val="1B1F2A"/>
-                </a:solidFill>
-              </a:rPr>
-              <a:t>At the default target (Qmin 0.8)</a:t>
-            </a:r>
-            <a:endParaRPr lang="en-US" sz="1400" dirty="0"/>
-          </a:p>
-          <a:p>
-            <a:pPr indent="0" marL="0">
-              <a:buNone/>
-            </a:pPr>
-            <a:r>
-              <a:rPr lang="en-US" sz="1400" dirty="0">
-                <a:solidFill>
-                  <a:schemeClr val="tx2"/>
-                </a:solidFill>
-              </a:rPr>
-              <a:t>ATLAS buys +7 to +17 points of success, but costs about the same per success as B2 and B5 under drift, and more than B2 when tools are stable.</a:t>
-            </a:r>
-            <a:endParaRPr lang="en-US" sz="1400" dirty="0"/>
-          </a:p>
-          <a:p>
-            <a:pPr indent="0" marL="0">
-              <a:buNone/>
-            </a:pPr>
-            <a:r>
-              <a:rPr lang="en-US" sz="800" dirty="0">
-                <a:solidFill>
-                  <a:schemeClr val="tx2"/>
-                </a:solidFill>
-              </a:rPr>
-              <a:t> </a:t>
-            </a:r>
-            <a:endParaRPr lang="en-US" sz="1400" dirty="0"/>
-          </a:p>
-          <a:p>
-            <a:pPr indent="0" marL="0">
-              <a:buNone/>
-            </a:pPr>
-            <a:r>
-              <a:rPr lang="en-US" sz="1400" b="1" dirty="0">
-                <a:solidFill>
-                  <a:srgbClr val="1B1F2A"/>
-                </a:solidFill>
-              </a:rPr>
-              <a:t>At Qmin 0.6–0.7</a:t>
-            </a:r>
-            <a:endParaRPr lang="en-US" sz="1400" dirty="0"/>
-          </a:p>
-          <a:p>
-            <a:pPr indent="0" marL="0">
-              <a:buNone/>
-            </a:pPr>
-            <a:r>
-              <a:rPr lang="en-US" sz="1400" dirty="0">
-                <a:solidFill>
-                  <a:schemeClr val="tx2"/>
-                </a:solidFill>
-              </a:rPr>
-              <a:t>ATLAS beats B2, B4 and B5 on both axes at once.</a:t>
-            </a:r>
-            <a:endParaRPr lang="en-US" sz="1400" dirty="0"/>
-          </a:p>
-        </p:txBody>
-      </p:sp>
-      <p:sp>
-        <p:nvSpPr>
-          <p:cNvPr id="36" name="Text 34"/>
-          <p:cNvSpPr txBox="1"/>
-          <p:nvPr/>
-        </p:nvSpPr>
-        <p:spPr>
-          <a:xfrm>
-            <a:off x="8412480" y="4846320"/>
-            <a:ext cx="3063240" cy="822960"/>
-          </a:xfrm>
-          <a:prstGeom prst="rect">
-            <a:avLst/>
-          </a:prstGeom>
-          <a:noFill/>
-          <a:ln/>
-        </p:spPr>
-        <p:txBody>
-          <a:bodyPr wrap="square" lIns="0" tIns="0" rIns="0" bIns="0" rtlCol="0" anchor="t"/>
-          <a:lstStyle/>
-          <a:p>
-            <a:pPr indent="0" marL="0">
-              <a:buNone/>
-            </a:pPr>
-            <a:r>
-              <a:rPr lang="en-US" sz="1100" dirty="0">
-                <a:solidFill>
-                  <a:schemeClr val="tx2"/>
-                </a:solidFill>
-              </a:rPr>
-              <a:t>E5 sweep under drift, 10 seeds. Operating points were chosen after the sweep. B1 (0.475, 6.26 m$) is off-scale.</a:t>
-            </a:r>
-            <a:endParaRPr lang="en-US" sz="1100" dirty="0"/>
           </a:p>
         </p:txBody>
       </p:sp>
@@ -9805,38 +10770,1023 @@
                 <a:ea typeface="Cambria" pitchFamily="34" charset="-122"/>
                 <a:cs typeface="Cambria" pitchFamily="34" charset="-120"/>
               </a:rPr>
-              <a:t>On real tools, ATLAS routes around a database incident</a:t>
+              <a:t>Success costs money: the quality target sets the trade-off</a:t>
             </a:r>
             <a:endParaRPr lang="en-US" sz="3200" dirty="0"/>
           </a:p>
         </p:txBody>
       </p:sp>
-      <p:graphicFrame>
-        <p:nvGraphicFramePr>
-          <p:cNvPr id="3" name="Chart 0" descr=""/>
-          <p:cNvGraphicFramePr/>
-          <p:nvPr/>
-        </p:nvGraphicFramePr>
-        <p:xfrm>
-          <a:off x="457200" y="1280160"/>
-          <a:ext cx="7132320" cy="4846320"/>
-        </p:xfrm>
-        <a:graphic xmlns:a="http://schemas.openxmlformats.org/drawingml/2006/main">
-          <a:graphicData uri="http://schemas.openxmlformats.org/drawingml/2006/chart">
-            <c:chart xmlns:c="http://schemas.openxmlformats.org/drawingml/2006/chart" r:id="rId1"/>
-          </a:graphicData>
-        </a:graphic>
-      </p:graphicFrame>
-      <p:sp>
-        <p:nvSpPr>
-          <p:cNvPr id="4" name="Text 1"/>
-          <p:cNvSpPr txBox="1"/>
-          <p:nvPr/>
-        </p:nvSpPr>
-        <p:spPr>
-          <a:xfrm>
-            <a:off x="7955280" y="1371600"/>
-            <a:ext cx="3749040" cy="4846320"/>
+      <p:sp>
+        <p:nvSpPr>
+          <p:cNvPr id="3" name="Shape 1"/>
+          <p:cNvSpPr/>
+          <p:nvPr/>
+        </p:nvSpPr>
+        <p:spPr>
+          <a:xfrm>
+            <a:off x="914400" y="5669280"/>
+            <a:ext cx="6675120" cy="0"/>
+          </a:xfrm>
+          <a:prstGeom prst="line">
+            <a:avLst/>
+          </a:prstGeom>
+          <a:noFill/>
+          <a:ln w="12700">
+            <a:solidFill>
+              <a:srgbClr val="D9DEE6"/>
+            </a:solidFill>
+            <a:prstDash val="solid"/>
+          </a:ln>
+        </p:spPr>
+      </p:sp>
+      <p:sp>
+        <p:nvSpPr>
+          <p:cNvPr id="4" name="Shape 2"/>
+          <p:cNvSpPr/>
+          <p:nvPr/>
+        </p:nvSpPr>
+        <p:spPr>
+          <a:xfrm>
+            <a:off x="914400" y="1691640"/>
+            <a:ext cx="0" cy="3977640"/>
+          </a:xfrm>
+          <a:prstGeom prst="line">
+            <a:avLst/>
+          </a:prstGeom>
+          <a:noFill/>
+          <a:ln w="12700">
+            <a:solidFill>
+              <a:srgbClr val="D9DEE6"/>
+            </a:solidFill>
+            <a:prstDash val="solid"/>
+          </a:ln>
+        </p:spPr>
+      </p:sp>
+      <p:sp>
+        <p:nvSpPr>
+          <p:cNvPr id="5" name="Text 3"/>
+          <p:cNvSpPr txBox="1"/>
+          <p:nvPr/>
+        </p:nvSpPr>
+        <p:spPr>
+          <a:xfrm>
+            <a:off x="640080" y="5715000"/>
+            <a:ext cx="548640" cy="274320"/>
+          </a:xfrm>
+          <a:prstGeom prst="rect">
+            <a:avLst/>
+          </a:prstGeom>
+          <a:noFill/>
+          <a:ln/>
+        </p:spPr>
+        <p:txBody>
+          <a:bodyPr wrap="square" lIns="0" tIns="0" rIns="0" bIns="0" rtlCol="0" anchor="ctr"/>
+          <a:lstStyle/>
+          <a:p>
+            <a:pPr algn="ctr" indent="0" marL="0">
+              <a:buNone/>
+            </a:pPr>
+            <a:r>
+              <a:rPr lang="en-US" sz="1100" dirty="0">
+                <a:solidFill>
+                  <a:srgbClr val="5F6B7F"/>
+                </a:solidFill>
+              </a:rPr>
+              <a:t>3.5</a:t>
+            </a:r>
+            <a:endParaRPr lang="en-US" sz="1100" dirty="0"/>
+          </a:p>
+        </p:txBody>
+      </p:sp>
+      <p:sp>
+        <p:nvSpPr>
+          <p:cNvPr id="6" name="Text 4"/>
+          <p:cNvSpPr txBox="1"/>
+          <p:nvPr/>
+        </p:nvSpPr>
+        <p:spPr>
+          <a:xfrm>
+            <a:off x="2308860" y="5715000"/>
+            <a:ext cx="548640" cy="274320"/>
+          </a:xfrm>
+          <a:prstGeom prst="rect">
+            <a:avLst/>
+          </a:prstGeom>
+          <a:noFill/>
+          <a:ln/>
+        </p:spPr>
+        <p:txBody>
+          <a:bodyPr wrap="square" lIns="0" tIns="0" rIns="0" bIns="0" rtlCol="0" anchor="ctr"/>
+          <a:lstStyle/>
+          <a:p>
+            <a:pPr algn="ctr" indent="0" marL="0">
+              <a:buNone/>
+            </a:pPr>
+            <a:r>
+              <a:rPr lang="en-US" sz="1100" dirty="0">
+                <a:solidFill>
+                  <a:srgbClr val="5F6B7F"/>
+                </a:solidFill>
+              </a:rPr>
+              <a:t>4.0</a:t>
+            </a:r>
+            <a:endParaRPr lang="en-US" sz="1100" dirty="0"/>
+          </a:p>
+        </p:txBody>
+      </p:sp>
+      <p:sp>
+        <p:nvSpPr>
+          <p:cNvPr id="7" name="Text 5"/>
+          <p:cNvSpPr txBox="1"/>
+          <p:nvPr/>
+        </p:nvSpPr>
+        <p:spPr>
+          <a:xfrm>
+            <a:off x="3977640" y="5715000"/>
+            <a:ext cx="548640" cy="274320"/>
+          </a:xfrm>
+          <a:prstGeom prst="rect">
+            <a:avLst/>
+          </a:prstGeom>
+          <a:noFill/>
+          <a:ln/>
+        </p:spPr>
+        <p:txBody>
+          <a:bodyPr wrap="square" lIns="0" tIns="0" rIns="0" bIns="0" rtlCol="0" anchor="ctr"/>
+          <a:lstStyle/>
+          <a:p>
+            <a:pPr algn="ctr" indent="0" marL="0">
+              <a:buNone/>
+            </a:pPr>
+            <a:r>
+              <a:rPr lang="en-US" sz="1100" dirty="0">
+                <a:solidFill>
+                  <a:srgbClr val="5F6B7F"/>
+                </a:solidFill>
+              </a:rPr>
+              <a:t>4.5</a:t>
+            </a:r>
+            <a:endParaRPr lang="en-US" sz="1100" dirty="0"/>
+          </a:p>
+        </p:txBody>
+      </p:sp>
+      <p:sp>
+        <p:nvSpPr>
+          <p:cNvPr id="8" name="Text 6"/>
+          <p:cNvSpPr txBox="1"/>
+          <p:nvPr/>
+        </p:nvSpPr>
+        <p:spPr>
+          <a:xfrm>
+            <a:off x="5646420" y="5715000"/>
+            <a:ext cx="548640" cy="274320"/>
+          </a:xfrm>
+          <a:prstGeom prst="rect">
+            <a:avLst/>
+          </a:prstGeom>
+          <a:noFill/>
+          <a:ln/>
+        </p:spPr>
+        <p:txBody>
+          <a:bodyPr wrap="square" lIns="0" tIns="0" rIns="0" bIns="0" rtlCol="0" anchor="ctr"/>
+          <a:lstStyle/>
+          <a:p>
+            <a:pPr algn="ctr" indent="0" marL="0">
+              <a:buNone/>
+            </a:pPr>
+            <a:r>
+              <a:rPr lang="en-US" sz="1100" dirty="0">
+                <a:solidFill>
+                  <a:srgbClr val="5F6B7F"/>
+                </a:solidFill>
+              </a:rPr>
+              <a:t>5.0</a:t>
+            </a:r>
+            <a:endParaRPr lang="en-US" sz="1100" dirty="0"/>
+          </a:p>
+        </p:txBody>
+      </p:sp>
+      <p:sp>
+        <p:nvSpPr>
+          <p:cNvPr id="9" name="Text 7"/>
+          <p:cNvSpPr txBox="1"/>
+          <p:nvPr/>
+        </p:nvSpPr>
+        <p:spPr>
+          <a:xfrm>
+            <a:off x="7315200" y="5715000"/>
+            <a:ext cx="548640" cy="274320"/>
+          </a:xfrm>
+          <a:prstGeom prst="rect">
+            <a:avLst/>
+          </a:prstGeom>
+          <a:noFill/>
+          <a:ln/>
+        </p:spPr>
+        <p:txBody>
+          <a:bodyPr wrap="square" lIns="0" tIns="0" rIns="0" bIns="0" rtlCol="0" anchor="ctr"/>
+          <a:lstStyle/>
+          <a:p>
+            <a:pPr algn="ctr" indent="0" marL="0">
+              <a:buNone/>
+            </a:pPr>
+            <a:r>
+              <a:rPr lang="en-US" sz="1100" dirty="0">
+                <a:solidFill>
+                  <a:srgbClr val="5F6B7F"/>
+                </a:solidFill>
+              </a:rPr>
+              <a:t>5.5</a:t>
+            </a:r>
+            <a:endParaRPr lang="en-US" sz="1100" dirty="0"/>
+          </a:p>
+        </p:txBody>
+      </p:sp>
+      <p:sp>
+        <p:nvSpPr>
+          <p:cNvPr id="10" name="Text 8"/>
+          <p:cNvSpPr txBox="1"/>
+          <p:nvPr/>
+        </p:nvSpPr>
+        <p:spPr>
+          <a:xfrm>
+            <a:off x="320040" y="5532120"/>
+            <a:ext cx="502920" cy="274320"/>
+          </a:xfrm>
+          <a:prstGeom prst="rect">
+            <a:avLst/>
+          </a:prstGeom>
+          <a:noFill/>
+          <a:ln/>
+        </p:spPr>
+        <p:txBody>
+          <a:bodyPr wrap="square" lIns="0" tIns="0" rIns="0" bIns="0" rtlCol="0" anchor="ctr"/>
+          <a:lstStyle/>
+          <a:p>
+            <a:pPr algn="r" indent="0" marL="0">
+              <a:buNone/>
+            </a:pPr>
+            <a:r>
+              <a:rPr lang="en-US" sz="1100" dirty="0">
+                <a:solidFill>
+                  <a:srgbClr val="5F6B7F"/>
+                </a:solidFill>
+              </a:rPr>
+              <a:t>0.70</a:t>
+            </a:r>
+            <a:endParaRPr lang="en-US" sz="1100" dirty="0"/>
+          </a:p>
+        </p:txBody>
+      </p:sp>
+      <p:sp>
+        <p:nvSpPr>
+          <p:cNvPr id="11" name="Text 9"/>
+          <p:cNvSpPr txBox="1"/>
+          <p:nvPr/>
+        </p:nvSpPr>
+        <p:spPr>
+          <a:xfrm>
+            <a:off x="320040" y="4628111"/>
+            <a:ext cx="502920" cy="274320"/>
+          </a:xfrm>
+          <a:prstGeom prst="rect">
+            <a:avLst/>
+          </a:prstGeom>
+          <a:noFill/>
+          <a:ln/>
+        </p:spPr>
+        <p:txBody>
+          <a:bodyPr wrap="square" lIns="0" tIns="0" rIns="0" bIns="0" rtlCol="0" anchor="ctr"/>
+          <a:lstStyle/>
+          <a:p>
+            <a:pPr algn="r" indent="0" marL="0">
+              <a:buNone/>
+            </a:pPr>
+            <a:r>
+              <a:rPr lang="en-US" sz="1100" dirty="0">
+                <a:solidFill>
+                  <a:srgbClr val="5F6B7F"/>
+                </a:solidFill>
+              </a:rPr>
+              <a:t>0.75</a:t>
+            </a:r>
+            <a:endParaRPr lang="en-US" sz="1100" dirty="0"/>
+          </a:p>
+        </p:txBody>
+      </p:sp>
+      <p:sp>
+        <p:nvSpPr>
+          <p:cNvPr id="12" name="Text 10"/>
+          <p:cNvSpPr txBox="1"/>
+          <p:nvPr/>
+        </p:nvSpPr>
+        <p:spPr>
+          <a:xfrm>
+            <a:off x="320040" y="3724102"/>
+            <a:ext cx="502920" cy="274320"/>
+          </a:xfrm>
+          <a:prstGeom prst="rect">
+            <a:avLst/>
+          </a:prstGeom>
+          <a:noFill/>
+          <a:ln/>
+        </p:spPr>
+        <p:txBody>
+          <a:bodyPr wrap="square" lIns="0" tIns="0" rIns="0" bIns="0" rtlCol="0" anchor="ctr"/>
+          <a:lstStyle/>
+          <a:p>
+            <a:pPr algn="r" indent="0" marL="0">
+              <a:buNone/>
+            </a:pPr>
+            <a:r>
+              <a:rPr lang="en-US" sz="1100" dirty="0">
+                <a:solidFill>
+                  <a:srgbClr val="5F6B7F"/>
+                </a:solidFill>
+              </a:rPr>
+              <a:t>0.80</a:t>
+            </a:r>
+            <a:endParaRPr lang="en-US" sz="1100" dirty="0"/>
+          </a:p>
+        </p:txBody>
+      </p:sp>
+      <p:sp>
+        <p:nvSpPr>
+          <p:cNvPr id="13" name="Text 11"/>
+          <p:cNvSpPr txBox="1"/>
+          <p:nvPr/>
+        </p:nvSpPr>
+        <p:spPr>
+          <a:xfrm>
+            <a:off x="320040" y="2820093"/>
+            <a:ext cx="502920" cy="274320"/>
+          </a:xfrm>
+          <a:prstGeom prst="rect">
+            <a:avLst/>
+          </a:prstGeom>
+          <a:noFill/>
+          <a:ln/>
+        </p:spPr>
+        <p:txBody>
+          <a:bodyPr wrap="square" lIns="0" tIns="0" rIns="0" bIns="0" rtlCol="0" anchor="ctr"/>
+          <a:lstStyle/>
+          <a:p>
+            <a:pPr algn="r" indent="0" marL="0">
+              <a:buNone/>
+            </a:pPr>
+            <a:r>
+              <a:rPr lang="en-US" sz="1100" dirty="0">
+                <a:solidFill>
+                  <a:srgbClr val="5F6B7F"/>
+                </a:solidFill>
+              </a:rPr>
+              <a:t>0.85</a:t>
+            </a:r>
+            <a:endParaRPr lang="en-US" sz="1100" dirty="0"/>
+          </a:p>
+        </p:txBody>
+      </p:sp>
+      <p:sp>
+        <p:nvSpPr>
+          <p:cNvPr id="14" name="Text 12"/>
+          <p:cNvSpPr txBox="1"/>
+          <p:nvPr/>
+        </p:nvSpPr>
+        <p:spPr>
+          <a:xfrm>
+            <a:off x="320040" y="1916084"/>
+            <a:ext cx="502920" cy="274320"/>
+          </a:xfrm>
+          <a:prstGeom prst="rect">
+            <a:avLst/>
+          </a:prstGeom>
+          <a:noFill/>
+          <a:ln/>
+        </p:spPr>
+        <p:txBody>
+          <a:bodyPr wrap="square" lIns="0" tIns="0" rIns="0" bIns="0" rtlCol="0" anchor="ctr"/>
+          <a:lstStyle/>
+          <a:p>
+            <a:pPr algn="r" indent="0" marL="0">
+              <a:buNone/>
+            </a:pPr>
+            <a:r>
+              <a:rPr lang="en-US" sz="1100" dirty="0">
+                <a:solidFill>
+                  <a:srgbClr val="5F6B7F"/>
+                </a:solidFill>
+              </a:rPr>
+              <a:t>0.90</a:t>
+            </a:r>
+            <a:endParaRPr lang="en-US" sz="1100" dirty="0"/>
+          </a:p>
+        </p:txBody>
+      </p:sp>
+      <p:sp>
+        <p:nvSpPr>
+          <p:cNvPr id="15" name="Text 13"/>
+          <p:cNvSpPr txBox="1"/>
+          <p:nvPr/>
+        </p:nvSpPr>
+        <p:spPr>
+          <a:xfrm>
+            <a:off x="914400" y="5989320"/>
+            <a:ext cx="6675120" cy="274320"/>
+          </a:xfrm>
+          <a:prstGeom prst="rect">
+            <a:avLst/>
+          </a:prstGeom>
+          <a:noFill/>
+          <a:ln/>
+        </p:spPr>
+        <p:txBody>
+          <a:bodyPr wrap="square" lIns="0" tIns="0" rIns="0" bIns="0" rtlCol="0" anchor="ctr"/>
+          <a:lstStyle/>
+          <a:p>
+            <a:pPr algn="ctr" indent="0" marL="0">
+              <a:buNone/>
+            </a:pPr>
+            <a:r>
+              <a:rPr lang="en-US" sz="1200" dirty="0">
+                <a:solidFill>
+                  <a:srgbClr val="5F6B7F"/>
+                </a:solidFill>
+              </a:rPr>
+              <a:t>Cost per successful task (m$) →</a:t>
+            </a:r>
+            <a:endParaRPr lang="en-US" sz="1200" dirty="0"/>
+          </a:p>
+        </p:txBody>
+      </p:sp>
+      <p:sp>
+        <p:nvSpPr>
+          <p:cNvPr id="16" name="Text 14"/>
+          <p:cNvSpPr txBox="1"/>
+          <p:nvPr/>
+        </p:nvSpPr>
+        <p:spPr>
+          <a:xfrm>
+            <a:off x="228600" y="1325880"/>
+            <a:ext cx="1371600" cy="274320"/>
+          </a:xfrm>
+          <a:prstGeom prst="rect">
+            <a:avLst/>
+          </a:prstGeom>
+          <a:noFill/>
+          <a:ln/>
+        </p:spPr>
+        <p:txBody>
+          <a:bodyPr wrap="square" lIns="0" tIns="0" rIns="0" bIns="0" rtlCol="0" anchor="ctr"/>
+          <a:lstStyle/>
+          <a:p>
+            <a:pPr indent="0" marL="0">
+              <a:buNone/>
+            </a:pPr>
+            <a:r>
+              <a:rPr lang="en-US" sz="1200" dirty="0">
+                <a:solidFill>
+                  <a:srgbClr val="5F6B7F"/>
+                </a:solidFill>
+              </a:rPr>
+              <a:t>↑ Success</a:t>
+            </a:r>
+            <a:endParaRPr lang="en-US" sz="1200" dirty="0"/>
+          </a:p>
+        </p:txBody>
+      </p:sp>
+      <p:sp>
+        <p:nvSpPr>
+          <p:cNvPr id="17" name="Shape 15"/>
+          <p:cNvSpPr/>
+          <p:nvPr/>
+        </p:nvSpPr>
+        <p:spPr>
+          <a:xfrm flipV="1">
+            <a:off x="1748790" y="2686050"/>
+            <a:ext cx="1001268" cy="271203"/>
+          </a:xfrm>
+          <a:prstGeom prst="line">
+            <a:avLst/>
+          </a:prstGeom>
+          <a:noFill/>
+          <a:ln w="25400">
+            <a:solidFill>
+              <a:srgbClr val="E8A33D"/>
+            </a:solidFill>
+            <a:prstDash val="solid"/>
+          </a:ln>
+        </p:spPr>
+      </p:sp>
+      <p:sp>
+        <p:nvSpPr>
+          <p:cNvPr id="18" name="Shape 16"/>
+          <p:cNvSpPr/>
+          <p:nvPr/>
+        </p:nvSpPr>
+        <p:spPr>
+          <a:xfrm flipV="1">
+            <a:off x="2750058" y="2234045"/>
+            <a:ext cx="1969160" cy="452005"/>
+          </a:xfrm>
+          <a:prstGeom prst="line">
+            <a:avLst/>
+          </a:prstGeom>
+          <a:noFill/>
+          <a:ln w="25400">
+            <a:solidFill>
+              <a:srgbClr val="E8A33D"/>
+            </a:solidFill>
+            <a:prstDash val="solid"/>
+          </a:ln>
+        </p:spPr>
+      </p:sp>
+      <p:sp>
+        <p:nvSpPr>
+          <p:cNvPr id="19" name="Shape 17"/>
+          <p:cNvSpPr/>
+          <p:nvPr/>
+        </p:nvSpPr>
+        <p:spPr>
+          <a:xfrm flipV="1">
+            <a:off x="4719218" y="1999003"/>
+            <a:ext cx="2136038" cy="235042"/>
+          </a:xfrm>
+          <a:prstGeom prst="line">
+            <a:avLst/>
+          </a:prstGeom>
+          <a:noFill/>
+          <a:ln w="25400">
+            <a:solidFill>
+              <a:srgbClr val="E8A33D"/>
+            </a:solidFill>
+            <a:prstDash val="solid"/>
+          </a:ln>
+        </p:spPr>
+      </p:sp>
+      <p:sp>
+        <p:nvSpPr>
+          <p:cNvPr id="20" name="Shape 18"/>
+          <p:cNvSpPr/>
+          <p:nvPr/>
+        </p:nvSpPr>
+        <p:spPr>
+          <a:xfrm>
+            <a:off x="1648206" y="2856669"/>
+            <a:ext cx="201168" cy="201168"/>
+          </a:xfrm>
+          <a:prstGeom prst="ellipse">
+            <a:avLst/>
+          </a:prstGeom>
+          <a:solidFill>
+            <a:srgbClr val="E8A33D"/>
+          </a:solidFill>
+          <a:ln w="12700">
+            <a:solidFill>
+              <a:srgbClr val="FFFFFF"/>
+            </a:solidFill>
+            <a:prstDash val="solid"/>
+          </a:ln>
+        </p:spPr>
+      </p:sp>
+      <p:sp>
+        <p:nvSpPr>
+          <p:cNvPr id="21" name="Text 19"/>
+          <p:cNvSpPr txBox="1"/>
+          <p:nvPr/>
+        </p:nvSpPr>
+        <p:spPr>
+          <a:xfrm>
+            <a:off x="1200150" y="2545773"/>
+            <a:ext cx="1097280" cy="256032"/>
+          </a:xfrm>
+          <a:prstGeom prst="rect">
+            <a:avLst/>
+          </a:prstGeom>
+          <a:noFill/>
+          <a:ln/>
+        </p:spPr>
+        <p:txBody>
+          <a:bodyPr wrap="square" lIns="0" tIns="0" rIns="0" bIns="0" rtlCol="0" anchor="ctr"/>
+          <a:lstStyle/>
+          <a:p>
+            <a:pPr algn="ctr" indent="0" marL="0">
+              <a:buNone/>
+            </a:pPr>
+            <a:r>
+              <a:rPr lang="en-US" sz="1100" dirty="0">
+                <a:solidFill>
+                  <a:srgbClr val="1B1F2A"/>
+                </a:solidFill>
+              </a:rPr>
+              <a:t>Qmin 0.6</a:t>
+            </a:r>
+            <a:endParaRPr lang="en-US" sz="1100" dirty="0"/>
+          </a:p>
+        </p:txBody>
+      </p:sp>
+      <p:sp>
+        <p:nvSpPr>
+          <p:cNvPr id="22" name="Shape 20"/>
+          <p:cNvSpPr/>
+          <p:nvPr/>
+        </p:nvSpPr>
+        <p:spPr>
+          <a:xfrm>
+            <a:off x="2649474" y="2585466"/>
+            <a:ext cx="201168" cy="201168"/>
+          </a:xfrm>
+          <a:prstGeom prst="ellipse">
+            <a:avLst/>
+          </a:prstGeom>
+          <a:solidFill>
+            <a:srgbClr val="E8A33D"/>
+          </a:solidFill>
+          <a:ln w="12700">
+            <a:solidFill>
+              <a:srgbClr val="FFFFFF"/>
+            </a:solidFill>
+            <a:prstDash val="solid"/>
+          </a:ln>
+        </p:spPr>
+      </p:sp>
+      <p:sp>
+        <p:nvSpPr>
+          <p:cNvPr id="23" name="Text 21"/>
+          <p:cNvSpPr txBox="1"/>
+          <p:nvPr/>
+        </p:nvSpPr>
+        <p:spPr>
+          <a:xfrm>
+            <a:off x="2201418" y="2274570"/>
+            <a:ext cx="1097280" cy="256032"/>
+          </a:xfrm>
+          <a:prstGeom prst="rect">
+            <a:avLst/>
+          </a:prstGeom>
+          <a:noFill/>
+          <a:ln/>
+        </p:spPr>
+        <p:txBody>
+          <a:bodyPr wrap="square" lIns="0" tIns="0" rIns="0" bIns="0" rtlCol="0" anchor="ctr"/>
+          <a:lstStyle/>
+          <a:p>
+            <a:pPr algn="ctr" indent="0" marL="0">
+              <a:buNone/>
+            </a:pPr>
+            <a:r>
+              <a:rPr lang="en-US" sz="1100" dirty="0">
+                <a:solidFill>
+                  <a:srgbClr val="1B1F2A"/>
+                </a:solidFill>
+              </a:rPr>
+              <a:t>0.7</a:t>
+            </a:r>
+            <a:endParaRPr lang="en-US" sz="1100" dirty="0"/>
+          </a:p>
+        </p:txBody>
+      </p:sp>
+      <p:sp>
+        <p:nvSpPr>
+          <p:cNvPr id="24" name="Shape 22"/>
+          <p:cNvSpPr/>
+          <p:nvPr/>
+        </p:nvSpPr>
+        <p:spPr>
+          <a:xfrm>
+            <a:off x="4618634" y="2133461"/>
+            <a:ext cx="201168" cy="201168"/>
+          </a:xfrm>
+          <a:prstGeom prst="ellipse">
+            <a:avLst/>
+          </a:prstGeom>
+          <a:solidFill>
+            <a:srgbClr val="E8A33D"/>
+          </a:solidFill>
+          <a:ln w="12700">
+            <a:solidFill>
+              <a:srgbClr val="FFFFFF"/>
+            </a:solidFill>
+            <a:prstDash val="solid"/>
+          </a:ln>
+        </p:spPr>
+      </p:sp>
+      <p:sp>
+        <p:nvSpPr>
+          <p:cNvPr id="25" name="Text 23"/>
+          <p:cNvSpPr txBox="1"/>
+          <p:nvPr/>
+        </p:nvSpPr>
+        <p:spPr>
+          <a:xfrm>
+            <a:off x="4170578" y="1822565"/>
+            <a:ext cx="1097280" cy="256032"/>
+          </a:xfrm>
+          <a:prstGeom prst="rect">
+            <a:avLst/>
+          </a:prstGeom>
+          <a:noFill/>
+          <a:ln/>
+        </p:spPr>
+        <p:txBody>
+          <a:bodyPr wrap="square" lIns="0" tIns="0" rIns="0" bIns="0" rtlCol="0" anchor="ctr"/>
+          <a:lstStyle/>
+          <a:p>
+            <a:pPr algn="ctr" indent="0" marL="0">
+              <a:buNone/>
+            </a:pPr>
+            <a:r>
+              <a:rPr lang="en-US" sz="1100" dirty="0">
+                <a:solidFill>
+                  <a:srgbClr val="1B1F2A"/>
+                </a:solidFill>
+              </a:rPr>
+              <a:t>0.8 (default)</a:t>
+            </a:r>
+            <a:endParaRPr lang="en-US" sz="1100" dirty="0"/>
+          </a:p>
+        </p:txBody>
+      </p:sp>
+      <p:sp>
+        <p:nvSpPr>
+          <p:cNvPr id="26" name="Shape 24"/>
+          <p:cNvSpPr/>
+          <p:nvPr/>
+        </p:nvSpPr>
+        <p:spPr>
+          <a:xfrm>
+            <a:off x="6754673" y="1898419"/>
+            <a:ext cx="201168" cy="201168"/>
+          </a:xfrm>
+          <a:prstGeom prst="ellipse">
+            <a:avLst/>
+          </a:prstGeom>
+          <a:solidFill>
+            <a:srgbClr val="E8A33D"/>
+          </a:solidFill>
+          <a:ln w="12700">
+            <a:solidFill>
+              <a:srgbClr val="FFFFFF"/>
+            </a:solidFill>
+            <a:prstDash val="solid"/>
+          </a:ln>
+        </p:spPr>
+      </p:sp>
+      <p:sp>
+        <p:nvSpPr>
+          <p:cNvPr id="27" name="Text 25"/>
+          <p:cNvSpPr txBox="1"/>
+          <p:nvPr/>
+        </p:nvSpPr>
+        <p:spPr>
+          <a:xfrm>
+            <a:off x="6306617" y="1587523"/>
+            <a:ext cx="1097280" cy="256032"/>
+          </a:xfrm>
+          <a:prstGeom prst="rect">
+            <a:avLst/>
+          </a:prstGeom>
+          <a:noFill/>
+          <a:ln/>
+        </p:spPr>
+        <p:txBody>
+          <a:bodyPr wrap="square" lIns="0" tIns="0" rIns="0" bIns="0" rtlCol="0" anchor="ctr"/>
+          <a:lstStyle/>
+          <a:p>
+            <a:pPr algn="ctr" indent="0" marL="0">
+              <a:buNone/>
+            </a:pPr>
+            <a:r>
+              <a:rPr lang="en-US" sz="1100" dirty="0">
+                <a:solidFill>
+                  <a:srgbClr val="1B1F2A"/>
+                </a:solidFill>
+              </a:rPr>
+              <a:t>0.9</a:t>
+            </a:r>
+            <a:endParaRPr lang="en-US" sz="1100" dirty="0"/>
+          </a:p>
+        </p:txBody>
+      </p:sp>
+      <p:sp>
+        <p:nvSpPr>
+          <p:cNvPr id="28" name="Shape 26"/>
+          <p:cNvSpPr/>
+          <p:nvPr/>
+        </p:nvSpPr>
+        <p:spPr>
+          <a:xfrm>
+            <a:off x="4284878" y="5134772"/>
+            <a:ext cx="201168" cy="201168"/>
+          </a:xfrm>
+          <a:prstGeom prst="ellipse">
+            <a:avLst/>
+          </a:prstGeom>
+          <a:solidFill>
+            <a:srgbClr val="8A94A6"/>
+          </a:solidFill>
+          <a:ln w="12700">
+            <a:solidFill>
+              <a:srgbClr val="FFFFFF"/>
+            </a:solidFill>
+            <a:prstDash val="solid"/>
+          </a:ln>
+        </p:spPr>
+      </p:sp>
+      <p:sp>
+        <p:nvSpPr>
+          <p:cNvPr id="29" name="Text 27"/>
+          <p:cNvSpPr txBox="1"/>
+          <p:nvPr/>
+        </p:nvSpPr>
+        <p:spPr>
+          <a:xfrm>
+            <a:off x="4522622" y="5107340"/>
+            <a:ext cx="1371600" cy="256032"/>
+          </a:xfrm>
+          <a:prstGeom prst="rect">
+            <a:avLst/>
+          </a:prstGeom>
+          <a:noFill/>
+          <a:ln/>
+        </p:spPr>
+        <p:txBody>
+          <a:bodyPr wrap="square" lIns="0" tIns="0" rIns="0" bIns="0" rtlCol="0" anchor="ctr"/>
+          <a:lstStyle/>
+          <a:p>
+            <a:pPr indent="0" marL="0">
+              <a:buNone/>
+            </a:pPr>
+            <a:r>
+              <a:rPr lang="en-US" sz="1100" dirty="0">
+                <a:solidFill>
+                  <a:srgbClr val="3A4256"/>
+                </a:solidFill>
+              </a:rPr>
+              <a:t>B2 Supervised</a:t>
+            </a:r>
+            <a:endParaRPr lang="en-US" sz="1100" dirty="0"/>
+          </a:p>
+        </p:txBody>
+      </p:sp>
+      <p:sp>
+        <p:nvSpPr>
+          <p:cNvPr id="30" name="Shape 28"/>
+          <p:cNvSpPr/>
+          <p:nvPr/>
+        </p:nvSpPr>
+        <p:spPr>
+          <a:xfrm>
+            <a:off x="5786780" y="3399074"/>
+            <a:ext cx="201168" cy="201168"/>
+          </a:xfrm>
+          <a:prstGeom prst="ellipse">
+            <a:avLst/>
+          </a:prstGeom>
+          <a:solidFill>
+            <a:srgbClr val="8A94A6"/>
+          </a:solidFill>
+          <a:ln w="12700">
+            <a:solidFill>
+              <a:srgbClr val="FFFFFF"/>
+            </a:solidFill>
+            <a:prstDash val="solid"/>
+          </a:ln>
+        </p:spPr>
+      </p:sp>
+      <p:sp>
+        <p:nvSpPr>
+          <p:cNvPr id="31" name="Text 29"/>
+          <p:cNvSpPr txBox="1"/>
+          <p:nvPr/>
+        </p:nvSpPr>
+        <p:spPr>
+          <a:xfrm>
+            <a:off x="6024524" y="3371642"/>
+            <a:ext cx="1371600" cy="256032"/>
+          </a:xfrm>
+          <a:prstGeom prst="rect">
+            <a:avLst/>
+          </a:prstGeom>
+          <a:noFill/>
+          <a:ln/>
+        </p:spPr>
+        <p:txBody>
+          <a:bodyPr wrap="square" lIns="0" tIns="0" rIns="0" bIns="0" rtlCol="0" anchor="ctr"/>
+          <a:lstStyle/>
+          <a:p>
+            <a:pPr indent="0" marL="0">
+              <a:buNone/>
+            </a:pPr>
+            <a:r>
+              <a:rPr lang="en-US" sz="1100" dirty="0">
+                <a:solidFill>
+                  <a:srgbClr val="3A4256"/>
+                </a:solidFill>
+              </a:rPr>
+              <a:t>B4 Static</a:t>
+            </a:r>
+            <a:endParaRPr lang="en-US" sz="1100" dirty="0"/>
+          </a:p>
+        </p:txBody>
+      </p:sp>
+      <p:sp>
+        <p:nvSpPr>
+          <p:cNvPr id="32" name="Shape 30"/>
+          <p:cNvSpPr/>
+          <p:nvPr/>
+        </p:nvSpPr>
+        <p:spPr>
+          <a:xfrm>
+            <a:off x="4284878" y="3706437"/>
+            <a:ext cx="201168" cy="201168"/>
+          </a:xfrm>
+          <a:prstGeom prst="ellipse">
+            <a:avLst/>
+          </a:prstGeom>
+          <a:solidFill>
+            <a:srgbClr val="8A94A6"/>
+          </a:solidFill>
+          <a:ln w="12700">
+            <a:solidFill>
+              <a:srgbClr val="FFFFFF"/>
+            </a:solidFill>
+            <a:prstDash val="solid"/>
+          </a:ln>
+        </p:spPr>
+      </p:sp>
+      <p:sp>
+        <p:nvSpPr>
+          <p:cNvPr id="33" name="Text 31"/>
+          <p:cNvSpPr txBox="1"/>
+          <p:nvPr/>
+        </p:nvSpPr>
+        <p:spPr>
+          <a:xfrm>
+            <a:off x="4522622" y="3679005"/>
+            <a:ext cx="1371600" cy="256032"/>
+          </a:xfrm>
+          <a:prstGeom prst="rect">
+            <a:avLst/>
+          </a:prstGeom>
+          <a:noFill/>
+          <a:ln/>
+        </p:spPr>
+        <p:txBody>
+          <a:bodyPr wrap="square" lIns="0" tIns="0" rIns="0" bIns="0" rtlCol="0" anchor="ctr"/>
+          <a:lstStyle/>
+          <a:p>
+            <a:pPr indent="0" marL="0">
+              <a:buNone/>
+            </a:pPr>
+            <a:r>
+              <a:rPr lang="en-US" sz="1100" dirty="0">
+                <a:solidFill>
+                  <a:srgbClr val="3A4256"/>
+                </a:solidFill>
+              </a:rPr>
+              <a:t>B5 Bandit</a:t>
+            </a:r>
+            <a:endParaRPr lang="en-US" sz="1100" dirty="0"/>
+          </a:p>
+        </p:txBody>
+      </p:sp>
+      <p:sp>
+        <p:nvSpPr>
+          <p:cNvPr id="34" name="takeaway card"/>
+          <p:cNvSpPr/>
+          <p:nvPr/>
+        </p:nvSpPr>
+        <p:spPr>
+          <a:xfrm>
+            <a:off x="8138160" y="1371600"/>
+            <a:ext cx="3566160" cy="4480560"/>
+          </a:xfrm>
+          <a:prstGeom prst="roundRect">
+            <a:avLst>
+              <a:gd name="adj" fmla="val 2051"/>
+            </a:avLst>
+          </a:prstGeom>
+          <a:solidFill>
+            <a:srgbClr val="EEF1F5"/>
+          </a:solidFill>
+          <a:ln w="12700">
+            <a:solidFill>
+              <a:srgbClr val="EEF1F5"/>
+            </a:solidFill>
+            <a:prstDash val="solid"/>
+          </a:ln>
+        </p:spPr>
+      </p:sp>
+      <p:sp>
+        <p:nvSpPr>
+          <p:cNvPr id="35" name="Text 33"/>
+          <p:cNvSpPr txBox="1"/>
+          <p:nvPr/>
+        </p:nvSpPr>
+        <p:spPr>
+          <a:xfrm>
+            <a:off x="8412480" y="1600200"/>
+            <a:ext cx="3063240" cy="4023360"/>
           </a:xfrm>
           <a:prstGeom prst="rect">
             <a:avLst/>
@@ -9857,7 +11807,7 @@
                   <a:srgbClr val="1B1F2A"/>
                 </a:solidFill>
               </a:rPr>
-              <a:t>Real execution</a:t>
+              <a:t>At the default target (Qmin 0.8)</a:t>
             </a:r>
             <a:endParaRPr lang="en-US" sz="1400" dirty="0"/>
           </a:p>
@@ -9871,7 +11821,7 @@
                   <a:schemeClr val="tx2"/>
                 </a:solidFill>
               </a:rPr>
-              <a:t>SQLite primary + stale replica, hybrid and BM25 retrieval, log index and full log scan, calculator, subprocess Python sandbox. Answers graded against ground truth.</a:t>
+              <a:t>ATLAS buys +7 to +17 points of success, but costs about the same per success as B2 and B5 under drift, and more than B2 when tools are stable.</a:t>
             </a:r>
             <a:endParaRPr lang="en-US" sz="1400" dirty="0"/>
           </a:p>
@@ -9899,7 +11849,7 @@
                   <a:srgbClr val="1B1F2A"/>
                 </a:solidFill>
               </a:rPr>
-              <a:t>Injected identically for all routers</a:t>
+              <a:t>At Qmin 0.6–0.7</a:t>
             </a:r>
             <a:endParaRPr lang="en-US" sz="1400" dirty="0"/>
           </a:p>
@@ -9913,37 +11863,45 @@
                   <a:schemeClr val="tx2"/>
                 </a:solidFill>
               </a:rPr>
-              <a:t>Network latency, transient errors, a primary-DB incident, a noisy sandbox neighbour, a degraded search cluster.</a:t>
+              <a:t>ATLAS beats B2, B4 and B5 on both axes at once.</a:t>
             </a:r>
             <a:endParaRPr lang="en-US" sz="1400" dirty="0"/>
           </a:p>
-          <a:p>
-            <a:pPr indent="0" marL="0">
-              <a:buNone/>
-            </a:pPr>
-            <a:r>
-              <a:rPr lang="en-US" sz="800" dirty="0">
+        </p:txBody>
+      </p:sp>
+      <p:sp>
+        <p:nvSpPr>
+          <p:cNvPr id="36" name="Text 34"/>
+          <p:cNvSpPr txBox="1"/>
+          <p:nvPr/>
+        </p:nvSpPr>
+        <p:spPr>
+          <a:xfrm>
+            <a:off x="8412480" y="4846320"/>
+            <a:ext cx="3063240" cy="822960"/>
+          </a:xfrm>
+          <a:prstGeom prst="rect">
+            <a:avLst/>
+          </a:prstGeom>
+          <a:noFill/>
+          <a:ln/>
+        </p:spPr>
+        <p:txBody>
+          <a:bodyPr wrap="square" lIns="0" tIns="0" rIns="0" bIns="0" rtlCol="0" anchor="t"/>
+          <a:lstStyle/>
+          <a:p>
+            <a:pPr indent="0" marL="0">
+              <a:buNone/>
+            </a:pPr>
+            <a:r>
+              <a:rPr lang="en-US" sz="1100" dirty="0">
                 <a:solidFill>
                   <a:schemeClr val="tx2"/>
                 </a:solidFill>
               </a:rPr>
-              <a:t> </a:t>
-            </a:r>
-            <a:endParaRPr lang="en-US" sz="1400" dirty="0"/>
-          </a:p>
-          <a:p>
-            <a:pPr indent="0" marL="0">
-              <a:buNone/>
-            </a:pPr>
-            <a:r>
-              <a:rPr lang="en-US" sz="1400" b="1" dirty="0">
-                <a:solidFill>
-                  <a:srgbClr val="2A9D8F"/>
-                </a:solidFill>
-              </a:rPr>
-              <a:t>+9.1 points vs the best-tools rules router (p = 0.02, 10 seeds), for +0.25 m$ per success.</a:t>
-            </a:r>
-            <a:endParaRPr lang="en-US" sz="1400" dirty="0"/>
+              <a:t>E5 sweep under drift, 10 seeds. Operating points were chosen after the sweep. B1 (0.475, 6.26 m$) is off-scale.</a:t>
+            </a:r>
+            <a:endParaRPr lang="en-US" sz="1100" dirty="0"/>
           </a:p>
         </p:txBody>
       </p:sp>
@@ -10052,7 +12010,7 @@
                 <a:ea typeface="Cambria" pitchFamily="34" charset="-122"/>
                 <a:cs typeface="Cambria" pitchFamily="34" charset="-120"/>
               </a:rPr>
-              <a:t>The lead holds at every level of query understanding</a:t>
+              <a:t>On real tools, ATLAS routes around a database incident</a:t>
             </a:r>
             <a:endParaRPr lang="en-US" sz="3200" dirty="0"/>
           </a:p>
@@ -10066,7 +12024,7 @@
         </p:nvGraphicFramePr>
         <p:xfrm>
           <a:off x="457200" y="1280160"/>
-          <a:ext cx="7498080" cy="4846320"/>
+          <a:ext cx="7132320" cy="4846320"/>
         </p:xfrm>
         <a:graphic xmlns:a="http://schemas.openxmlformats.org/drawingml/2006/main">
           <a:graphicData uri="http://schemas.openxmlformats.org/drawingml/2006/chart">
@@ -10082,47 +12040,8 @@
         </p:nvSpPr>
         <p:spPr>
           <a:xfrm>
-            <a:off x="8321040" y="1417320"/>
-            <a:ext cx="3383280" cy="868680"/>
-          </a:xfrm>
-          <a:prstGeom prst="rect">
-            <a:avLst/>
-          </a:prstGeom>
-          <a:noFill/>
-          <a:ln/>
-        </p:spPr>
-        <p:txBody>
-          <a:bodyPr wrap="square" lIns="0" tIns="0" rIns="0" bIns="0" rtlCol="0" anchor="b"/>
-          <a:lstStyle/>
-          <a:p>
-            <a:pPr indent="0" marL="0">
-              <a:buNone/>
-            </a:pPr>
-            <a:r>
-              <a:rPr lang="en-US" sz="4800" b="1" dirty="0">
-                <a:solidFill>
-                  <a:srgbClr val="C8553D"/>
-                </a:solidFill>
-                <a:latin typeface="Cambria" pitchFamily="34" charset="0"/>
-                <a:ea typeface="Cambria" pitchFamily="34" charset="-122"/>
-                <a:cs typeface="Cambria" pitchFamily="34" charset="-120"/>
-              </a:rPr>
-              <a:t>0.35</a:t>
-            </a:r>
-            <a:endParaRPr lang="en-US" sz="4800" dirty="0"/>
-          </a:p>
-        </p:txBody>
-      </p:sp>
-      <p:sp>
-        <p:nvSpPr>
-          <p:cNvPr id="5" name="Text 2"/>
-          <p:cNvSpPr txBox="1"/>
-          <p:nvPr/>
-        </p:nvSpPr>
-        <p:spPr>
-          <a:xfrm>
-            <a:off x="8321040" y="2331720"/>
-            <a:ext cx="3383280" cy="685800"/>
+            <a:off x="7955280" y="1371600"/>
+            <a:ext cx="3749040" cy="4846320"/>
           </a:xfrm>
           <a:prstGeom prst="rect">
             <a:avLst/>
@@ -10138,112 +12057,43 @@
               <a:buNone/>
             </a:pPr>
             <a:r>
-              <a:rPr lang="en-US" sz="1300" dirty="0">
+              <a:rPr lang="en-US" sz="1400" b="1" dirty="0">
+                <a:solidFill>
+                  <a:srgbClr val="1B1F2A"/>
+                </a:solidFill>
+              </a:rPr>
+              <a:t>Real execution</a:t>
+            </a:r>
+            <a:endParaRPr lang="en-US" sz="1400" dirty="0"/>
+          </a:p>
+          <a:p>
+            <a:pPr indent="0" marL="0">
+              <a:buNone/>
+            </a:pPr>
+            <a:r>
+              <a:rPr lang="en-US" sz="1400" dirty="0">
                 <a:solidFill>
                   <a:schemeClr val="tx2"/>
                 </a:solidFill>
               </a:rPr>
-              <a:t>exact-set accuracy of a local 0.5B LLM (Qwen2.5, llama.cpp, CPU), vs 0.90 for the classifier</a:t>
-            </a:r>
-            <a:endParaRPr lang="en-US" sz="1300" dirty="0"/>
-          </a:p>
-        </p:txBody>
-      </p:sp>
-      <p:sp>
-        <p:nvSpPr>
-          <p:cNvPr id="6" name="Text 3"/>
-          <p:cNvSpPr txBox="1"/>
-          <p:nvPr/>
-        </p:nvSpPr>
-        <p:spPr>
-          <a:xfrm>
-            <a:off x="8321040" y="3246120"/>
-            <a:ext cx="3383280" cy="868680"/>
-          </a:xfrm>
-          <a:prstGeom prst="rect">
-            <a:avLst/>
-          </a:prstGeom>
-          <a:noFill/>
-          <a:ln/>
-        </p:spPr>
-        <p:txBody>
-          <a:bodyPr wrap="square" lIns="0" tIns="0" rIns="0" bIns="0" rtlCol="0" anchor="b"/>
-          <a:lstStyle/>
-          <a:p>
-            <a:pPr indent="0" marL="0">
-              <a:buNone/>
-            </a:pPr>
-            <a:r>
-              <a:rPr lang="en-US" sz="4800" b="1" dirty="0">
-                <a:solidFill>
-                  <a:srgbClr val="3A4256"/>
-                </a:solidFill>
-                <a:latin typeface="Cambria" pitchFamily="34" charset="0"/>
-                <a:ea typeface="Cambria" pitchFamily="34" charset="-122"/>
-                <a:cs typeface="Cambria" pitchFamily="34" charset="-120"/>
-              </a:rPr>
-              <a:t>635 ms</a:t>
-            </a:r>
-            <a:endParaRPr lang="en-US" sz="4800" dirty="0"/>
-          </a:p>
-        </p:txBody>
-      </p:sp>
-      <p:sp>
-        <p:nvSpPr>
-          <p:cNvPr id="7" name="Text 4"/>
-          <p:cNvSpPr txBox="1"/>
-          <p:nvPr/>
-        </p:nvSpPr>
-        <p:spPr>
-          <a:xfrm>
-            <a:off x="8321040" y="4160520"/>
-            <a:ext cx="3383280" cy="685800"/>
-          </a:xfrm>
-          <a:prstGeom prst="rect">
-            <a:avLst/>
-          </a:prstGeom>
-          <a:noFill/>
-          <a:ln/>
-        </p:spPr>
-        <p:txBody>
-          <a:bodyPr wrap="square" lIns="0" tIns="0" rIns="0" bIns="0" rtlCol="0" anchor="t"/>
-          <a:lstStyle/>
-          <a:p>
-            <a:pPr indent="0" marL="0">
-              <a:buNone/>
-            </a:pPr>
-            <a:r>
-              <a:rPr lang="en-US" sz="1300" dirty="0">
+              <a:t>SQLite primary + stale replica, hybrid and BM25 retrieval, log index and full log scan, calculator, subprocess Python sandbox. Answers graded against ground truth.</a:t>
+            </a:r>
+            <a:endParaRPr lang="en-US" sz="1400" dirty="0"/>
+          </a:p>
+          <a:p>
+            <a:pPr indent="0" marL="0">
+              <a:buNone/>
+            </a:pPr>
+            <a:r>
+              <a:rPr lang="en-US" sz="800" dirty="0">
                 <a:solidFill>
                   <a:schemeClr val="tx2"/>
                 </a:solidFill>
               </a:rPr>
-              <a:t>per query for the LLM, vs 3 ms for the classifier</a:t>
-            </a:r>
-            <a:endParaRPr lang="en-US" sz="1300" dirty="0"/>
-          </a:p>
-        </p:txBody>
-      </p:sp>
-      <p:sp>
-        <p:nvSpPr>
-          <p:cNvPr id="8" name="Text 5"/>
-          <p:cNvSpPr txBox="1"/>
-          <p:nvPr/>
-        </p:nvSpPr>
-        <p:spPr>
-          <a:xfrm>
-            <a:off x="8321040" y="5074920"/>
-            <a:ext cx="3383280" cy="822960"/>
-          </a:xfrm>
-          <a:prstGeom prst="rect">
-            <a:avLst/>
-          </a:prstGeom>
-          <a:noFill/>
-          <a:ln/>
-        </p:spPr>
-        <p:txBody>
-          <a:bodyPr wrap="square" lIns="0" tIns="0" rIns="0" bIns="0" rtlCol="0" anchor="t"/>
-          <a:lstStyle/>
+              <a:t> </a:t>
+            </a:r>
+            <a:endParaRPr lang="en-US" sz="1400" dirty="0"/>
+          </a:p>
           <a:p>
             <a:pPr indent="0" marL="0">
               <a:buNone/>
@@ -10251,10 +12101,52 @@
             <a:r>
               <a:rPr lang="en-US" sz="1400" b="1" dirty="0">
                 <a:solidFill>
-                  <a:schemeClr val="tx1"/>
-                </a:solidFill>
-              </a:rPr>
-              <a:t>Small local LLMs are not a free upgrade: understanding errors cap every router.</a:t>
+                  <a:srgbClr val="1B1F2A"/>
+                </a:solidFill>
+              </a:rPr>
+              <a:t>Injected identically for all routers</a:t>
+            </a:r>
+            <a:endParaRPr lang="en-US" sz="1400" dirty="0"/>
+          </a:p>
+          <a:p>
+            <a:pPr indent="0" marL="0">
+              <a:buNone/>
+            </a:pPr>
+            <a:r>
+              <a:rPr lang="en-US" sz="1400" dirty="0">
+                <a:solidFill>
+                  <a:schemeClr val="tx2"/>
+                </a:solidFill>
+              </a:rPr>
+              <a:t>Network latency, transient errors, a primary-DB incident, a noisy sandbox neighbour, a degraded search cluster.</a:t>
+            </a:r>
+            <a:endParaRPr lang="en-US" sz="1400" dirty="0"/>
+          </a:p>
+          <a:p>
+            <a:pPr indent="0" marL="0">
+              <a:buNone/>
+            </a:pPr>
+            <a:r>
+              <a:rPr lang="en-US" sz="800" dirty="0">
+                <a:solidFill>
+                  <a:schemeClr val="tx2"/>
+                </a:solidFill>
+              </a:rPr>
+              <a:t> </a:t>
+            </a:r>
+            <a:endParaRPr lang="en-US" sz="1400" dirty="0"/>
+          </a:p>
+          <a:p>
+            <a:pPr indent="0" marL="0">
+              <a:buNone/>
+            </a:pPr>
+            <a:r>
+              <a:rPr lang="en-US" sz="1400" b="1" dirty="0">
+                <a:solidFill>
+                  <a:srgbClr val="2A9D8F"/>
+                </a:solidFill>
+              </a:rPr>
+              <a:t>+9.1 points vs the best-tools rules router (p = 0.02, 10 seeds), for +0.25 m$ per success.</a:t>
             </a:r>
             <a:endParaRPr lang="en-US" sz="1400" dirty="0"/>
           </a:p>
@@ -10365,7 +12257,7 @@
                 <a:ea typeface="Cambria" pitchFamily="34" charset="-122"/>
                 <a:cs typeface="Cambria" pitchFamily="34" charset="-120"/>
               </a:rPr>
-              <a:t>Plan structure does most of the work</a:t>
+              <a:t>The lead holds at every level of query understanding</a:t>
             </a:r>
             <a:endParaRPr lang="en-US" sz="3200" dirty="0"/>
           </a:p>
@@ -10379,7 +12271,7 @@
         </p:nvGraphicFramePr>
         <p:xfrm>
           <a:off x="457200" y="1280160"/>
-          <a:ext cx="7315200" cy="4937760"/>
+          <a:ext cx="7498080" cy="4846320"/>
         </p:xfrm>
         <a:graphic xmlns:a="http://schemas.openxmlformats.org/drawingml/2006/main">
           <a:graphicData uri="http://schemas.openxmlformats.org/drawingml/2006/chart">
@@ -10395,8 +12287,47 @@
         </p:nvSpPr>
         <p:spPr>
           <a:xfrm>
-            <a:off x="8138160" y="1371600"/>
-            <a:ext cx="3566160" cy="4846320"/>
+            <a:off x="8321040" y="1417320"/>
+            <a:ext cx="3383280" cy="868680"/>
+          </a:xfrm>
+          <a:prstGeom prst="rect">
+            <a:avLst/>
+          </a:prstGeom>
+          <a:noFill/>
+          <a:ln/>
+        </p:spPr>
+        <p:txBody>
+          <a:bodyPr wrap="square" lIns="0" tIns="0" rIns="0" bIns="0" rtlCol="0" anchor="b"/>
+          <a:lstStyle/>
+          <a:p>
+            <a:pPr indent="0" marL="0">
+              <a:buNone/>
+            </a:pPr>
+            <a:r>
+              <a:rPr lang="en-US" sz="4800" b="1" dirty="0">
+                <a:solidFill>
+                  <a:srgbClr val="C8553D"/>
+                </a:solidFill>
+                <a:latin typeface="Cambria" pitchFamily="34" charset="0"/>
+                <a:ea typeface="Cambria" pitchFamily="34" charset="-122"/>
+                <a:cs typeface="Cambria" pitchFamily="34" charset="-120"/>
+              </a:rPr>
+              <a:t>0.35</a:t>
+            </a:r>
+            <a:endParaRPr lang="en-US" sz="4800" dirty="0"/>
+          </a:p>
+        </p:txBody>
+      </p:sp>
+      <p:sp>
+        <p:nvSpPr>
+          <p:cNvPr id="5" name="Text 2"/>
+          <p:cNvSpPr txBox="1"/>
+          <p:nvPr/>
+        </p:nvSpPr>
+        <p:spPr>
+          <a:xfrm>
+            <a:off x="8321040" y="2331720"/>
+            <a:ext cx="3383280" cy="685800"/>
           </a:xfrm>
           <a:prstGeom prst="rect">
             <a:avLst/>
@@ -10412,110 +12343,123 @@
               <a:buNone/>
             </a:pPr>
             <a:r>
+              <a:rPr lang="en-US" sz="1300" dirty="0">
+                <a:solidFill>
+                  <a:schemeClr val="tx2"/>
+                </a:solidFill>
+              </a:rPr>
+              <a:t>exact-set accuracy of a local 0.5B LLM (Qwen2.5, llama.cpp, CPU), vs 0.90 for the classifier</a:t>
+            </a:r>
+            <a:endParaRPr lang="en-US" sz="1300" dirty="0"/>
+          </a:p>
+        </p:txBody>
+      </p:sp>
+      <p:sp>
+        <p:nvSpPr>
+          <p:cNvPr id="6" name="Text 3"/>
+          <p:cNvSpPr txBox="1"/>
+          <p:nvPr/>
+        </p:nvSpPr>
+        <p:spPr>
+          <a:xfrm>
+            <a:off x="8321040" y="3246120"/>
+            <a:ext cx="3383280" cy="868680"/>
+          </a:xfrm>
+          <a:prstGeom prst="rect">
+            <a:avLst/>
+          </a:prstGeom>
+          <a:noFill/>
+          <a:ln/>
+        </p:spPr>
+        <p:txBody>
+          <a:bodyPr wrap="square" lIns="0" tIns="0" rIns="0" bIns="0" rtlCol="0" anchor="b"/>
+          <a:lstStyle/>
+          <a:p>
+            <a:pPr indent="0" marL="0">
+              <a:buNone/>
+            </a:pPr>
+            <a:r>
+              <a:rPr lang="en-US" sz="4800" b="1" dirty="0">
+                <a:solidFill>
+                  <a:srgbClr val="3A4256"/>
+                </a:solidFill>
+                <a:latin typeface="Cambria" pitchFamily="34" charset="0"/>
+                <a:ea typeface="Cambria" pitchFamily="34" charset="-122"/>
+                <a:cs typeface="Cambria" pitchFamily="34" charset="-120"/>
+              </a:rPr>
+              <a:t>635 ms</a:t>
+            </a:r>
+            <a:endParaRPr lang="en-US" sz="4800" dirty="0"/>
+          </a:p>
+        </p:txBody>
+      </p:sp>
+      <p:sp>
+        <p:nvSpPr>
+          <p:cNvPr id="7" name="Text 4"/>
+          <p:cNvSpPr txBox="1"/>
+          <p:nvPr/>
+        </p:nvSpPr>
+        <p:spPr>
+          <a:xfrm>
+            <a:off x="8321040" y="4160520"/>
+            <a:ext cx="3383280" cy="685800"/>
+          </a:xfrm>
+          <a:prstGeom prst="rect">
+            <a:avLst/>
+          </a:prstGeom>
+          <a:noFill/>
+          <a:ln/>
+        </p:spPr>
+        <p:txBody>
+          <a:bodyPr wrap="square" lIns="0" tIns="0" rIns="0" bIns="0" rtlCol="0" anchor="t"/>
+          <a:lstStyle/>
+          <a:p>
+            <a:pPr indent="0" marL="0">
+              <a:buNone/>
+            </a:pPr>
+            <a:r>
+              <a:rPr lang="en-US" sz="1300" dirty="0">
+                <a:solidFill>
+                  <a:schemeClr val="tx2"/>
+                </a:solidFill>
+              </a:rPr>
+              <a:t>per query for the LLM, vs 3 ms for the classifier</a:t>
+            </a:r>
+            <a:endParaRPr lang="en-US" sz="1300" dirty="0"/>
+          </a:p>
+        </p:txBody>
+      </p:sp>
+      <p:sp>
+        <p:nvSpPr>
+          <p:cNvPr id="8" name="Text 5"/>
+          <p:cNvSpPr txBox="1"/>
+          <p:nvPr/>
+        </p:nvSpPr>
+        <p:spPr>
+          <a:xfrm>
+            <a:off x="8321040" y="5074920"/>
+            <a:ext cx="3383280" cy="822960"/>
+          </a:xfrm>
+          <a:prstGeom prst="rect">
+            <a:avLst/>
+          </a:prstGeom>
+          <a:noFill/>
+          <a:ln/>
+        </p:spPr>
+        <p:txBody>
+          <a:bodyPr wrap="square" lIns="0" tIns="0" rIns="0" bIns="0" rtlCol="0" anchor="t"/>
+          <a:lstStyle/>
+          <a:p>
+            <a:pPr indent="0" marL="0">
+              <a:buNone/>
+            </a:pPr>
+            <a:r>
               <a:rPr lang="en-US" sz="1400" b="1" dirty="0">
                 <a:solidFill>
-                  <a:srgbClr val="1B1F2A"/>
-                </a:solidFill>
-              </a:rPr>
-              <a:t>Biggest effects</a:t>
-            </a:r>
-            <a:endParaRPr lang="en-US" sz="1400" dirty="0"/>
-          </a:p>
-          <a:p>
-            <a:pPr indent="0" marL="0">
-              <a:buNone/>
-            </a:pPr>
-            <a:r>
-              <a:rPr lang="en-US" sz="1400" dirty="0">
-                <a:solidFill>
-                  <a:schemeClr val="tx2"/>
-                </a:solidFill>
-              </a:rPr>
-              <a:t>Dependency-aware plans (+0.279) and the VoI stopping rule (+0.073).</a:t>
-            </a:r>
-            <a:endParaRPr lang="en-US" sz="1400" dirty="0"/>
-          </a:p>
-          <a:p>
-            <a:pPr indent="0" marL="0">
-              <a:buNone/>
-            </a:pPr>
-            <a:r>
-              <a:rPr lang="en-US" sz="800" dirty="0">
-                <a:solidFill>
-                  <a:schemeClr val="tx2"/>
-                </a:solidFill>
-              </a:rPr>
-              <a:t> </a:t>
-            </a:r>
-            <a:endParaRPr lang="en-US" sz="1400" dirty="0"/>
-          </a:p>
-          <a:p>
-            <a:pPr indent="0" marL="0">
-              <a:buNone/>
-            </a:pPr>
-            <a:r>
-              <a:rPr lang="en-US" sz="1400" b="1" dirty="0">
-                <a:solidFill>
-                  <a:srgbClr val="1B1F2A"/>
-                </a:solidFill>
-              </a:rPr>
-              <a:t>Negative bars are trade-offs</a:t>
-            </a:r>
-            <a:endParaRPr lang="en-US" sz="1400" dirty="0"/>
-          </a:p>
-          <a:p>
-            <a:pPr indent="0" marL="0">
-              <a:buNone/>
-            </a:pPr>
-            <a:r>
-              <a:rPr lang="en-US" sz="1400" dirty="0">
-                <a:solidFill>
-                  <a:schemeClr val="tx2"/>
-                </a:solidFill>
-              </a:rPr>
-              <a:t>Cost-awareness, context and exploration each lower success by about 1 point but save 0.17–0.77 m$ per success.</a:t>
-            </a:r>
-            <a:endParaRPr lang="en-US" sz="1400" dirty="0"/>
-          </a:p>
-          <a:p>
-            <a:pPr indent="0" marL="0">
-              <a:buNone/>
-            </a:pPr>
-            <a:r>
-              <a:rPr lang="en-US" sz="800" dirty="0">
-                <a:solidFill>
-                  <a:schemeClr val="tx2"/>
-                </a:solidFill>
-              </a:rPr>
-              <a:t> </a:t>
-            </a:r>
-            <a:endParaRPr lang="en-US" sz="1400" dirty="0"/>
-          </a:p>
-          <a:p>
-            <a:pPr indent="0" marL="0">
-              <a:buNone/>
-            </a:pPr>
-            <a:r>
-              <a:rPr lang="en-US" sz="1400" b="1" dirty="0">
-                <a:solidFill>
-                  <a:srgbClr val="1B1F2A"/>
-                </a:solidFill>
-              </a:rPr>
-              <a:t>No measurable effect</a:t>
-            </a:r>
-            <a:endParaRPr lang="en-US" sz="1400" dirty="0"/>
-          </a:p>
-          <a:p>
-            <a:pPr indent="0" marL="0">
-              <a:buNone/>
-            </a:pPr>
-            <a:r>
-              <a:rPr lang="en-US" sz="1400" dirty="0">
-                <a:solidFill>
-                  <a:schemeClr val="tx2"/>
-                </a:solidFill>
-              </a:rPr>
-              <a:t>Learned reliability and learned latency, in this environment.</a:t>
+                  <a:schemeClr val="tx1"/>
+                </a:solidFill>
+              </a:rPr>
+              <a:t>Small local LLMs are not a free upgrade: understanding errors cap every router.</a:t>
             </a:r>
             <a:endParaRPr lang="en-US" sz="1400" dirty="0"/>
           </a:p>
